--- a/doc/aspectos conceptuales.pptx
+++ b/doc/aspectos conceptuales.pptx
@@ -5,36 +5,44 @@
     <p:sldMasterId id="2147483648" r:id="rId1"/>
   </p:sldMasterIdLst>
   <p:notesMasterIdLst>
-    <p:notesMasterId r:id="rId29"/>
+    <p:notesMasterId r:id="rId37"/>
   </p:notesMasterIdLst>
   <p:sldIdLst>
     <p:sldId id="256" r:id="rId2"/>
     <p:sldId id="285" r:id="rId3"/>
     <p:sldId id="286" r:id="rId4"/>
-    <p:sldId id="287" r:id="rId5"/>
-    <p:sldId id="257" r:id="rId6"/>
-    <p:sldId id="273" r:id="rId7"/>
-    <p:sldId id="262" r:id="rId8"/>
-    <p:sldId id="263" r:id="rId9"/>
-    <p:sldId id="264" r:id="rId10"/>
-    <p:sldId id="276" r:id="rId11"/>
-    <p:sldId id="265" r:id="rId12"/>
-    <p:sldId id="266" r:id="rId13"/>
-    <p:sldId id="267" r:id="rId14"/>
-    <p:sldId id="268" r:id="rId15"/>
-    <p:sldId id="269" r:id="rId16"/>
-    <p:sldId id="260" r:id="rId17"/>
-    <p:sldId id="271" r:id="rId18"/>
-    <p:sldId id="274" r:id="rId19"/>
-    <p:sldId id="275" r:id="rId20"/>
-    <p:sldId id="277" r:id="rId21"/>
-    <p:sldId id="279" r:id="rId22"/>
-    <p:sldId id="280" r:id="rId23"/>
-    <p:sldId id="283" r:id="rId24"/>
-    <p:sldId id="284" r:id="rId25"/>
-    <p:sldId id="281" r:id="rId26"/>
-    <p:sldId id="282" r:id="rId27"/>
-    <p:sldId id="272" r:id="rId28"/>
+    <p:sldId id="288" r:id="rId5"/>
+    <p:sldId id="289" r:id="rId6"/>
+    <p:sldId id="293" r:id="rId7"/>
+    <p:sldId id="290" r:id="rId8"/>
+    <p:sldId id="291" r:id="rId9"/>
+    <p:sldId id="292" r:id="rId10"/>
+    <p:sldId id="287" r:id="rId11"/>
+    <p:sldId id="257" r:id="rId12"/>
+    <p:sldId id="273" r:id="rId13"/>
+    <p:sldId id="262" r:id="rId14"/>
+    <p:sldId id="294" r:id="rId15"/>
+    <p:sldId id="295" r:id="rId16"/>
+    <p:sldId id="263" r:id="rId17"/>
+    <p:sldId id="264" r:id="rId18"/>
+    <p:sldId id="276" r:id="rId19"/>
+    <p:sldId id="265" r:id="rId20"/>
+    <p:sldId id="266" r:id="rId21"/>
+    <p:sldId id="267" r:id="rId22"/>
+    <p:sldId id="268" r:id="rId23"/>
+    <p:sldId id="269" r:id="rId24"/>
+    <p:sldId id="260" r:id="rId25"/>
+    <p:sldId id="271" r:id="rId26"/>
+    <p:sldId id="274" r:id="rId27"/>
+    <p:sldId id="275" r:id="rId28"/>
+    <p:sldId id="277" r:id="rId29"/>
+    <p:sldId id="279" r:id="rId30"/>
+    <p:sldId id="280" r:id="rId31"/>
+    <p:sldId id="283" r:id="rId32"/>
+    <p:sldId id="284" r:id="rId33"/>
+    <p:sldId id="281" r:id="rId34"/>
+    <p:sldId id="282" r:id="rId35"/>
+    <p:sldId id="272" r:id="rId36"/>
   </p:sldIdLst>
   <p:sldSz cx="12192000" cy="6858000"/>
   <p:notesSz cx="6858000" cy="9144000"/>
@@ -147,32 +155,6 @@
 </p188:authorLst>
 </file>
 
-<file path=ppt/comments/modernComment_10A_77442455.xml><?xml version="1.0" encoding="utf-8"?>
-<p188:cmLst xmlns:a="http://schemas.openxmlformats.org/drawingml/2006/main" xmlns:r="http://schemas.openxmlformats.org/officeDocument/2006/relationships" xmlns:p188="http://schemas.microsoft.com/office/powerpoint/2018/8/main">
-  <p188:cm id="{E9602AFA-C50D-44C1-AA02-856377873A8C}" authorId="{5F5084F0-A6C4-C578-9AE7-B10C524F5785}" created="2025-10-27T15:05:11.395">
-    <ac:txMkLst xmlns:ac="http://schemas.microsoft.com/office/drawing/2013/main/command">
-      <pc:docMk xmlns:pc="http://schemas.microsoft.com/office/powerpoint/2013/main/command"/>
-      <pc:sldMk xmlns:pc="http://schemas.microsoft.com/office/powerpoint/2013/main/command" cId="2000954453" sldId="266"/>
-      <ac:spMk id="10" creationId="{CFF62F81-80D5-A60E-BF44-1804B01232D0}"/>
-      <ac:txMk cp="134" len="7">
-        <ac:context len="274" hash="1507418816"/>
-      </ac:txMk>
-    </ac:txMkLst>
-    <p188:pos x="3170938" y="487666"/>
-    <p188:txBody>
-      <a:bodyPr/>
-      <a:lstStyle/>
-      <a:p>
-        <a:r>
-          <a:rPr lang="es-MX"/>
-          <a:t>Utilicé esta palabra porque es la que los autores usan en su trabajo.</a:t>
-        </a:r>
-      </a:p>
-    </p188:txBody>
-  </p188:cm>
-</p188:cmLst>
-</file>
-
 <file path=ppt/notesMasters/notesMaster1.xml><?xml version="1.0" encoding="utf-8"?>
 <p:notesMaster xmlns:a="http://schemas.openxmlformats.org/drawingml/2006/main" xmlns:r="http://schemas.openxmlformats.org/officeDocument/2006/relationships" xmlns:p="http://schemas.openxmlformats.org/presentationml/2006/main">
   <p:cSld>
@@ -255,7 +237,7 @@
           <a:p>
             <a:fld id="{E676F4CC-8EEC-4B7D-8690-FE5A2CF4A996}" type="datetimeFigureOut">
               <a:rPr lang="es-MX" smtClean="0"/>
-              <a:t>04/11/2025</a:t>
+              <a:t>07/11/2025</a:t>
             </a:fld>
             <a:endParaRPr lang="es-MX"/>
           </a:p>
@@ -860,7 +842,7 @@
           <a:p>
             <a:fld id="{106B6AF6-8D20-47C3-B043-A4175CDAFA80}" type="slidenum">
               <a:rPr lang="es-MX" smtClean="0"/>
-              <a:t>4</a:t>
+              <a:t>10</a:t>
             </a:fld>
             <a:endParaRPr lang="es-MX"/>
           </a:p>
@@ -1038,7 +1020,7 @@
           <a:p>
             <a:fld id="{106B6AF6-8D20-47C3-B043-A4175CDAFA80}" type="slidenum">
               <a:rPr lang="es-MX" smtClean="0"/>
-              <a:t>6</a:t>
+              <a:t>12</a:t>
             </a:fld>
             <a:endParaRPr lang="es-MX"/>
           </a:p>
@@ -1216,7 +1198,7 @@
           <a:p>
             <a:fld id="{106B6AF6-8D20-47C3-B043-A4175CDAFA80}" type="slidenum">
               <a:rPr lang="es-MX" smtClean="0"/>
-              <a:t>10</a:t>
+              <a:t>18</a:t>
             </a:fld>
             <a:endParaRPr lang="es-MX"/>
           </a:p>
@@ -1370,7 +1352,7 @@
           <a:p>
             <a:fld id="{106B6AF6-8D20-47C3-B043-A4175CDAFA80}" type="slidenum">
               <a:rPr lang="es-MX" smtClean="0"/>
-              <a:t>16</a:t>
+              <a:t>24</a:t>
             </a:fld>
             <a:endParaRPr lang="es-MX"/>
           </a:p>
@@ -1481,7 +1463,7 @@
           <a:p>
             <a:fld id="{106B6AF6-8D20-47C3-B043-A4175CDAFA80}" type="slidenum">
               <a:rPr lang="es-MX" smtClean="0"/>
-              <a:t>18</a:t>
+              <a:t>26</a:t>
             </a:fld>
             <a:endParaRPr lang="es-MX"/>
           </a:p>
@@ -1589,7 +1571,7 @@
           <a:p>
             <a:fld id="{106B6AF6-8D20-47C3-B043-A4175CDAFA80}" type="slidenum">
               <a:rPr lang="es-MX" smtClean="0"/>
-              <a:t>19</a:t>
+              <a:t>27</a:t>
             </a:fld>
             <a:endParaRPr lang="es-MX"/>
           </a:p>
@@ -1700,7 +1682,7 @@
           <a:p>
             <a:fld id="{106B6AF6-8D20-47C3-B043-A4175CDAFA80}" type="slidenum">
               <a:rPr lang="es-MX" smtClean="0"/>
-              <a:t>21</a:t>
+              <a:t>29</a:t>
             </a:fld>
             <a:endParaRPr lang="es-MX"/>
           </a:p>
@@ -1868,7 +1850,7 @@
           <a:p>
             <a:fld id="{D207358E-6E89-42EC-A39F-28F52F3BB1DC}" type="datetimeFigureOut">
               <a:rPr lang="es-GT" smtClean="0"/>
-              <a:t>04/11/2025</a:t>
+              <a:t>07/11/2025</a:t>
             </a:fld>
             <a:endParaRPr lang="es-GT"/>
           </a:p>
@@ -2068,7 +2050,7 @@
           <a:p>
             <a:fld id="{D207358E-6E89-42EC-A39F-28F52F3BB1DC}" type="datetimeFigureOut">
               <a:rPr lang="es-GT" smtClean="0"/>
-              <a:t>04/11/2025</a:t>
+              <a:t>07/11/2025</a:t>
             </a:fld>
             <a:endParaRPr lang="es-GT"/>
           </a:p>
@@ -2278,7 +2260,7 @@
           <a:p>
             <a:fld id="{D207358E-6E89-42EC-A39F-28F52F3BB1DC}" type="datetimeFigureOut">
               <a:rPr lang="es-GT" smtClean="0"/>
-              <a:t>04/11/2025</a:t>
+              <a:t>07/11/2025</a:t>
             </a:fld>
             <a:endParaRPr lang="es-GT"/>
           </a:p>
@@ -2478,7 +2460,7 @@
           <a:p>
             <a:fld id="{D207358E-6E89-42EC-A39F-28F52F3BB1DC}" type="datetimeFigureOut">
               <a:rPr lang="es-GT" smtClean="0"/>
-              <a:t>04/11/2025</a:t>
+              <a:t>07/11/2025</a:t>
             </a:fld>
             <a:endParaRPr lang="es-GT"/>
           </a:p>
@@ -2754,7 +2736,7 @@
           <a:p>
             <a:fld id="{D207358E-6E89-42EC-A39F-28F52F3BB1DC}" type="datetimeFigureOut">
               <a:rPr lang="es-GT" smtClean="0"/>
-              <a:t>04/11/2025</a:t>
+              <a:t>07/11/2025</a:t>
             </a:fld>
             <a:endParaRPr lang="es-GT"/>
           </a:p>
@@ -3022,7 +3004,7 @@
           <a:p>
             <a:fld id="{D207358E-6E89-42EC-A39F-28F52F3BB1DC}" type="datetimeFigureOut">
               <a:rPr lang="es-GT" smtClean="0"/>
-              <a:t>04/11/2025</a:t>
+              <a:t>07/11/2025</a:t>
             </a:fld>
             <a:endParaRPr lang="es-GT"/>
           </a:p>
@@ -3437,7 +3419,7 @@
           <a:p>
             <a:fld id="{D207358E-6E89-42EC-A39F-28F52F3BB1DC}" type="datetimeFigureOut">
               <a:rPr lang="es-GT" smtClean="0"/>
-              <a:t>04/11/2025</a:t>
+              <a:t>07/11/2025</a:t>
             </a:fld>
             <a:endParaRPr lang="es-GT"/>
           </a:p>
@@ -3579,7 +3561,7 @@
           <a:p>
             <a:fld id="{D207358E-6E89-42EC-A39F-28F52F3BB1DC}" type="datetimeFigureOut">
               <a:rPr lang="es-GT" smtClean="0"/>
-              <a:t>04/11/2025</a:t>
+              <a:t>07/11/2025</a:t>
             </a:fld>
             <a:endParaRPr lang="es-GT"/>
           </a:p>
@@ -3692,7 +3674,7 @@
           <a:p>
             <a:fld id="{D207358E-6E89-42EC-A39F-28F52F3BB1DC}" type="datetimeFigureOut">
               <a:rPr lang="es-GT" smtClean="0"/>
-              <a:t>04/11/2025</a:t>
+              <a:t>07/11/2025</a:t>
             </a:fld>
             <a:endParaRPr lang="es-GT"/>
           </a:p>
@@ -4005,7 +3987,7 @@
           <a:p>
             <a:fld id="{D207358E-6E89-42EC-A39F-28F52F3BB1DC}" type="datetimeFigureOut">
               <a:rPr lang="es-GT" smtClean="0"/>
-              <a:t>04/11/2025</a:t>
+              <a:t>07/11/2025</a:t>
             </a:fld>
             <a:endParaRPr lang="es-GT"/>
           </a:p>
@@ -4294,7 +4276,7 @@
           <a:p>
             <a:fld id="{D207358E-6E89-42EC-A39F-28F52F3BB1DC}" type="datetimeFigureOut">
               <a:rPr lang="es-GT" smtClean="0"/>
-              <a:t>04/11/2025</a:t>
+              <a:t>07/11/2025</a:t>
             </a:fld>
             <a:endParaRPr lang="es-GT"/>
           </a:p>
@@ -4537,7 +4519,7 @@
           <a:p>
             <a:fld id="{D207358E-6E89-42EC-A39F-28F52F3BB1DC}" type="datetimeFigureOut">
               <a:rPr lang="es-GT" smtClean="0"/>
-              <a:t>04/11/2025</a:t>
+              <a:t>07/11/2025</a:t>
             </a:fld>
             <a:endParaRPr lang="es-GT"/>
           </a:p>
@@ -5069,7 +5051,7 @@
         <p:cNvPr id="1" name="">
           <a:extLst>
             <a:ext uri="{FF2B5EF4-FFF2-40B4-BE49-F238E27FC236}">
-              <a16:creationId xmlns:a16="http://schemas.microsoft.com/office/drawing/2014/main" id="{692FA0C2-07B7-FF77-4014-C96B90F89972}"/>
+              <a16:creationId xmlns:a16="http://schemas.microsoft.com/office/drawing/2014/main" id="{EB6AA1A9-8DB9-8217-6799-61188BA14BE4}"/>
             </a:ext>
           </a:extLst>
         </p:cNvPr>
@@ -5089,7 +5071,7 @@
           <p:cNvPr id="13" name="Imagen 12">
             <a:extLst>
               <a:ext uri="{FF2B5EF4-FFF2-40B4-BE49-F238E27FC236}">
-                <a16:creationId xmlns:a16="http://schemas.microsoft.com/office/drawing/2014/main" id="{714356D2-3401-7CC0-D922-B47F1D9E4D74}"/>
+                <a16:creationId xmlns:a16="http://schemas.microsoft.com/office/drawing/2014/main" id="{AB09F7BA-0A85-1EAF-B696-43D631D42693}"/>
               </a:ext>
             </a:extLst>
           </p:cNvPr>
@@ -5119,7 +5101,7 @@
           <p:cNvPr id="4" name="CuadroTexto 3">
             <a:extLst>
               <a:ext uri="{FF2B5EF4-FFF2-40B4-BE49-F238E27FC236}">
-                <a16:creationId xmlns:a16="http://schemas.microsoft.com/office/drawing/2014/main" id="{5E7A8AC5-54C2-29E5-96AE-BF39D1DF35E0}"/>
+                <a16:creationId xmlns:a16="http://schemas.microsoft.com/office/drawing/2014/main" id="{A6C8FC43-76E7-592A-8555-D7EDEA428B80}"/>
               </a:ext>
             </a:extLst>
           </p:cNvPr>
@@ -5128,8 +5110,8 @@
         </p:nvSpPr>
         <p:spPr>
           <a:xfrm>
-            <a:off x="3367825" y="2274838"/>
-            <a:ext cx="5364049" cy="2308324"/>
+            <a:off x="3575381" y="2357717"/>
+            <a:ext cx="4671072" cy="1569660"/>
           </a:xfrm>
           <a:prstGeom prst="rect">
             <a:avLst/>
@@ -5150,7 +5132,7 @@
                 </a:solidFill>
                 <a:latin typeface="Libre Franklin" pitchFamily="2" charset="0"/>
               </a:rPr>
-              <a:t>Argumentos a favor de inflación positiva</a:t>
+              <a:t>Costos de la inflación</a:t>
             </a:r>
           </a:p>
         </p:txBody>
@@ -5158,7 +5140,7 @@
     </p:spTree>
     <p:extLst>
       <p:ext uri="{BB962C8B-B14F-4D97-AF65-F5344CB8AC3E}">
-        <p14:creationId xmlns:p14="http://schemas.microsoft.com/office/powerpoint/2010/main" val="2821158319"/>
+        <p14:creationId xmlns:p14="http://schemas.microsoft.com/office/powerpoint/2010/main" val="2224759434"/>
       </p:ext>
     </p:extLst>
   </p:cSld>
@@ -5173,13 +5155,7 @@
   <p:cSld>
     <p:spTree>
       <p:nvGrpSpPr>
-        <p:cNvPr id="1" name="">
-          <a:extLst>
-            <a:ext uri="{FF2B5EF4-FFF2-40B4-BE49-F238E27FC236}">
-              <a16:creationId xmlns:a16="http://schemas.microsoft.com/office/drawing/2014/main" id="{EEC423FC-4400-9444-7F14-3C262EFC325C}"/>
-            </a:ext>
-          </a:extLst>
-        </p:cNvPr>
+        <p:cNvPr id="1" name=""/>
         <p:cNvGrpSpPr/>
         <p:nvPr/>
       </p:nvGrpSpPr>
@@ -5196,7 +5172,7 @@
           <p:cNvPr id="2" name="Título 1">
             <a:extLst>
               <a:ext uri="{FF2B5EF4-FFF2-40B4-BE49-F238E27FC236}">
-                <a16:creationId xmlns:a16="http://schemas.microsoft.com/office/drawing/2014/main" id="{68843A37-25C7-9ADA-FF5F-F9135FE7022F}"/>
+                <a16:creationId xmlns:a16="http://schemas.microsoft.com/office/drawing/2014/main" id="{654E0456-9D0A-458C-8A2E-EC9E7705C955}"/>
               </a:ext>
             </a:extLst>
           </p:cNvPr>
@@ -5221,7 +5197,7 @@
           <p:cNvPr id="3" name="Subtítulo 2">
             <a:extLst>
               <a:ext uri="{FF2B5EF4-FFF2-40B4-BE49-F238E27FC236}">
-                <a16:creationId xmlns:a16="http://schemas.microsoft.com/office/drawing/2014/main" id="{85193844-5CDD-7E71-0501-D5CC192D4B06}"/>
+                <a16:creationId xmlns:a16="http://schemas.microsoft.com/office/drawing/2014/main" id="{0D8893AB-0534-4B88-9B3D-6ABA4EB9FE3F}"/>
               </a:ext>
             </a:extLst>
           </p:cNvPr>
@@ -5246,7 +5222,7 @@
           <p:cNvPr id="6" name="Imagen 5">
             <a:extLst>
               <a:ext uri="{FF2B5EF4-FFF2-40B4-BE49-F238E27FC236}">
-                <a16:creationId xmlns:a16="http://schemas.microsoft.com/office/drawing/2014/main" id="{C79C6AC4-4583-04F6-1636-C5E07A632967}"/>
+                <a16:creationId xmlns:a16="http://schemas.microsoft.com/office/drawing/2014/main" id="{0C209CE5-AFD2-4CA7-8D90-C1E60E946553}"/>
               </a:ext>
             </a:extLst>
           </p:cNvPr>
@@ -5282,7 +5258,7 @@
           <p:cNvPr id="7" name="CuadroTexto 6">
             <a:extLst>
               <a:ext uri="{FF2B5EF4-FFF2-40B4-BE49-F238E27FC236}">
-                <a16:creationId xmlns:a16="http://schemas.microsoft.com/office/drawing/2014/main" id="{CFB18E91-8199-4AC3-611E-160BBD7EA8CE}"/>
+                <a16:creationId xmlns:a16="http://schemas.microsoft.com/office/drawing/2014/main" id="{0BBF9201-58C7-4E4D-ABE8-980848FA6D59}"/>
               </a:ext>
             </a:extLst>
           </p:cNvPr>
@@ -5309,7 +5285,7 @@
               <a:rPr lang="es-ES" sz="2800" b="1" dirty="0">
                 <a:latin typeface="Libre Franklin" pitchFamily="2" charset="0"/>
               </a:rPr>
-              <a:t>Argumentos a favor de una inflación positiva</a:t>
+              <a:t>Aspectos conceptuales de la inflación</a:t>
             </a:r>
             <a:endParaRPr lang="es-GT" b="1" dirty="0">
               <a:latin typeface="Libre Franklin" pitchFamily="2" charset="0"/>
@@ -5322,7 +5298,7 @@
           <p:cNvPr id="8" name="Conector recto 7">
             <a:extLst>
               <a:ext uri="{FF2B5EF4-FFF2-40B4-BE49-F238E27FC236}">
-                <a16:creationId xmlns:a16="http://schemas.microsoft.com/office/drawing/2014/main" id="{7B58A893-5585-FAF8-3236-E2609A3B686C}"/>
+                <a16:creationId xmlns:a16="http://schemas.microsoft.com/office/drawing/2014/main" id="{41A554FA-D2F8-4E55-B343-5244ABC3AFF3}"/>
               </a:ext>
             </a:extLst>
           </p:cNvPr>
@@ -5334,7 +5310,7 @@
         <p:spPr>
           <a:xfrm>
             <a:off x="265471" y="730459"/>
-            <a:ext cx="7655036" cy="0"/>
+            <a:ext cx="6430297" cy="0"/>
           </a:xfrm>
           <a:prstGeom prst="line">
             <a:avLst/>
@@ -5362,10 +5338,62 @@
       </p:cxnSp>
       <p:sp>
         <p:nvSpPr>
-          <p:cNvPr id="4" name="CuadroTexto 3">
-            <a:extLst>
-              <a:ext uri="{FF2B5EF4-FFF2-40B4-BE49-F238E27FC236}">
-                <a16:creationId xmlns:a16="http://schemas.microsoft.com/office/drawing/2014/main" id="{937C6AA0-7B94-BE1D-A404-1E916823BC60}"/>
+          <p:cNvPr id="9" name="Elipse 8">
+            <a:extLst>
+              <a:ext uri="{FF2B5EF4-FFF2-40B4-BE49-F238E27FC236}">
+                <a16:creationId xmlns:a16="http://schemas.microsoft.com/office/drawing/2014/main" id="{627394BC-6D40-41E5-97F0-3D4AF919DAD6}"/>
+              </a:ext>
+            </a:extLst>
+          </p:cNvPr>
+          <p:cNvSpPr/>
+          <p:nvPr/>
+        </p:nvSpPr>
+        <p:spPr>
+          <a:xfrm>
+            <a:off x="582224" y="1068363"/>
+            <a:ext cx="108000" cy="108000"/>
+          </a:xfrm>
+          <a:prstGeom prst="ellipse">
+            <a:avLst/>
+          </a:prstGeom>
+          <a:solidFill>
+            <a:schemeClr val="accent2"/>
+          </a:solidFill>
+          <a:ln>
+            <a:noFill/>
+          </a:ln>
+        </p:spPr>
+        <p:style>
+          <a:lnRef idx="2">
+            <a:schemeClr val="accent1">
+              <a:shade val="50000"/>
+            </a:schemeClr>
+          </a:lnRef>
+          <a:fillRef idx="1">
+            <a:schemeClr val="accent1"/>
+          </a:fillRef>
+          <a:effectRef idx="0">
+            <a:schemeClr val="accent1"/>
+          </a:effectRef>
+          <a:fontRef idx="minor">
+            <a:schemeClr val="lt1"/>
+          </a:fontRef>
+        </p:style>
+        <p:txBody>
+          <a:bodyPr rtlCol="0" anchor="ctr"/>
+          <a:lstStyle/>
+          <a:p>
+            <a:pPr algn="ctr"/>
+            <a:endParaRPr lang="es-GT"/>
+          </a:p>
+        </p:txBody>
+      </p:sp>
+      <p:sp>
+        <p:nvSpPr>
+          <p:cNvPr id="10" name="CuadroTexto 9">
+            <a:extLst>
+              <a:ext uri="{FF2B5EF4-FFF2-40B4-BE49-F238E27FC236}">
+                <a16:creationId xmlns:a16="http://schemas.microsoft.com/office/drawing/2014/main" id="{6091F251-68D4-4990-A661-823B8FC87A9C}"/>
               </a:ext>
             </a:extLst>
           </p:cNvPr>
@@ -5374,7 +5402,7 @@
         </p:nvSpPr>
         <p:spPr>
           <a:xfrm>
-            <a:off x="490600" y="876271"/>
+            <a:off x="690224" y="922307"/>
             <a:ext cx="9899117" cy="400110"/>
           </a:xfrm>
           <a:prstGeom prst="rect">
@@ -5392,9 +5420,9 @@
               <a:rPr lang="es-ES" sz="2000" b="1" dirty="0">
                 <a:latin typeface="Libre Franklin" pitchFamily="2" charset="0"/>
               </a:rPr>
-              <a:t>Reduce las distorsiones en los precios relativos</a:t>
-            </a:r>
-            <a:endParaRPr lang="es-ES" sz="2000" dirty="0">
+              <a:t>Costos</a:t>
+            </a:r>
+            <a:endParaRPr lang="es-GT" b="1" dirty="0">
               <a:latin typeface="Libre Franklin" pitchFamily="2" charset="0"/>
             </a:endParaRPr>
           </a:p>
@@ -5402,10 +5430,10 @@
       </p:sp>
       <p:sp>
         <p:nvSpPr>
-          <p:cNvPr id="15" name="CuadroTexto 14">
-            <a:extLst>
-              <a:ext uri="{FF2B5EF4-FFF2-40B4-BE49-F238E27FC236}">
-                <a16:creationId xmlns:a16="http://schemas.microsoft.com/office/drawing/2014/main" id="{D1A0DD47-6E41-D9E8-0966-9354349F7AD8}"/>
+          <p:cNvPr id="11" name="CuadroTexto 10">
+            <a:extLst>
+              <a:ext uri="{FF2B5EF4-FFF2-40B4-BE49-F238E27FC236}">
+                <a16:creationId xmlns:a16="http://schemas.microsoft.com/office/drawing/2014/main" id="{87D7D931-49AF-4697-AA0B-140B7ADA1D91}"/>
               </a:ext>
             </a:extLst>
           </p:cNvPr>
@@ -5414,8 +5442,8 @@
         </p:nvSpPr>
         <p:spPr>
           <a:xfrm>
-            <a:off x="477591" y="1337807"/>
-            <a:ext cx="11396730" cy="2031325"/>
+            <a:off x="1085481" y="1421745"/>
+            <a:ext cx="10453657" cy="2809359"/>
           </a:xfrm>
           <a:prstGeom prst="rect">
             <a:avLst/>
@@ -5423,107 +5451,97 @@
           <a:noFill/>
         </p:spPr>
         <p:txBody>
-          <a:bodyPr wrap="square">
-            <a:spAutoFit/>
-          </a:bodyPr>
-          <a:lstStyle/>
-          <a:p>
-            <a:pPr algn="just"/>
-            <a:r>
-              <a:rPr lang="es-MX" dirty="0">
-                <a:latin typeface="Libre Franklin" pitchFamily="2" charset="0"/>
-              </a:rPr>
-              <a:t>Con bastante regularidad los precios de los productos no se ajustan de forma continua. En contextos de alta inflación o deflación se generan grandes distorsiones en los precios relativos.</a:t>
-            </a:r>
-          </a:p>
-          <a:p>
-            <a:pPr algn="just"/>
-            <a:endParaRPr lang="es-MX" dirty="0">
-              <a:latin typeface="Libre Franklin" pitchFamily="2" charset="0"/>
-            </a:endParaRPr>
-          </a:p>
-          <a:p>
-            <a:pPr marL="285750" indent="-285750" algn="just">
-              <a:buFont typeface="Arial" panose="020B0604020202020204" pitchFamily="34" charset="0"/>
-              <a:buChar char="•"/>
-            </a:pPr>
-            <a:r>
-              <a:rPr lang="es-MX" dirty="0">
-                <a:latin typeface="Libre Franklin" pitchFamily="2" charset="0"/>
-              </a:rPr>
-              <a:t>Si el precio de un bien no se ajusta con suficiente velocidad experimenta caídas de sus precios relativos</a:t>
-            </a:r>
-          </a:p>
-          <a:p>
-            <a:pPr algn="just"/>
-            <a:endParaRPr lang="es-MX" dirty="0">
-              <a:latin typeface="Libre Franklin" pitchFamily="2" charset="0"/>
-            </a:endParaRPr>
-          </a:p>
-          <a:p>
-            <a:pPr marL="285750" indent="-285750" algn="just">
-              <a:buFont typeface="Arial" panose="020B0604020202020204" pitchFamily="34" charset="0"/>
-              <a:buChar char="•"/>
-            </a:pPr>
-            <a:r>
-              <a:rPr lang="es-MX" dirty="0">
-                <a:latin typeface="Libre Franklin" pitchFamily="2" charset="0"/>
-              </a:rPr>
-              <a:t>En contextos inflacionarios las empresas sobre reaccionan elevando los precios al alza anticipando una caída en sus precios relativos.</a:t>
-            </a:r>
-            <a:endParaRPr lang="es-GT" dirty="0">
-              <a:latin typeface="Libre Franklin" pitchFamily="2" charset="0"/>
-            </a:endParaRPr>
-          </a:p>
-        </p:txBody>
-      </p:sp>
-      <p:sp>
-        <p:nvSpPr>
-          <p:cNvPr id="5" name="CuadroTexto 4">
-            <a:extLst>
-              <a:ext uri="{FF2B5EF4-FFF2-40B4-BE49-F238E27FC236}">
-                <a16:creationId xmlns:a16="http://schemas.microsoft.com/office/drawing/2014/main" id="{85E7B71F-41C3-F74E-6AEA-E731DBD8928E}"/>
-              </a:ext>
-            </a:extLst>
-          </p:cNvPr>
-          <p:cNvSpPr txBox="1"/>
-          <p:nvPr/>
-        </p:nvSpPr>
-        <p:spPr>
-          <a:xfrm>
-            <a:off x="605307" y="3747978"/>
-            <a:ext cx="10837572" cy="369332"/>
-          </a:xfrm>
-          <a:prstGeom prst="rect">
-            <a:avLst/>
-          </a:prstGeom>
-          <a:noFill/>
-        </p:spPr>
-        <p:txBody>
           <a:bodyPr wrap="square" rtlCol="0">
             <a:spAutoFit/>
           </a:bodyPr>
           <a:lstStyle/>
           <a:p>
-            <a:r>
-              <a:rPr lang="es-MX" dirty="0">
-                <a:latin typeface="Libre Franklin" pitchFamily="2" charset="0"/>
-              </a:rPr>
-              <a:t>Ante lo anterior cabe la pregunta </a:t>
-            </a:r>
-            <a:r>
-              <a:rPr lang="es-MX" b="1" i="1" dirty="0">
-                <a:latin typeface="Libre Franklin" pitchFamily="2" charset="0"/>
-              </a:rPr>
-              <a:t>¿Cuál sería la inflación optima que minimice las distorsiones?</a:t>
-            </a:r>
+            <a:pPr>
+              <a:lnSpc>
+                <a:spcPct val="150000"/>
+              </a:lnSpc>
+            </a:pPr>
+            <a:r>
+              <a:rPr lang="es-ES" sz="2000" dirty="0">
+                <a:latin typeface="Libre Franklin" pitchFamily="2" charset="0"/>
+              </a:rPr>
+              <a:t>1- Erosión del poder adquisitivo de los hogares</a:t>
+            </a:r>
+          </a:p>
+          <a:p>
+            <a:pPr>
+              <a:lnSpc>
+                <a:spcPct val="150000"/>
+              </a:lnSpc>
+            </a:pPr>
+            <a:r>
+              <a:rPr lang="es-ES" sz="2000" dirty="0">
+                <a:latin typeface="Libre Franklin" pitchFamily="2" charset="0"/>
+              </a:rPr>
+              <a:t>2- Aumento de costos de producción para las empresas</a:t>
+            </a:r>
+          </a:p>
+          <a:p>
+            <a:pPr>
+              <a:lnSpc>
+                <a:spcPct val="150000"/>
+              </a:lnSpc>
+            </a:pPr>
+            <a:r>
+              <a:rPr lang="es-ES" sz="2000" dirty="0">
+                <a:latin typeface="Libre Franklin" pitchFamily="2" charset="0"/>
+              </a:rPr>
+              <a:t>3- Pérdida de competitividad (apreciación del tipo de cambio real)</a:t>
+            </a:r>
+          </a:p>
+          <a:p>
+            <a:pPr>
+              <a:lnSpc>
+                <a:spcPct val="150000"/>
+              </a:lnSpc>
+            </a:pPr>
+            <a:r>
+              <a:rPr lang="es-ES" sz="2000" dirty="0">
+                <a:latin typeface="Libre Franklin" pitchFamily="2" charset="0"/>
+              </a:rPr>
+              <a:t>4- Efecto redistributivo del ingreso y la riqueza en perjuicio de los hogares con menos</a:t>
+            </a:r>
+          </a:p>
+          <a:p>
+            <a:pPr>
+              <a:lnSpc>
+                <a:spcPct val="150000"/>
+              </a:lnSpc>
+            </a:pPr>
+            <a:r>
+              <a:rPr lang="es-ES" sz="2000" dirty="0">
+                <a:latin typeface="Libre Franklin" pitchFamily="2" charset="0"/>
+              </a:rPr>
+              <a:t>      recursos</a:t>
+            </a:r>
+          </a:p>
+          <a:p>
+            <a:pPr>
+              <a:lnSpc>
+                <a:spcPct val="150000"/>
+              </a:lnSpc>
+            </a:pPr>
+            <a:r>
+              <a:rPr lang="es-ES" sz="2000" dirty="0">
+                <a:latin typeface="Libre Franklin" pitchFamily="2" charset="0"/>
+              </a:rPr>
+              <a:t>5- Genera distorsiones en los precios relativos</a:t>
+            </a:r>
+            <a:endParaRPr lang="es-GT" sz="2000" dirty="0">
+              <a:latin typeface="Libre Franklin" pitchFamily="2" charset="0"/>
+            </a:endParaRPr>
           </a:p>
         </p:txBody>
       </p:sp>
     </p:spTree>
     <p:extLst>
       <p:ext uri="{BB962C8B-B14F-4D97-AF65-F5344CB8AC3E}">
-        <p14:creationId xmlns:p14="http://schemas.microsoft.com/office/powerpoint/2010/main" val="3735086557"/>
+        <p14:creationId xmlns:p14="http://schemas.microsoft.com/office/powerpoint/2010/main" val="4219919932"/>
       </p:ext>
     </p:extLst>
   </p:cSld>
@@ -5541,7 +5559,7 @@
         <p:cNvPr id="1" name="">
           <a:extLst>
             <a:ext uri="{FF2B5EF4-FFF2-40B4-BE49-F238E27FC236}">
-              <a16:creationId xmlns:a16="http://schemas.microsoft.com/office/drawing/2014/main" id="{C7B4D007-084B-3E92-BF81-CB032CD84084}"/>
+              <a16:creationId xmlns:a16="http://schemas.microsoft.com/office/drawing/2014/main" id="{EB6AA1A9-8DB9-8217-6799-61188BA14BE4}"/>
             </a:ext>
           </a:extLst>
         </p:cNvPr>
@@ -5556,12 +5574,119 @@
           <a:chExt cx="0" cy="0"/>
         </a:xfrm>
       </p:grpSpPr>
+      <p:pic>
+        <p:nvPicPr>
+          <p:cNvPr id="13" name="Imagen 12">
+            <a:extLst>
+              <a:ext uri="{FF2B5EF4-FFF2-40B4-BE49-F238E27FC236}">
+                <a16:creationId xmlns:a16="http://schemas.microsoft.com/office/drawing/2014/main" id="{AB09F7BA-0A85-1EAF-B696-43D631D42693}"/>
+              </a:ext>
+            </a:extLst>
+          </p:cNvPr>
+          <p:cNvPicPr>
+            <a:picLocks noChangeAspect="1"/>
+          </p:cNvPicPr>
+          <p:nvPr/>
+        </p:nvPicPr>
+        <p:blipFill>
+          <a:blip r:embed="rId3"/>
+          <a:stretch>
+            <a:fillRect/>
+          </a:stretch>
+        </p:blipFill>
+        <p:spPr>
+          <a:xfrm>
+            <a:off x="-1" y="0"/>
+            <a:ext cx="12208956" cy="6858000"/>
+          </a:xfrm>
+          <a:prstGeom prst="rect">
+            <a:avLst/>
+          </a:prstGeom>
+        </p:spPr>
+      </p:pic>
+      <p:sp>
+        <p:nvSpPr>
+          <p:cNvPr id="4" name="CuadroTexto 3">
+            <a:extLst>
+              <a:ext uri="{FF2B5EF4-FFF2-40B4-BE49-F238E27FC236}">
+                <a16:creationId xmlns:a16="http://schemas.microsoft.com/office/drawing/2014/main" id="{A6C8FC43-76E7-592A-8555-D7EDEA428B80}"/>
+              </a:ext>
+            </a:extLst>
+          </p:cNvPr>
+          <p:cNvSpPr txBox="1"/>
+          <p:nvPr/>
+        </p:nvSpPr>
+        <p:spPr>
+          <a:xfrm>
+            <a:off x="3575381" y="2357717"/>
+            <a:ext cx="4671072" cy="2308324"/>
+          </a:xfrm>
+          <a:prstGeom prst="rect">
+            <a:avLst/>
+          </a:prstGeom>
+          <a:noFill/>
+        </p:spPr>
+        <p:txBody>
+          <a:bodyPr wrap="square" rtlCol="0">
+            <a:spAutoFit/>
+          </a:bodyPr>
+          <a:lstStyle/>
+          <a:p>
+            <a:pPr algn="ctr"/>
+            <a:r>
+              <a:rPr lang="es-MX" sz="4800" b="1" dirty="0">
+                <a:solidFill>
+                  <a:schemeClr val="bg1"/>
+                </a:solidFill>
+                <a:latin typeface="Libre Franklin" pitchFamily="2" charset="0"/>
+              </a:rPr>
+              <a:t>Inconvenientes estadísticos de inflación cero</a:t>
+            </a:r>
+          </a:p>
+        </p:txBody>
+      </p:sp>
+    </p:spTree>
+    <p:extLst>
+      <p:ext uri="{BB962C8B-B14F-4D97-AF65-F5344CB8AC3E}">
+        <p14:creationId xmlns:p14="http://schemas.microsoft.com/office/powerpoint/2010/main" val="846759757"/>
+      </p:ext>
+    </p:extLst>
+  </p:cSld>
+  <p:clrMapOvr>
+    <a:masterClrMapping/>
+  </p:clrMapOvr>
+</p:sld>
+</file>
+
+<file path=ppt/slides/slide13.xml><?xml version="1.0" encoding="utf-8"?>
+<p:sld xmlns:a="http://schemas.openxmlformats.org/drawingml/2006/main" xmlns:r="http://schemas.openxmlformats.org/officeDocument/2006/relationships" xmlns:p="http://schemas.openxmlformats.org/presentationml/2006/main">
+  <p:cSld>
+    <p:spTree>
+      <p:nvGrpSpPr>
+        <p:cNvPr id="1" name="">
+          <a:extLst>
+            <a:ext uri="{FF2B5EF4-FFF2-40B4-BE49-F238E27FC236}">
+              <a16:creationId xmlns:a16="http://schemas.microsoft.com/office/drawing/2014/main" id="{DBCF0AAD-ECC2-32BE-DECD-0D9604DA3190}"/>
+            </a:ext>
+          </a:extLst>
+        </p:cNvPr>
+        <p:cNvGrpSpPr/>
+        <p:nvPr/>
+      </p:nvGrpSpPr>
+      <p:grpSpPr>
+        <a:xfrm>
+          <a:off x="0" y="0"/>
+          <a:ext cx="0" cy="0"/>
+          <a:chOff x="0" y="0"/>
+          <a:chExt cx="0" cy="0"/>
+        </a:xfrm>
+      </p:grpSpPr>
       <p:sp>
         <p:nvSpPr>
           <p:cNvPr id="2" name="Título 1">
             <a:extLst>
               <a:ext uri="{FF2B5EF4-FFF2-40B4-BE49-F238E27FC236}">
-                <a16:creationId xmlns:a16="http://schemas.microsoft.com/office/drawing/2014/main" id="{F0DFD90F-35CE-F96C-BA40-461F696E708E}"/>
+                <a16:creationId xmlns:a16="http://schemas.microsoft.com/office/drawing/2014/main" id="{11900F02-ABC8-21BB-307E-1566DCF51A94}"/>
               </a:ext>
             </a:extLst>
           </p:cNvPr>
@@ -5572,12 +5697,7 @@
             <p:ph type="ctrTitle"/>
           </p:nvPr>
         </p:nvSpPr>
-        <p:spPr>
-          <a:xfrm>
-            <a:off x="1524000" y="1248491"/>
-            <a:ext cx="9144000" cy="2387600"/>
-          </a:xfrm>
-        </p:spPr>
+        <p:spPr/>
         <p:txBody>
           <a:bodyPr/>
           <a:lstStyle/>
@@ -5591,7 +5711,7 @@
           <p:cNvPr id="3" name="Subtítulo 2">
             <a:extLst>
               <a:ext uri="{FF2B5EF4-FFF2-40B4-BE49-F238E27FC236}">
-                <a16:creationId xmlns:a16="http://schemas.microsoft.com/office/drawing/2014/main" id="{1474319F-3E41-9277-D7FC-DA38D4A2F2E6}"/>
+                <a16:creationId xmlns:a16="http://schemas.microsoft.com/office/drawing/2014/main" id="{BEE58B2C-E433-81DA-70CB-142F66D78F98}"/>
               </a:ext>
             </a:extLst>
           </p:cNvPr>
@@ -5616,7 +5736,7 @@
           <p:cNvPr id="6" name="Imagen 5">
             <a:extLst>
               <a:ext uri="{FF2B5EF4-FFF2-40B4-BE49-F238E27FC236}">
-                <a16:creationId xmlns:a16="http://schemas.microsoft.com/office/drawing/2014/main" id="{A048BB93-3B73-569C-54B8-EF39CB136669}"/>
+                <a16:creationId xmlns:a16="http://schemas.microsoft.com/office/drawing/2014/main" id="{4B669E8B-6D95-C7F1-3F5A-CFA3D8C0D3B0}"/>
               </a:ext>
             </a:extLst>
           </p:cNvPr>
@@ -5626,7 +5746,7 @@
           <p:nvPr/>
         </p:nvPicPr>
         <p:blipFill>
-          <a:blip r:embed="rId3">
+          <a:blip r:embed="rId2">
             <a:extLst>
               <a:ext uri="{28A0092B-C50C-407E-A947-70E740481C1C}">
                 <a14:useLocalDpi xmlns:a14="http://schemas.microsoft.com/office/drawing/2010/main" val="0"/>
@@ -5652,7 +5772,7 @@
           <p:cNvPr id="7" name="CuadroTexto 6">
             <a:extLst>
               <a:ext uri="{FF2B5EF4-FFF2-40B4-BE49-F238E27FC236}">
-                <a16:creationId xmlns:a16="http://schemas.microsoft.com/office/drawing/2014/main" id="{00EDF731-4829-8B01-3AF0-285EE124002B}"/>
+                <a16:creationId xmlns:a16="http://schemas.microsoft.com/office/drawing/2014/main" id="{8D9E3BE8-5C07-C585-EA90-C2BBA38C9D99}"/>
               </a:ext>
             </a:extLst>
           </p:cNvPr>
@@ -5679,7 +5799,7 @@
               <a:rPr lang="es-ES" sz="2800" b="1" dirty="0">
                 <a:latin typeface="Libre Franklin" pitchFamily="2" charset="0"/>
               </a:rPr>
-              <a:t>Argumentos a favor de una inflación positiva</a:t>
+              <a:t>Inconvenientes estadísticos de inflación cero</a:t>
             </a:r>
             <a:endParaRPr lang="es-GT" b="1" dirty="0">
               <a:latin typeface="Libre Franklin" pitchFamily="2" charset="0"/>
@@ -5692,7 +5812,7 @@
           <p:cNvPr id="8" name="Conector recto 7">
             <a:extLst>
               <a:ext uri="{FF2B5EF4-FFF2-40B4-BE49-F238E27FC236}">
-                <a16:creationId xmlns:a16="http://schemas.microsoft.com/office/drawing/2014/main" id="{8413D6E6-B275-1F80-C826-B606AB130C0C}"/>
+                <a16:creationId xmlns:a16="http://schemas.microsoft.com/office/drawing/2014/main" id="{98A7597A-60A0-AD08-21CB-F17E93085EDA}"/>
               </a:ext>
             </a:extLst>
           </p:cNvPr>
@@ -5732,6 +5852,2518 @@
       </p:cxnSp>
       <p:sp>
         <p:nvSpPr>
+          <p:cNvPr id="4" name="CuadroTexto 3">
+            <a:extLst>
+              <a:ext uri="{FF2B5EF4-FFF2-40B4-BE49-F238E27FC236}">
+                <a16:creationId xmlns:a16="http://schemas.microsoft.com/office/drawing/2014/main" id="{FC108DCB-15E3-DC3E-70ED-F000A2B1A319}"/>
+              </a:ext>
+            </a:extLst>
+          </p:cNvPr>
+          <p:cNvSpPr txBox="1"/>
+          <p:nvPr/>
+        </p:nvSpPr>
+        <p:spPr>
+          <a:xfrm>
+            <a:off x="490600" y="876271"/>
+            <a:ext cx="9899117" cy="707886"/>
+          </a:xfrm>
+          <a:prstGeom prst="rect">
+            <a:avLst/>
+          </a:prstGeom>
+          <a:noFill/>
+        </p:spPr>
+        <p:txBody>
+          <a:bodyPr wrap="square" rtlCol="0">
+            <a:spAutoFit/>
+          </a:bodyPr>
+          <a:lstStyle/>
+          <a:p>
+            <a:r>
+              <a:rPr lang="es-ES" sz="2000" b="1" dirty="0">
+                <a:latin typeface="Libre Franklin" pitchFamily="2" charset="0"/>
+              </a:rPr>
+              <a:t>Sesgos en la medición de los Índices de Precios al Consumido</a:t>
+            </a:r>
+            <a:endParaRPr lang="es-ES" sz="2000" dirty="0">
+              <a:latin typeface="Libre Franklin" pitchFamily="2" charset="0"/>
+            </a:endParaRPr>
+          </a:p>
+          <a:p>
+            <a:endParaRPr lang="es-ES" sz="2000" dirty="0">
+              <a:latin typeface="Libre Franklin" pitchFamily="2" charset="0"/>
+            </a:endParaRPr>
+          </a:p>
+        </p:txBody>
+      </p:sp>
+      <p:pic>
+        <p:nvPicPr>
+          <p:cNvPr id="13" name="Imagen 12">
+            <a:extLst>
+              <a:ext uri="{FF2B5EF4-FFF2-40B4-BE49-F238E27FC236}">
+                <a16:creationId xmlns:a16="http://schemas.microsoft.com/office/drawing/2014/main" id="{3A2B211A-07FE-383D-3040-D49980C2AD54}"/>
+              </a:ext>
+            </a:extLst>
+          </p:cNvPr>
+          <p:cNvPicPr>
+            <a:picLocks noChangeAspect="1"/>
+          </p:cNvPicPr>
+          <p:nvPr/>
+        </p:nvPicPr>
+        <p:blipFill>
+          <a:blip r:embed="rId3"/>
+          <a:srcRect l="2583" r="7236"/>
+          <a:stretch>
+            <a:fillRect/>
+          </a:stretch>
+        </p:blipFill>
+        <p:spPr>
+          <a:xfrm>
+            <a:off x="6811056" y="1410739"/>
+            <a:ext cx="4750969" cy="3019180"/>
+          </a:xfrm>
+          <a:prstGeom prst="rect">
+            <a:avLst/>
+          </a:prstGeom>
+        </p:spPr>
+      </p:pic>
+      <p:sp>
+        <p:nvSpPr>
+          <p:cNvPr id="15" name="CuadroTexto 14">
+            <a:extLst>
+              <a:ext uri="{FF2B5EF4-FFF2-40B4-BE49-F238E27FC236}">
+                <a16:creationId xmlns:a16="http://schemas.microsoft.com/office/drawing/2014/main" id="{5E32B4D1-3FE8-041C-85DA-C5B67772E78E}"/>
+              </a:ext>
+            </a:extLst>
+          </p:cNvPr>
+          <p:cNvSpPr txBox="1"/>
+          <p:nvPr/>
+        </p:nvSpPr>
+        <p:spPr>
+          <a:xfrm>
+            <a:off x="490600" y="1724740"/>
+            <a:ext cx="6159320" cy="2585323"/>
+          </a:xfrm>
+          <a:prstGeom prst="rect">
+            <a:avLst/>
+          </a:prstGeom>
+          <a:noFill/>
+        </p:spPr>
+        <p:txBody>
+          <a:bodyPr wrap="square">
+            <a:spAutoFit/>
+          </a:bodyPr>
+          <a:lstStyle/>
+          <a:p>
+            <a:pPr algn="just"/>
+            <a:r>
+              <a:rPr lang="es-ES" sz="1800" dirty="0">
+                <a:latin typeface="Libre Franklin" pitchFamily="2" charset="0"/>
+              </a:rPr>
+              <a:t>Desde la publicación del reporte “</a:t>
+            </a:r>
+            <a:r>
+              <a:rPr lang="es-ES" sz="1800" i="1" dirty="0" err="1">
+                <a:latin typeface="Libre Franklin" pitchFamily="2" charset="0"/>
+              </a:rPr>
+              <a:t>Toward</a:t>
+            </a:r>
+            <a:r>
+              <a:rPr lang="es-ES" sz="1800" i="1" dirty="0">
+                <a:latin typeface="Libre Franklin" pitchFamily="2" charset="0"/>
+              </a:rPr>
+              <a:t> a more </a:t>
+            </a:r>
+            <a:r>
+              <a:rPr lang="es-ES" sz="1800" i="1" dirty="0" err="1">
+                <a:latin typeface="Libre Franklin" pitchFamily="2" charset="0"/>
+              </a:rPr>
+              <a:t>accurate</a:t>
+            </a:r>
+            <a:r>
+              <a:rPr lang="es-ES" sz="1800" i="1" dirty="0">
+                <a:latin typeface="Libre Franklin" pitchFamily="2" charset="0"/>
+              </a:rPr>
+              <a:t> </a:t>
+            </a:r>
+            <a:r>
+              <a:rPr lang="es-ES" sz="1800" i="1" dirty="0" err="1">
+                <a:latin typeface="Libre Franklin" pitchFamily="2" charset="0"/>
+              </a:rPr>
+              <a:t>measure</a:t>
+            </a:r>
+            <a:r>
+              <a:rPr lang="es-ES" sz="1800" i="1" dirty="0">
+                <a:latin typeface="Libre Franklin" pitchFamily="2" charset="0"/>
+              </a:rPr>
+              <a:t> </a:t>
+            </a:r>
+            <a:r>
+              <a:rPr lang="es-ES" sz="1800" i="1" dirty="0" err="1">
+                <a:latin typeface="Libre Franklin" pitchFamily="2" charset="0"/>
+              </a:rPr>
+              <a:t>of</a:t>
+            </a:r>
+            <a:r>
+              <a:rPr lang="es-ES" sz="1800" i="1" dirty="0">
+                <a:latin typeface="Libre Franklin" pitchFamily="2" charset="0"/>
+              </a:rPr>
+              <a:t> </a:t>
+            </a:r>
+            <a:r>
+              <a:rPr lang="es-ES" sz="1800" i="1" dirty="0" err="1">
+                <a:latin typeface="Libre Franklin" pitchFamily="2" charset="0"/>
+              </a:rPr>
+              <a:t>the</a:t>
+            </a:r>
+            <a:r>
+              <a:rPr lang="es-ES" sz="1800" i="1" dirty="0">
+                <a:latin typeface="Libre Franklin" pitchFamily="2" charset="0"/>
+              </a:rPr>
+              <a:t> </a:t>
+            </a:r>
+            <a:r>
+              <a:rPr lang="es-ES" sz="1800" i="1" dirty="0" err="1">
+                <a:latin typeface="Libre Franklin" pitchFamily="2" charset="0"/>
+              </a:rPr>
+              <a:t>cost</a:t>
+            </a:r>
+            <a:r>
+              <a:rPr lang="es-ES" sz="1800" i="1" dirty="0">
+                <a:latin typeface="Libre Franklin" pitchFamily="2" charset="0"/>
+              </a:rPr>
+              <a:t> </a:t>
+            </a:r>
+            <a:r>
+              <a:rPr lang="es-ES" sz="1800" i="1" dirty="0" err="1">
+                <a:latin typeface="Libre Franklin" pitchFamily="2" charset="0"/>
+              </a:rPr>
+              <a:t>of</a:t>
+            </a:r>
+            <a:r>
+              <a:rPr lang="es-ES" sz="1800" i="1" dirty="0">
+                <a:latin typeface="Libre Franklin" pitchFamily="2" charset="0"/>
+              </a:rPr>
+              <a:t> living</a:t>
+            </a:r>
+            <a:r>
+              <a:rPr lang="es-ES" sz="1800" dirty="0">
+                <a:latin typeface="Libre Franklin" pitchFamily="2" charset="0"/>
+              </a:rPr>
+              <a:t>” se sabe del sesgo al alza en la medición en la inflación. Pese a los esfuerzos por reducir el sesgo este aun es un problema persistente.</a:t>
+            </a:r>
+          </a:p>
+          <a:p>
+            <a:pPr algn="just"/>
+            <a:endParaRPr lang="es-ES" dirty="0">
+              <a:latin typeface="Libre Franklin" pitchFamily="2" charset="0"/>
+            </a:endParaRPr>
+          </a:p>
+          <a:p>
+            <a:pPr algn="just"/>
+            <a:r>
+              <a:rPr lang="es-ES" dirty="0">
+                <a:latin typeface="Libre Franklin" pitchFamily="2" charset="0"/>
+              </a:rPr>
+              <a:t>Una inflación igual a cero no solo implicaría una mala señal para los agentes, también implica una situación de deflación en la economía.</a:t>
+            </a:r>
+            <a:endParaRPr lang="es-GT" dirty="0">
+              <a:latin typeface="Libre Franklin" pitchFamily="2" charset="0"/>
+            </a:endParaRPr>
+          </a:p>
+        </p:txBody>
+      </p:sp>
+      <p:sp>
+        <p:nvSpPr>
+          <p:cNvPr id="16" name="CuadroTexto 15">
+            <a:extLst>
+              <a:ext uri="{FF2B5EF4-FFF2-40B4-BE49-F238E27FC236}">
+                <a16:creationId xmlns:a16="http://schemas.microsoft.com/office/drawing/2014/main" id="{6C7A651E-480B-516A-D489-3D8527CB3DB1}"/>
+              </a:ext>
+            </a:extLst>
+          </p:cNvPr>
+          <p:cNvSpPr txBox="1"/>
+          <p:nvPr/>
+        </p:nvSpPr>
+        <p:spPr>
+          <a:xfrm>
+            <a:off x="7398913" y="4395129"/>
+            <a:ext cx="4302487" cy="1015663"/>
+          </a:xfrm>
+          <a:prstGeom prst="rect">
+            <a:avLst/>
+          </a:prstGeom>
+          <a:noFill/>
+        </p:spPr>
+        <p:txBody>
+          <a:bodyPr wrap="square">
+            <a:spAutoFit/>
+          </a:bodyPr>
+          <a:lstStyle/>
+          <a:p>
+            <a:pPr algn="just"/>
+            <a:r>
+              <a:rPr lang="es-ES" sz="1200" dirty="0">
+                <a:latin typeface="Libre Franklin" pitchFamily="2" charset="0"/>
+              </a:rPr>
+              <a:t>Fuente: </a:t>
+            </a:r>
+            <a:r>
+              <a:rPr lang="es-ES" sz="1200" dirty="0" err="1">
+                <a:latin typeface="Libre Franklin" pitchFamily="2" charset="0"/>
+              </a:rPr>
+              <a:t>Measurement</a:t>
+            </a:r>
+            <a:r>
+              <a:rPr lang="es-ES" sz="1200" dirty="0">
+                <a:latin typeface="Libre Franklin" pitchFamily="2" charset="0"/>
+              </a:rPr>
+              <a:t> </a:t>
+            </a:r>
+            <a:r>
+              <a:rPr lang="es-ES" sz="1200" dirty="0" err="1">
+                <a:latin typeface="Libre Franklin" pitchFamily="2" charset="0"/>
+              </a:rPr>
+              <a:t>Errors</a:t>
+            </a:r>
+            <a:r>
+              <a:rPr lang="es-ES" sz="1200" dirty="0">
+                <a:latin typeface="Libre Franklin" pitchFamily="2" charset="0"/>
+              </a:rPr>
+              <a:t> in </a:t>
+            </a:r>
+            <a:r>
+              <a:rPr lang="es-ES" sz="1200" dirty="0" err="1">
+                <a:latin typeface="Libre Franklin" pitchFamily="2" charset="0"/>
+              </a:rPr>
+              <a:t>the</a:t>
+            </a:r>
+            <a:r>
+              <a:rPr lang="es-ES" sz="1200" dirty="0">
+                <a:latin typeface="Libre Franklin" pitchFamily="2" charset="0"/>
+              </a:rPr>
+              <a:t> </a:t>
+            </a:r>
+            <a:r>
+              <a:rPr lang="es-ES" sz="1200" dirty="0" err="1">
+                <a:latin typeface="Libre Franklin" pitchFamily="2" charset="0"/>
+              </a:rPr>
+              <a:t>Consumer</a:t>
+            </a:r>
+            <a:r>
+              <a:rPr lang="es-ES" sz="1200" dirty="0">
+                <a:latin typeface="Libre Franklin" pitchFamily="2" charset="0"/>
+              </a:rPr>
+              <a:t> Price </a:t>
+            </a:r>
+            <a:r>
+              <a:rPr lang="es-ES" sz="1200" dirty="0" err="1">
+                <a:latin typeface="Libre Franklin" pitchFamily="2" charset="0"/>
+              </a:rPr>
+              <a:t>Index</a:t>
+            </a:r>
+            <a:r>
+              <a:rPr lang="es-ES" sz="1200" dirty="0">
+                <a:latin typeface="Libre Franklin" pitchFamily="2" charset="0"/>
+              </a:rPr>
+              <a:t>: </a:t>
+            </a:r>
+            <a:r>
+              <a:rPr lang="es-ES" sz="1200" dirty="0" err="1">
+                <a:latin typeface="Libre Franklin" pitchFamily="2" charset="0"/>
+              </a:rPr>
+              <a:t>Perspetives</a:t>
+            </a:r>
+            <a:r>
+              <a:rPr lang="es-ES" sz="1200" dirty="0">
+                <a:latin typeface="Libre Franklin" pitchFamily="2" charset="0"/>
+              </a:rPr>
+              <a:t> </a:t>
+            </a:r>
+            <a:r>
+              <a:rPr lang="es-ES" sz="1200" dirty="0" err="1">
+                <a:latin typeface="Libre Franklin" pitchFamily="2" charset="0"/>
+              </a:rPr>
+              <a:t>on</a:t>
+            </a:r>
+            <a:r>
+              <a:rPr lang="es-ES" sz="1200" dirty="0">
+                <a:latin typeface="Libre Franklin" pitchFamily="2" charset="0"/>
+              </a:rPr>
+              <a:t> </a:t>
+            </a:r>
+            <a:r>
+              <a:rPr lang="es-ES" sz="1200" dirty="0" err="1">
+                <a:latin typeface="Libre Franklin" pitchFamily="2" charset="0"/>
+              </a:rPr>
+              <a:t>Numerical</a:t>
+            </a:r>
+            <a:r>
+              <a:rPr lang="es-ES" sz="1200" dirty="0">
+                <a:latin typeface="Libre Franklin" pitchFamily="2" charset="0"/>
+              </a:rPr>
+              <a:t> Targets </a:t>
+            </a:r>
+            <a:r>
+              <a:rPr lang="es-ES" sz="1200" dirty="0" err="1">
+                <a:latin typeface="Libre Franklin" pitchFamily="2" charset="0"/>
+              </a:rPr>
+              <a:t>for</a:t>
+            </a:r>
+            <a:r>
+              <a:rPr lang="es-ES" sz="1200" dirty="0">
+                <a:latin typeface="Libre Franklin" pitchFamily="2" charset="0"/>
+              </a:rPr>
+              <a:t> Price </a:t>
+            </a:r>
+            <a:r>
+              <a:rPr lang="es-ES" sz="1200" dirty="0" err="1">
+                <a:latin typeface="Libre Franklin" pitchFamily="2" charset="0"/>
+              </a:rPr>
+              <a:t>Stability</a:t>
+            </a:r>
+            <a:r>
+              <a:rPr lang="es-ES" sz="1200" dirty="0">
+                <a:latin typeface="Libre Franklin" pitchFamily="2" charset="0"/>
+              </a:rPr>
+              <a:t> in </a:t>
+            </a:r>
+            <a:r>
+              <a:rPr lang="es-ES" sz="1200" dirty="0" err="1">
+                <a:latin typeface="Libre Franklin" pitchFamily="2" charset="0"/>
+              </a:rPr>
+              <a:t>Major</a:t>
+            </a:r>
+            <a:r>
+              <a:rPr lang="es-ES" sz="1200" dirty="0">
+                <a:latin typeface="Libre Franklin" pitchFamily="2" charset="0"/>
+              </a:rPr>
+              <a:t> </a:t>
+            </a:r>
+            <a:r>
+              <a:rPr lang="es-ES" sz="1200" dirty="0" err="1">
+                <a:latin typeface="Libre Franklin" pitchFamily="2" charset="0"/>
+              </a:rPr>
+              <a:t>Economies</a:t>
+            </a:r>
+            <a:r>
+              <a:rPr lang="es-ES" sz="1200" dirty="0">
+                <a:latin typeface="Libre Franklin" pitchFamily="2" charset="0"/>
+              </a:rPr>
+              <a:t>. </a:t>
+            </a:r>
+          </a:p>
+          <a:p>
+            <a:pPr algn="just"/>
+            <a:endParaRPr lang="es-ES" sz="1200" dirty="0">
+              <a:latin typeface="Libre Franklin" pitchFamily="2" charset="0"/>
+            </a:endParaRPr>
+          </a:p>
+          <a:p>
+            <a:pPr algn="just"/>
+            <a:r>
+              <a:rPr lang="es-ES" sz="1200" dirty="0">
+                <a:latin typeface="Libre Franklin" pitchFamily="2" charset="0"/>
+              </a:rPr>
+              <a:t>Banco de Japón</a:t>
+            </a:r>
+            <a:endParaRPr lang="es-GT" sz="1200" dirty="0">
+              <a:latin typeface="Libre Franklin" pitchFamily="2" charset="0"/>
+            </a:endParaRPr>
+          </a:p>
+        </p:txBody>
+      </p:sp>
+    </p:spTree>
+    <p:extLst>
+      <p:ext uri="{BB962C8B-B14F-4D97-AF65-F5344CB8AC3E}">
+        <p14:creationId xmlns:p14="http://schemas.microsoft.com/office/powerpoint/2010/main" val="2440913848"/>
+      </p:ext>
+    </p:extLst>
+  </p:cSld>
+  <p:clrMapOvr>
+    <a:masterClrMapping/>
+  </p:clrMapOvr>
+</p:sld>
+</file>
+
+<file path=ppt/slides/slide14.xml><?xml version="1.0" encoding="utf-8"?>
+<p:sld xmlns:a="http://schemas.openxmlformats.org/drawingml/2006/main" xmlns:r="http://schemas.openxmlformats.org/officeDocument/2006/relationships" xmlns:p="http://schemas.openxmlformats.org/presentationml/2006/main">
+  <p:cSld>
+    <p:spTree>
+      <p:nvGrpSpPr>
+        <p:cNvPr id="1" name="">
+          <a:extLst>
+            <a:ext uri="{FF2B5EF4-FFF2-40B4-BE49-F238E27FC236}">
+              <a16:creationId xmlns:a16="http://schemas.microsoft.com/office/drawing/2014/main" id="{DBCF0AAD-ECC2-32BE-DECD-0D9604DA3190}"/>
+            </a:ext>
+          </a:extLst>
+        </p:cNvPr>
+        <p:cNvGrpSpPr/>
+        <p:nvPr/>
+      </p:nvGrpSpPr>
+      <p:grpSpPr>
+        <a:xfrm>
+          <a:off x="0" y="0"/>
+          <a:ext cx="0" cy="0"/>
+          <a:chOff x="0" y="0"/>
+          <a:chExt cx="0" cy="0"/>
+        </a:xfrm>
+      </p:grpSpPr>
+      <p:sp>
+        <p:nvSpPr>
+          <p:cNvPr id="2" name="Título 1">
+            <a:extLst>
+              <a:ext uri="{FF2B5EF4-FFF2-40B4-BE49-F238E27FC236}">
+                <a16:creationId xmlns:a16="http://schemas.microsoft.com/office/drawing/2014/main" id="{11900F02-ABC8-21BB-307E-1566DCF51A94}"/>
+              </a:ext>
+            </a:extLst>
+          </p:cNvPr>
+          <p:cNvSpPr>
+            <a:spLocks noGrp="1"/>
+          </p:cNvSpPr>
+          <p:nvPr>
+            <p:ph type="ctrTitle"/>
+          </p:nvPr>
+        </p:nvSpPr>
+        <p:spPr/>
+        <p:txBody>
+          <a:bodyPr/>
+          <a:lstStyle/>
+          <a:p>
+            <a:endParaRPr lang="es-GT"/>
+          </a:p>
+        </p:txBody>
+      </p:sp>
+      <p:sp>
+        <p:nvSpPr>
+          <p:cNvPr id="3" name="Subtítulo 2">
+            <a:extLst>
+              <a:ext uri="{FF2B5EF4-FFF2-40B4-BE49-F238E27FC236}">
+                <a16:creationId xmlns:a16="http://schemas.microsoft.com/office/drawing/2014/main" id="{BEE58B2C-E433-81DA-70CB-142F66D78F98}"/>
+              </a:ext>
+            </a:extLst>
+          </p:cNvPr>
+          <p:cNvSpPr>
+            <a:spLocks noGrp="1"/>
+          </p:cNvSpPr>
+          <p:nvPr>
+            <p:ph type="subTitle" idx="1"/>
+          </p:nvPr>
+        </p:nvSpPr>
+        <p:spPr/>
+        <p:txBody>
+          <a:bodyPr/>
+          <a:lstStyle/>
+          <a:p>
+            <a:endParaRPr lang="es-GT"/>
+          </a:p>
+        </p:txBody>
+      </p:sp>
+      <p:pic>
+        <p:nvPicPr>
+          <p:cNvPr id="6" name="Imagen 5">
+            <a:extLst>
+              <a:ext uri="{FF2B5EF4-FFF2-40B4-BE49-F238E27FC236}">
+                <a16:creationId xmlns:a16="http://schemas.microsoft.com/office/drawing/2014/main" id="{4B669E8B-6D95-C7F1-3F5A-CFA3D8C0D3B0}"/>
+              </a:ext>
+            </a:extLst>
+          </p:cNvPr>
+          <p:cNvPicPr>
+            <a:picLocks noChangeAspect="1"/>
+          </p:cNvPicPr>
+          <p:nvPr/>
+        </p:nvPicPr>
+        <p:blipFill>
+          <a:blip r:embed="rId2">
+            <a:extLst>
+              <a:ext uri="{28A0092B-C50C-407E-A947-70E740481C1C}">
+                <a14:useLocalDpi xmlns:a14="http://schemas.microsoft.com/office/drawing/2010/main" val="0"/>
+              </a:ext>
+            </a:extLst>
+          </a:blip>
+          <a:stretch>
+            <a:fillRect/>
+          </a:stretch>
+        </p:blipFill>
+        <p:spPr>
+          <a:xfrm>
+            <a:off x="0" y="0"/>
+            <a:ext cx="12192000" cy="6858000"/>
+          </a:xfrm>
+          <a:prstGeom prst="rect">
+            <a:avLst/>
+          </a:prstGeom>
+        </p:spPr>
+      </p:pic>
+      <p:sp>
+        <p:nvSpPr>
+          <p:cNvPr id="7" name="CuadroTexto 6">
+            <a:extLst>
+              <a:ext uri="{FF2B5EF4-FFF2-40B4-BE49-F238E27FC236}">
+                <a16:creationId xmlns:a16="http://schemas.microsoft.com/office/drawing/2014/main" id="{8D9E3BE8-5C07-C585-EA90-C2BBA38C9D99}"/>
+              </a:ext>
+            </a:extLst>
+          </p:cNvPr>
+          <p:cNvSpPr txBox="1"/>
+          <p:nvPr/>
+        </p:nvSpPr>
+        <p:spPr>
+          <a:xfrm>
+            <a:off x="165181" y="207239"/>
+            <a:ext cx="9899117" cy="523220"/>
+          </a:xfrm>
+          <a:prstGeom prst="rect">
+            <a:avLst/>
+          </a:prstGeom>
+          <a:noFill/>
+        </p:spPr>
+        <p:txBody>
+          <a:bodyPr wrap="square" rtlCol="0">
+            <a:spAutoFit/>
+          </a:bodyPr>
+          <a:lstStyle/>
+          <a:p>
+            <a:r>
+              <a:rPr lang="es-ES" sz="2800" b="1" dirty="0">
+                <a:latin typeface="Libre Franklin" pitchFamily="2" charset="0"/>
+              </a:rPr>
+              <a:t>Inconvenientes estadísticos de inflación cero</a:t>
+            </a:r>
+            <a:endParaRPr lang="es-GT" b="1" dirty="0">
+              <a:latin typeface="Libre Franklin" pitchFamily="2" charset="0"/>
+            </a:endParaRPr>
+          </a:p>
+        </p:txBody>
+      </p:sp>
+      <p:cxnSp>
+        <p:nvCxnSpPr>
+          <p:cNvPr id="8" name="Conector recto 7">
+            <a:extLst>
+              <a:ext uri="{FF2B5EF4-FFF2-40B4-BE49-F238E27FC236}">
+                <a16:creationId xmlns:a16="http://schemas.microsoft.com/office/drawing/2014/main" id="{98A7597A-60A0-AD08-21CB-F17E93085EDA}"/>
+              </a:ext>
+            </a:extLst>
+          </p:cNvPr>
+          <p:cNvCxnSpPr>
+            <a:cxnSpLocks/>
+          </p:cNvCxnSpPr>
+          <p:nvPr/>
+        </p:nvCxnSpPr>
+        <p:spPr>
+          <a:xfrm>
+            <a:off x="265471" y="730459"/>
+            <a:ext cx="7655036" cy="0"/>
+          </a:xfrm>
+          <a:prstGeom prst="line">
+            <a:avLst/>
+          </a:prstGeom>
+          <a:ln w="38100">
+            <a:solidFill>
+              <a:srgbClr val="FF7F00"/>
+            </a:solidFill>
+          </a:ln>
+        </p:spPr>
+        <p:style>
+          <a:lnRef idx="1">
+            <a:schemeClr val="accent1"/>
+          </a:lnRef>
+          <a:fillRef idx="0">
+            <a:schemeClr val="accent1"/>
+          </a:fillRef>
+          <a:effectRef idx="0">
+            <a:schemeClr val="accent1"/>
+          </a:effectRef>
+          <a:fontRef idx="minor">
+            <a:schemeClr val="tx1"/>
+          </a:fontRef>
+        </p:style>
+      </p:cxnSp>
+      <p:sp>
+        <p:nvSpPr>
+          <p:cNvPr id="4" name="CuadroTexto 3">
+            <a:extLst>
+              <a:ext uri="{FF2B5EF4-FFF2-40B4-BE49-F238E27FC236}">
+                <a16:creationId xmlns:a16="http://schemas.microsoft.com/office/drawing/2014/main" id="{FC108DCB-15E3-DC3E-70ED-F000A2B1A319}"/>
+              </a:ext>
+            </a:extLst>
+          </p:cNvPr>
+          <p:cNvSpPr txBox="1"/>
+          <p:nvPr/>
+        </p:nvSpPr>
+        <p:spPr>
+          <a:xfrm>
+            <a:off x="490600" y="876271"/>
+            <a:ext cx="10818463" cy="4524315"/>
+          </a:xfrm>
+          <a:prstGeom prst="rect">
+            <a:avLst/>
+          </a:prstGeom>
+          <a:noFill/>
+        </p:spPr>
+        <p:txBody>
+          <a:bodyPr wrap="square" rtlCol="0">
+            <a:spAutoFit/>
+          </a:bodyPr>
+          <a:lstStyle/>
+          <a:p>
+            <a:r>
+              <a:rPr lang="es-ES" sz="2000" b="1" dirty="0">
+                <a:latin typeface="Libre Franklin" pitchFamily="2" charset="0"/>
+              </a:rPr>
+              <a:t>Razones del sesgo hacia el alza</a:t>
+            </a:r>
+          </a:p>
+          <a:p>
+            <a:endParaRPr lang="es-ES" sz="1200" dirty="0">
+              <a:latin typeface="Libre Franklin" pitchFamily="2" charset="0"/>
+            </a:endParaRPr>
+          </a:p>
+          <a:p>
+            <a:pPr marL="360363" lvl="1" algn="just"/>
+            <a:r>
+              <a:rPr lang="es-GT" b="1" dirty="0">
+                <a:latin typeface="Libre Franklin" pitchFamily="2" charset="0"/>
+              </a:rPr>
+              <a:t>1- Sesgo de sustitución de nivel superior</a:t>
+            </a:r>
+          </a:p>
+          <a:p>
+            <a:pPr marL="360363" lvl="1" algn="just"/>
+            <a:r>
+              <a:rPr lang="es-GT" dirty="0">
+                <a:latin typeface="Libre Franklin" pitchFamily="2" charset="0"/>
+              </a:rPr>
+              <a:t>Ocurre cuando los índices superiores son agregados a partir de los índices de productos mediante promedios ponderados. Por ejemplo si dos productos son sustitutos y el precio de uno aumenta, es natural que suceda un cambio en la demanda hacia el bien más barato. Si la canasta se fija al valor previo al cambio, se da más peso al precio del producto que experimentó el aumento en el precio que a los gastos reales en la fase de agregación para el índice superior.</a:t>
+            </a:r>
+            <a:endParaRPr lang="es-ES" sz="2000" dirty="0">
+              <a:latin typeface="Libre Franklin" pitchFamily="2" charset="0"/>
+            </a:endParaRPr>
+          </a:p>
+          <a:p>
+            <a:pPr marL="360363" lvl="1" algn="just"/>
+            <a:endParaRPr lang="es-ES" sz="2000" i="1" dirty="0">
+              <a:latin typeface="Libre Franklin" pitchFamily="2" charset="0"/>
+            </a:endParaRPr>
+          </a:p>
+          <a:p>
+            <a:pPr marL="360363" lvl="1" algn="just"/>
+            <a:r>
+              <a:rPr lang="es-ES" sz="2000" b="1" dirty="0">
+                <a:latin typeface="Libre Franklin" pitchFamily="2" charset="0"/>
+              </a:rPr>
+              <a:t>2-</a:t>
+            </a:r>
+            <a:r>
+              <a:rPr lang="es-ES" sz="2000" b="1" i="1" dirty="0">
+                <a:latin typeface="Libre Franklin" pitchFamily="2" charset="0"/>
+              </a:rPr>
+              <a:t> Sesgo de sustitución de nivel inferior</a:t>
+            </a:r>
+          </a:p>
+          <a:p>
+            <a:pPr marL="360363" lvl="1" algn="just"/>
+            <a:r>
+              <a:rPr lang="es-GT" dirty="0">
+                <a:latin typeface="Libre Franklin" pitchFamily="2" charset="0"/>
+              </a:rPr>
+              <a:t>Sesgo que ocurre cuando la demanda se desplaza de un bien hacia otro y ambos pertenecen a un mismo índice de artículo. </a:t>
+            </a:r>
+            <a:r>
+              <a:rPr lang="es-ES" dirty="0">
+                <a:latin typeface="Libre Franklin" pitchFamily="2" charset="0"/>
+              </a:rPr>
+              <a:t>En particular, si la gama de cualidades (volumen, marca, función, etc.) de cada bien dentro del mismo índice de artículos es amplia, puede haber  diferencias en el nivel de precios (o nivel del índice) de cada una de las marcas o productos encuestados. En tales casos, cuando se utilizan métodos de agregación como las medias aritméticas simples, se da mayor peso a los movimientos de los precios con niveles de precios o niveles de índice más altos.</a:t>
+            </a:r>
+            <a:endParaRPr lang="es-MX" dirty="0">
+              <a:latin typeface="Libre Franklin" pitchFamily="2" charset="0"/>
+            </a:endParaRPr>
+          </a:p>
+        </p:txBody>
+      </p:sp>
+    </p:spTree>
+    <p:extLst>
+      <p:ext uri="{BB962C8B-B14F-4D97-AF65-F5344CB8AC3E}">
+        <p14:creationId xmlns:p14="http://schemas.microsoft.com/office/powerpoint/2010/main" val="1525822181"/>
+      </p:ext>
+    </p:extLst>
+  </p:cSld>
+  <p:clrMapOvr>
+    <a:masterClrMapping/>
+  </p:clrMapOvr>
+</p:sld>
+</file>
+
+<file path=ppt/slides/slide15.xml><?xml version="1.0" encoding="utf-8"?>
+<p:sld xmlns:a="http://schemas.openxmlformats.org/drawingml/2006/main" xmlns:r="http://schemas.openxmlformats.org/officeDocument/2006/relationships" xmlns:p="http://schemas.openxmlformats.org/presentationml/2006/main">
+  <p:cSld>
+    <p:spTree>
+      <p:nvGrpSpPr>
+        <p:cNvPr id="1" name="">
+          <a:extLst>
+            <a:ext uri="{FF2B5EF4-FFF2-40B4-BE49-F238E27FC236}">
+              <a16:creationId xmlns:a16="http://schemas.microsoft.com/office/drawing/2014/main" id="{DBCF0AAD-ECC2-32BE-DECD-0D9604DA3190}"/>
+            </a:ext>
+          </a:extLst>
+        </p:cNvPr>
+        <p:cNvGrpSpPr/>
+        <p:nvPr/>
+      </p:nvGrpSpPr>
+      <p:grpSpPr>
+        <a:xfrm>
+          <a:off x="0" y="0"/>
+          <a:ext cx="0" cy="0"/>
+          <a:chOff x="0" y="0"/>
+          <a:chExt cx="0" cy="0"/>
+        </a:xfrm>
+      </p:grpSpPr>
+      <p:sp>
+        <p:nvSpPr>
+          <p:cNvPr id="2" name="Título 1">
+            <a:extLst>
+              <a:ext uri="{FF2B5EF4-FFF2-40B4-BE49-F238E27FC236}">
+                <a16:creationId xmlns:a16="http://schemas.microsoft.com/office/drawing/2014/main" id="{11900F02-ABC8-21BB-307E-1566DCF51A94}"/>
+              </a:ext>
+            </a:extLst>
+          </p:cNvPr>
+          <p:cNvSpPr>
+            <a:spLocks noGrp="1"/>
+          </p:cNvSpPr>
+          <p:nvPr>
+            <p:ph type="ctrTitle"/>
+          </p:nvPr>
+        </p:nvSpPr>
+        <p:spPr/>
+        <p:txBody>
+          <a:bodyPr/>
+          <a:lstStyle/>
+          <a:p>
+            <a:endParaRPr lang="es-GT"/>
+          </a:p>
+        </p:txBody>
+      </p:sp>
+      <p:sp>
+        <p:nvSpPr>
+          <p:cNvPr id="3" name="Subtítulo 2">
+            <a:extLst>
+              <a:ext uri="{FF2B5EF4-FFF2-40B4-BE49-F238E27FC236}">
+                <a16:creationId xmlns:a16="http://schemas.microsoft.com/office/drawing/2014/main" id="{BEE58B2C-E433-81DA-70CB-142F66D78F98}"/>
+              </a:ext>
+            </a:extLst>
+          </p:cNvPr>
+          <p:cNvSpPr>
+            <a:spLocks noGrp="1"/>
+          </p:cNvSpPr>
+          <p:nvPr>
+            <p:ph type="subTitle" idx="1"/>
+          </p:nvPr>
+        </p:nvSpPr>
+        <p:spPr/>
+        <p:txBody>
+          <a:bodyPr/>
+          <a:lstStyle/>
+          <a:p>
+            <a:endParaRPr lang="es-GT"/>
+          </a:p>
+        </p:txBody>
+      </p:sp>
+      <p:pic>
+        <p:nvPicPr>
+          <p:cNvPr id="6" name="Imagen 5">
+            <a:extLst>
+              <a:ext uri="{FF2B5EF4-FFF2-40B4-BE49-F238E27FC236}">
+                <a16:creationId xmlns:a16="http://schemas.microsoft.com/office/drawing/2014/main" id="{4B669E8B-6D95-C7F1-3F5A-CFA3D8C0D3B0}"/>
+              </a:ext>
+            </a:extLst>
+          </p:cNvPr>
+          <p:cNvPicPr>
+            <a:picLocks noChangeAspect="1"/>
+          </p:cNvPicPr>
+          <p:nvPr/>
+        </p:nvPicPr>
+        <p:blipFill>
+          <a:blip r:embed="rId2">
+            <a:extLst>
+              <a:ext uri="{28A0092B-C50C-407E-A947-70E740481C1C}">
+                <a14:useLocalDpi xmlns:a14="http://schemas.microsoft.com/office/drawing/2010/main" val="0"/>
+              </a:ext>
+            </a:extLst>
+          </a:blip>
+          <a:stretch>
+            <a:fillRect/>
+          </a:stretch>
+        </p:blipFill>
+        <p:spPr>
+          <a:xfrm>
+            <a:off x="0" y="0"/>
+            <a:ext cx="12192000" cy="6858000"/>
+          </a:xfrm>
+          <a:prstGeom prst="rect">
+            <a:avLst/>
+          </a:prstGeom>
+        </p:spPr>
+      </p:pic>
+      <p:sp>
+        <p:nvSpPr>
+          <p:cNvPr id="7" name="CuadroTexto 6">
+            <a:extLst>
+              <a:ext uri="{FF2B5EF4-FFF2-40B4-BE49-F238E27FC236}">
+                <a16:creationId xmlns:a16="http://schemas.microsoft.com/office/drawing/2014/main" id="{8D9E3BE8-5C07-C585-EA90-C2BBA38C9D99}"/>
+              </a:ext>
+            </a:extLst>
+          </p:cNvPr>
+          <p:cNvSpPr txBox="1"/>
+          <p:nvPr/>
+        </p:nvSpPr>
+        <p:spPr>
+          <a:xfrm>
+            <a:off x="165181" y="207239"/>
+            <a:ext cx="9899117" cy="523220"/>
+          </a:xfrm>
+          <a:prstGeom prst="rect">
+            <a:avLst/>
+          </a:prstGeom>
+          <a:noFill/>
+        </p:spPr>
+        <p:txBody>
+          <a:bodyPr wrap="square" rtlCol="0">
+            <a:spAutoFit/>
+          </a:bodyPr>
+          <a:lstStyle/>
+          <a:p>
+            <a:r>
+              <a:rPr lang="es-ES" sz="2800" b="1" dirty="0">
+                <a:latin typeface="Libre Franklin" pitchFamily="2" charset="0"/>
+              </a:rPr>
+              <a:t>Inconvenientes estadísticos de inflación cero</a:t>
+            </a:r>
+            <a:endParaRPr lang="es-GT" b="1" dirty="0">
+              <a:latin typeface="Libre Franklin" pitchFamily="2" charset="0"/>
+            </a:endParaRPr>
+          </a:p>
+        </p:txBody>
+      </p:sp>
+      <p:cxnSp>
+        <p:nvCxnSpPr>
+          <p:cNvPr id="8" name="Conector recto 7">
+            <a:extLst>
+              <a:ext uri="{FF2B5EF4-FFF2-40B4-BE49-F238E27FC236}">
+                <a16:creationId xmlns:a16="http://schemas.microsoft.com/office/drawing/2014/main" id="{98A7597A-60A0-AD08-21CB-F17E93085EDA}"/>
+              </a:ext>
+            </a:extLst>
+          </p:cNvPr>
+          <p:cNvCxnSpPr>
+            <a:cxnSpLocks/>
+          </p:cNvCxnSpPr>
+          <p:nvPr/>
+        </p:nvCxnSpPr>
+        <p:spPr>
+          <a:xfrm>
+            <a:off x="265471" y="730459"/>
+            <a:ext cx="7655036" cy="0"/>
+          </a:xfrm>
+          <a:prstGeom prst="line">
+            <a:avLst/>
+          </a:prstGeom>
+          <a:ln w="38100">
+            <a:solidFill>
+              <a:srgbClr val="FF7F00"/>
+            </a:solidFill>
+          </a:ln>
+        </p:spPr>
+        <p:style>
+          <a:lnRef idx="1">
+            <a:schemeClr val="accent1"/>
+          </a:lnRef>
+          <a:fillRef idx="0">
+            <a:schemeClr val="accent1"/>
+          </a:fillRef>
+          <a:effectRef idx="0">
+            <a:schemeClr val="accent1"/>
+          </a:effectRef>
+          <a:fontRef idx="minor">
+            <a:schemeClr val="tx1"/>
+          </a:fontRef>
+        </p:style>
+      </p:cxnSp>
+      <p:sp>
+        <p:nvSpPr>
+          <p:cNvPr id="4" name="CuadroTexto 3">
+            <a:extLst>
+              <a:ext uri="{FF2B5EF4-FFF2-40B4-BE49-F238E27FC236}">
+                <a16:creationId xmlns:a16="http://schemas.microsoft.com/office/drawing/2014/main" id="{FC108DCB-15E3-DC3E-70ED-F000A2B1A319}"/>
+              </a:ext>
+            </a:extLst>
+          </p:cNvPr>
+          <p:cNvSpPr txBox="1"/>
+          <p:nvPr/>
+        </p:nvSpPr>
+        <p:spPr>
+          <a:xfrm>
+            <a:off x="490600" y="876271"/>
+            <a:ext cx="10818463" cy="3416320"/>
+          </a:xfrm>
+          <a:prstGeom prst="rect">
+            <a:avLst/>
+          </a:prstGeom>
+          <a:noFill/>
+        </p:spPr>
+        <p:txBody>
+          <a:bodyPr wrap="square" rtlCol="0">
+            <a:spAutoFit/>
+          </a:bodyPr>
+          <a:lstStyle/>
+          <a:p>
+            <a:r>
+              <a:rPr lang="es-ES" sz="2000" b="1" dirty="0">
+                <a:latin typeface="Libre Franklin" pitchFamily="2" charset="0"/>
+              </a:rPr>
+              <a:t>Razones del sesgo hacia el alza</a:t>
+            </a:r>
+          </a:p>
+          <a:p>
+            <a:endParaRPr lang="es-ES" sz="1200" dirty="0">
+              <a:latin typeface="Libre Franklin" pitchFamily="2" charset="0"/>
+            </a:endParaRPr>
+          </a:p>
+          <a:p>
+            <a:pPr marL="360363" lvl="1" algn="just"/>
+            <a:r>
+              <a:rPr lang="es-GT" b="1" dirty="0">
+                <a:latin typeface="Libre Franklin" pitchFamily="2" charset="0"/>
+              </a:rPr>
+              <a:t>3- Sesgo por productos nuevos</a:t>
+            </a:r>
+          </a:p>
+          <a:p>
+            <a:pPr marL="360363" lvl="1" algn="just"/>
+            <a:r>
+              <a:rPr lang="es-ES" dirty="0">
+                <a:latin typeface="Libre Franklin" pitchFamily="2" charset="0"/>
+              </a:rPr>
+              <a:t>Este sesgo se define como uno de los errores estadísticos asociados con la inclusión continua de productos que han perdido su representatividad, así como con la omisión de nuevas formas de bienes y servicios.</a:t>
+            </a:r>
+          </a:p>
+          <a:p>
+            <a:pPr marL="360363" lvl="1" algn="just"/>
+            <a:endParaRPr lang="es-ES" sz="2000" i="1" dirty="0">
+              <a:latin typeface="Libre Franklin" pitchFamily="2" charset="0"/>
+            </a:endParaRPr>
+          </a:p>
+          <a:p>
+            <a:pPr marL="360363" lvl="1" algn="just"/>
+            <a:r>
+              <a:rPr lang="es-ES" sz="2000" b="1" dirty="0">
+                <a:latin typeface="Libre Franklin" pitchFamily="2" charset="0"/>
+              </a:rPr>
+              <a:t>4-</a:t>
+            </a:r>
+            <a:r>
+              <a:rPr lang="es-ES" sz="2000" b="1" i="1" dirty="0">
+                <a:latin typeface="Libre Franklin" pitchFamily="2" charset="0"/>
+              </a:rPr>
+              <a:t> Sesgo de sustitución de nivel inferior</a:t>
+            </a:r>
+          </a:p>
+          <a:p>
+            <a:pPr marL="360363" lvl="1" algn="just"/>
+            <a:r>
+              <a:rPr lang="es-ES" dirty="0">
+                <a:latin typeface="Libre Franklin" pitchFamily="2" charset="0"/>
+              </a:rPr>
+              <a:t>Es uno de los errores de medición asociados con los cambios en los puntos de comercialización. Este sesgo se produce cuando los consumidores se desplazan hacia puntos de venta y canales de distribución que venden y ofrecen bienes y servicios a precios más bajos y en formatos de venta de mayor calidad, y cuando el IPC no logra captar estos movimientos.</a:t>
+            </a:r>
+            <a:endParaRPr lang="es-MX" dirty="0">
+              <a:latin typeface="Libre Franklin" pitchFamily="2" charset="0"/>
+            </a:endParaRPr>
+          </a:p>
+        </p:txBody>
+      </p:sp>
+    </p:spTree>
+    <p:extLst>
+      <p:ext uri="{BB962C8B-B14F-4D97-AF65-F5344CB8AC3E}">
+        <p14:creationId xmlns:p14="http://schemas.microsoft.com/office/powerpoint/2010/main" val="183769246"/>
+      </p:ext>
+    </p:extLst>
+  </p:cSld>
+  <p:clrMapOvr>
+    <a:masterClrMapping/>
+  </p:clrMapOvr>
+</p:sld>
+</file>
+
+<file path=ppt/slides/slide16.xml><?xml version="1.0" encoding="utf-8"?>
+<p:sld xmlns:a="http://schemas.openxmlformats.org/drawingml/2006/main" xmlns:r="http://schemas.openxmlformats.org/officeDocument/2006/relationships" xmlns:p="http://schemas.openxmlformats.org/presentationml/2006/main">
+  <p:cSld>
+    <p:spTree>
+      <p:nvGrpSpPr>
+        <p:cNvPr id="1" name="">
+          <a:extLst>
+            <a:ext uri="{FF2B5EF4-FFF2-40B4-BE49-F238E27FC236}">
+              <a16:creationId xmlns:a16="http://schemas.microsoft.com/office/drawing/2014/main" id="{54EC1E0F-3A03-65A1-EAA9-2150EE119E83}"/>
+            </a:ext>
+          </a:extLst>
+        </p:cNvPr>
+        <p:cNvGrpSpPr/>
+        <p:nvPr/>
+      </p:nvGrpSpPr>
+      <p:grpSpPr>
+        <a:xfrm>
+          <a:off x="0" y="0"/>
+          <a:ext cx="0" cy="0"/>
+          <a:chOff x="0" y="0"/>
+          <a:chExt cx="0" cy="0"/>
+        </a:xfrm>
+      </p:grpSpPr>
+      <p:sp>
+        <p:nvSpPr>
+          <p:cNvPr id="2" name="Título 1">
+            <a:extLst>
+              <a:ext uri="{FF2B5EF4-FFF2-40B4-BE49-F238E27FC236}">
+                <a16:creationId xmlns:a16="http://schemas.microsoft.com/office/drawing/2014/main" id="{FA1DD0DA-3E52-35FA-6008-F1DA6CD45944}"/>
+              </a:ext>
+            </a:extLst>
+          </p:cNvPr>
+          <p:cNvSpPr>
+            <a:spLocks noGrp="1"/>
+          </p:cNvSpPr>
+          <p:nvPr>
+            <p:ph type="ctrTitle"/>
+          </p:nvPr>
+        </p:nvSpPr>
+        <p:spPr/>
+        <p:txBody>
+          <a:bodyPr/>
+          <a:lstStyle/>
+          <a:p>
+            <a:endParaRPr lang="es-GT"/>
+          </a:p>
+        </p:txBody>
+      </p:sp>
+      <p:sp>
+        <p:nvSpPr>
+          <p:cNvPr id="3" name="Subtítulo 2">
+            <a:extLst>
+              <a:ext uri="{FF2B5EF4-FFF2-40B4-BE49-F238E27FC236}">
+                <a16:creationId xmlns:a16="http://schemas.microsoft.com/office/drawing/2014/main" id="{B1D0F4EF-2D98-0191-3B39-63B5D52D1DD5}"/>
+              </a:ext>
+            </a:extLst>
+          </p:cNvPr>
+          <p:cNvSpPr>
+            <a:spLocks noGrp="1"/>
+          </p:cNvSpPr>
+          <p:nvPr>
+            <p:ph type="subTitle" idx="1"/>
+          </p:nvPr>
+        </p:nvSpPr>
+        <p:spPr/>
+        <p:txBody>
+          <a:bodyPr/>
+          <a:lstStyle/>
+          <a:p>
+            <a:endParaRPr lang="es-GT"/>
+          </a:p>
+        </p:txBody>
+      </p:sp>
+      <p:pic>
+        <p:nvPicPr>
+          <p:cNvPr id="6" name="Imagen 5">
+            <a:extLst>
+              <a:ext uri="{FF2B5EF4-FFF2-40B4-BE49-F238E27FC236}">
+                <a16:creationId xmlns:a16="http://schemas.microsoft.com/office/drawing/2014/main" id="{2E0DEF24-BB80-82A7-8138-494FBF9BAC27}"/>
+              </a:ext>
+            </a:extLst>
+          </p:cNvPr>
+          <p:cNvPicPr>
+            <a:picLocks noChangeAspect="1"/>
+          </p:cNvPicPr>
+          <p:nvPr/>
+        </p:nvPicPr>
+        <p:blipFill>
+          <a:blip r:embed="rId2">
+            <a:extLst>
+              <a:ext uri="{28A0092B-C50C-407E-A947-70E740481C1C}">
+                <a14:useLocalDpi xmlns:a14="http://schemas.microsoft.com/office/drawing/2010/main" val="0"/>
+              </a:ext>
+            </a:extLst>
+          </a:blip>
+          <a:stretch>
+            <a:fillRect/>
+          </a:stretch>
+        </p:blipFill>
+        <p:spPr>
+          <a:xfrm>
+            <a:off x="0" y="0"/>
+            <a:ext cx="12192000" cy="6858000"/>
+          </a:xfrm>
+          <a:prstGeom prst="rect">
+            <a:avLst/>
+          </a:prstGeom>
+        </p:spPr>
+      </p:pic>
+      <p:sp>
+        <p:nvSpPr>
+          <p:cNvPr id="7" name="CuadroTexto 6">
+            <a:extLst>
+              <a:ext uri="{FF2B5EF4-FFF2-40B4-BE49-F238E27FC236}">
+                <a16:creationId xmlns:a16="http://schemas.microsoft.com/office/drawing/2014/main" id="{ADD180B3-394E-F5B7-5528-22C8C3FB6E23}"/>
+              </a:ext>
+            </a:extLst>
+          </p:cNvPr>
+          <p:cNvSpPr txBox="1"/>
+          <p:nvPr/>
+        </p:nvSpPr>
+        <p:spPr>
+          <a:xfrm>
+            <a:off x="165181" y="207239"/>
+            <a:ext cx="9899117" cy="523220"/>
+          </a:xfrm>
+          <a:prstGeom prst="rect">
+            <a:avLst/>
+          </a:prstGeom>
+          <a:noFill/>
+        </p:spPr>
+        <p:txBody>
+          <a:bodyPr wrap="square" rtlCol="0">
+            <a:spAutoFit/>
+          </a:bodyPr>
+          <a:lstStyle/>
+          <a:p>
+            <a:r>
+              <a:rPr lang="es-ES" sz="2800" b="1" dirty="0">
+                <a:latin typeface="Libre Franklin" pitchFamily="2" charset="0"/>
+              </a:rPr>
+              <a:t>Inconvenientes estadísticos de inflación cero</a:t>
+            </a:r>
+            <a:endParaRPr lang="es-GT" b="1" dirty="0">
+              <a:latin typeface="Libre Franklin" pitchFamily="2" charset="0"/>
+            </a:endParaRPr>
+          </a:p>
+        </p:txBody>
+      </p:sp>
+      <p:cxnSp>
+        <p:nvCxnSpPr>
+          <p:cNvPr id="8" name="Conector recto 7">
+            <a:extLst>
+              <a:ext uri="{FF2B5EF4-FFF2-40B4-BE49-F238E27FC236}">
+                <a16:creationId xmlns:a16="http://schemas.microsoft.com/office/drawing/2014/main" id="{16C81271-FEEB-0FD9-DC17-5AE6F8772B6E}"/>
+              </a:ext>
+            </a:extLst>
+          </p:cNvPr>
+          <p:cNvCxnSpPr>
+            <a:cxnSpLocks/>
+          </p:cNvCxnSpPr>
+          <p:nvPr/>
+        </p:nvCxnSpPr>
+        <p:spPr>
+          <a:xfrm>
+            <a:off x="265471" y="730459"/>
+            <a:ext cx="7655036" cy="0"/>
+          </a:xfrm>
+          <a:prstGeom prst="line">
+            <a:avLst/>
+          </a:prstGeom>
+          <a:ln w="38100">
+            <a:solidFill>
+              <a:srgbClr val="FF7F00"/>
+            </a:solidFill>
+          </a:ln>
+        </p:spPr>
+        <p:style>
+          <a:lnRef idx="1">
+            <a:schemeClr val="accent1"/>
+          </a:lnRef>
+          <a:fillRef idx="0">
+            <a:schemeClr val="accent1"/>
+          </a:fillRef>
+          <a:effectRef idx="0">
+            <a:schemeClr val="accent1"/>
+          </a:effectRef>
+          <a:fontRef idx="minor">
+            <a:schemeClr val="tx1"/>
+          </a:fontRef>
+        </p:style>
+      </p:cxnSp>
+      <p:sp>
+        <p:nvSpPr>
+          <p:cNvPr id="4" name="CuadroTexto 3">
+            <a:extLst>
+              <a:ext uri="{FF2B5EF4-FFF2-40B4-BE49-F238E27FC236}">
+                <a16:creationId xmlns:a16="http://schemas.microsoft.com/office/drawing/2014/main" id="{A345C3F1-0CAB-F332-29D4-4E90E371EDF2}"/>
+              </a:ext>
+            </a:extLst>
+          </p:cNvPr>
+          <p:cNvSpPr txBox="1"/>
+          <p:nvPr/>
+        </p:nvSpPr>
+        <p:spPr>
+          <a:xfrm>
+            <a:off x="490600" y="876271"/>
+            <a:ext cx="9899117" cy="400110"/>
+          </a:xfrm>
+          <a:prstGeom prst="rect">
+            <a:avLst/>
+          </a:prstGeom>
+          <a:noFill/>
+        </p:spPr>
+        <p:txBody>
+          <a:bodyPr wrap="square" rtlCol="0">
+            <a:spAutoFit/>
+          </a:bodyPr>
+          <a:lstStyle/>
+          <a:p>
+            <a:r>
+              <a:rPr lang="es-ES" sz="2000" b="1" dirty="0">
+                <a:latin typeface="Libre Franklin" pitchFamily="2" charset="0"/>
+              </a:rPr>
+              <a:t>Sesgo por calidad de bienes nuevos</a:t>
+            </a:r>
+            <a:endParaRPr lang="es-ES" sz="2000" dirty="0">
+              <a:latin typeface="Libre Franklin" pitchFamily="2" charset="0"/>
+            </a:endParaRPr>
+          </a:p>
+        </p:txBody>
+      </p:sp>
+      <p:sp>
+        <p:nvSpPr>
+          <p:cNvPr id="15" name="CuadroTexto 14">
+            <a:extLst>
+              <a:ext uri="{FF2B5EF4-FFF2-40B4-BE49-F238E27FC236}">
+                <a16:creationId xmlns:a16="http://schemas.microsoft.com/office/drawing/2014/main" id="{179600FE-70A4-9038-77A0-06B570D2E1D6}"/>
+              </a:ext>
+            </a:extLst>
+          </p:cNvPr>
+          <p:cNvSpPr txBox="1"/>
+          <p:nvPr/>
+        </p:nvSpPr>
+        <p:spPr>
+          <a:xfrm>
+            <a:off x="490599" y="1522473"/>
+            <a:ext cx="10739777" cy="2585323"/>
+          </a:xfrm>
+          <a:prstGeom prst="rect">
+            <a:avLst/>
+          </a:prstGeom>
+          <a:noFill/>
+        </p:spPr>
+        <p:txBody>
+          <a:bodyPr wrap="square">
+            <a:spAutoFit/>
+          </a:bodyPr>
+          <a:lstStyle/>
+          <a:p>
+            <a:pPr algn="just"/>
+            <a:r>
+              <a:rPr lang="es-ES" dirty="0">
+                <a:latin typeface="Libre Franklin" pitchFamily="2" charset="0"/>
+              </a:rPr>
+              <a:t>La correcta medición de la inflación está condicionada por la capacidad de la metodología para capturar cambios en la demanda, así como la calidad de los bienes que se comercian.</a:t>
+            </a:r>
+          </a:p>
+          <a:p>
+            <a:pPr algn="just"/>
+            <a:endParaRPr lang="es-ES" dirty="0">
+              <a:latin typeface="Libre Franklin" pitchFamily="2" charset="0"/>
+            </a:endParaRPr>
+          </a:p>
+          <a:p>
+            <a:pPr algn="just"/>
+            <a:r>
+              <a:rPr lang="es-ES" dirty="0">
+                <a:latin typeface="Libre Franklin" pitchFamily="2" charset="0"/>
+              </a:rPr>
+              <a:t>Este tipo de sesgo sucede cuando la metodología es incapaz de distinguir los incrementos de precios por aumentos en la calidad, de incrementos asociados a presiones inflacionarias. Así, por ejemplo, la inflación podría sobreestimarse si los incrementos en los precios no son ajustados por mejoras en la calidad de los productos.</a:t>
+            </a:r>
+          </a:p>
+          <a:p>
+            <a:pPr algn="just"/>
+            <a:endParaRPr lang="es-ES" dirty="0">
+              <a:latin typeface="Libre Franklin" pitchFamily="2" charset="0"/>
+            </a:endParaRPr>
+          </a:p>
+          <a:p>
+            <a:pPr algn="just"/>
+            <a:r>
+              <a:rPr lang="es-ES" dirty="0">
+                <a:latin typeface="Libre Franklin" pitchFamily="2" charset="0"/>
+              </a:rPr>
+              <a:t>Mantener la inflación objetivo a cero hace susceptible la medición del IPC ante este tipo de sesgo.</a:t>
+            </a:r>
+            <a:endParaRPr lang="es-GT" dirty="0">
+              <a:latin typeface="Libre Franklin" pitchFamily="2" charset="0"/>
+            </a:endParaRPr>
+          </a:p>
+        </p:txBody>
+      </p:sp>
+    </p:spTree>
+    <p:extLst>
+      <p:ext uri="{BB962C8B-B14F-4D97-AF65-F5344CB8AC3E}">
+        <p14:creationId xmlns:p14="http://schemas.microsoft.com/office/powerpoint/2010/main" val="1952798549"/>
+      </p:ext>
+    </p:extLst>
+  </p:cSld>
+  <p:clrMapOvr>
+    <a:masterClrMapping/>
+  </p:clrMapOvr>
+</p:sld>
+</file>
+
+<file path=ppt/slides/slide17.xml><?xml version="1.0" encoding="utf-8"?>
+<p:sld xmlns:a="http://schemas.openxmlformats.org/drawingml/2006/main" xmlns:r="http://schemas.openxmlformats.org/officeDocument/2006/relationships" xmlns:p="http://schemas.openxmlformats.org/presentationml/2006/main">
+  <p:cSld>
+    <p:spTree>
+      <p:nvGrpSpPr>
+        <p:cNvPr id="1" name="">
+          <a:extLst>
+            <a:ext uri="{FF2B5EF4-FFF2-40B4-BE49-F238E27FC236}">
+              <a16:creationId xmlns:a16="http://schemas.microsoft.com/office/drawing/2014/main" id="{7143CF66-944B-B561-38B7-8DB736A4C185}"/>
+            </a:ext>
+          </a:extLst>
+        </p:cNvPr>
+        <p:cNvGrpSpPr/>
+        <p:nvPr/>
+      </p:nvGrpSpPr>
+      <p:grpSpPr>
+        <a:xfrm>
+          <a:off x="0" y="0"/>
+          <a:ext cx="0" cy="0"/>
+          <a:chOff x="0" y="0"/>
+          <a:chExt cx="0" cy="0"/>
+        </a:xfrm>
+      </p:grpSpPr>
+      <p:sp>
+        <p:nvSpPr>
+          <p:cNvPr id="2" name="Título 1">
+            <a:extLst>
+              <a:ext uri="{FF2B5EF4-FFF2-40B4-BE49-F238E27FC236}">
+                <a16:creationId xmlns:a16="http://schemas.microsoft.com/office/drawing/2014/main" id="{37F04B3B-3B77-3927-F643-CADCB5CB6A07}"/>
+              </a:ext>
+            </a:extLst>
+          </p:cNvPr>
+          <p:cNvSpPr>
+            <a:spLocks noGrp="1"/>
+          </p:cNvSpPr>
+          <p:nvPr>
+            <p:ph type="ctrTitle"/>
+          </p:nvPr>
+        </p:nvSpPr>
+        <p:spPr/>
+        <p:txBody>
+          <a:bodyPr/>
+          <a:lstStyle/>
+          <a:p>
+            <a:endParaRPr lang="es-GT"/>
+          </a:p>
+        </p:txBody>
+      </p:sp>
+      <p:sp>
+        <p:nvSpPr>
+          <p:cNvPr id="3" name="Subtítulo 2">
+            <a:extLst>
+              <a:ext uri="{FF2B5EF4-FFF2-40B4-BE49-F238E27FC236}">
+                <a16:creationId xmlns:a16="http://schemas.microsoft.com/office/drawing/2014/main" id="{80877F59-70BB-4F09-BE77-618E736FCE45}"/>
+              </a:ext>
+            </a:extLst>
+          </p:cNvPr>
+          <p:cNvSpPr>
+            <a:spLocks noGrp="1"/>
+          </p:cNvSpPr>
+          <p:nvPr>
+            <p:ph type="subTitle" idx="1"/>
+          </p:nvPr>
+        </p:nvSpPr>
+        <p:spPr/>
+        <p:txBody>
+          <a:bodyPr/>
+          <a:lstStyle/>
+          <a:p>
+            <a:endParaRPr lang="es-GT"/>
+          </a:p>
+        </p:txBody>
+      </p:sp>
+      <p:pic>
+        <p:nvPicPr>
+          <p:cNvPr id="6" name="Imagen 5">
+            <a:extLst>
+              <a:ext uri="{FF2B5EF4-FFF2-40B4-BE49-F238E27FC236}">
+                <a16:creationId xmlns:a16="http://schemas.microsoft.com/office/drawing/2014/main" id="{7FA0B3DE-4137-9B06-82DF-EAC23B62AA7D}"/>
+              </a:ext>
+            </a:extLst>
+          </p:cNvPr>
+          <p:cNvPicPr>
+            <a:picLocks noChangeAspect="1"/>
+          </p:cNvPicPr>
+          <p:nvPr/>
+        </p:nvPicPr>
+        <p:blipFill>
+          <a:blip r:embed="rId2">
+            <a:extLst>
+              <a:ext uri="{28A0092B-C50C-407E-A947-70E740481C1C}">
+                <a14:useLocalDpi xmlns:a14="http://schemas.microsoft.com/office/drawing/2010/main" val="0"/>
+              </a:ext>
+            </a:extLst>
+          </a:blip>
+          <a:stretch>
+            <a:fillRect/>
+          </a:stretch>
+        </p:blipFill>
+        <p:spPr>
+          <a:xfrm>
+            <a:off x="0" y="0"/>
+            <a:ext cx="12192000" cy="6858000"/>
+          </a:xfrm>
+          <a:prstGeom prst="rect">
+            <a:avLst/>
+          </a:prstGeom>
+        </p:spPr>
+      </p:pic>
+      <p:sp>
+        <p:nvSpPr>
+          <p:cNvPr id="7" name="CuadroTexto 6">
+            <a:extLst>
+              <a:ext uri="{FF2B5EF4-FFF2-40B4-BE49-F238E27FC236}">
+                <a16:creationId xmlns:a16="http://schemas.microsoft.com/office/drawing/2014/main" id="{7039E571-B296-0C93-28A1-AAE2F9E1937D}"/>
+              </a:ext>
+            </a:extLst>
+          </p:cNvPr>
+          <p:cNvSpPr txBox="1"/>
+          <p:nvPr/>
+        </p:nvSpPr>
+        <p:spPr>
+          <a:xfrm>
+            <a:off x="165181" y="207239"/>
+            <a:ext cx="9899117" cy="523220"/>
+          </a:xfrm>
+          <a:prstGeom prst="rect">
+            <a:avLst/>
+          </a:prstGeom>
+          <a:noFill/>
+        </p:spPr>
+        <p:txBody>
+          <a:bodyPr wrap="square" rtlCol="0">
+            <a:spAutoFit/>
+          </a:bodyPr>
+          <a:lstStyle/>
+          <a:p>
+            <a:r>
+              <a:rPr lang="es-ES" sz="2800" b="1" dirty="0">
+                <a:latin typeface="Libre Franklin" pitchFamily="2" charset="0"/>
+              </a:rPr>
+              <a:t>Inconvenientes estadísticos de inflación cero</a:t>
+            </a:r>
+            <a:endParaRPr lang="es-GT" b="1" dirty="0">
+              <a:latin typeface="Libre Franklin" pitchFamily="2" charset="0"/>
+            </a:endParaRPr>
+          </a:p>
+        </p:txBody>
+      </p:sp>
+      <p:cxnSp>
+        <p:nvCxnSpPr>
+          <p:cNvPr id="8" name="Conector recto 7">
+            <a:extLst>
+              <a:ext uri="{FF2B5EF4-FFF2-40B4-BE49-F238E27FC236}">
+                <a16:creationId xmlns:a16="http://schemas.microsoft.com/office/drawing/2014/main" id="{9C4DC649-EC50-EA59-04D2-E1B33B9BF05D}"/>
+              </a:ext>
+            </a:extLst>
+          </p:cNvPr>
+          <p:cNvCxnSpPr>
+            <a:cxnSpLocks/>
+          </p:cNvCxnSpPr>
+          <p:nvPr/>
+        </p:nvCxnSpPr>
+        <p:spPr>
+          <a:xfrm>
+            <a:off x="265471" y="730459"/>
+            <a:ext cx="7655036" cy="0"/>
+          </a:xfrm>
+          <a:prstGeom prst="line">
+            <a:avLst/>
+          </a:prstGeom>
+          <a:ln w="38100">
+            <a:solidFill>
+              <a:srgbClr val="FF7F00"/>
+            </a:solidFill>
+          </a:ln>
+        </p:spPr>
+        <p:style>
+          <a:lnRef idx="1">
+            <a:schemeClr val="accent1"/>
+          </a:lnRef>
+          <a:fillRef idx="0">
+            <a:schemeClr val="accent1"/>
+          </a:fillRef>
+          <a:effectRef idx="0">
+            <a:schemeClr val="accent1"/>
+          </a:effectRef>
+          <a:fontRef idx="minor">
+            <a:schemeClr val="tx1"/>
+          </a:fontRef>
+        </p:style>
+      </p:cxnSp>
+      <p:sp>
+        <p:nvSpPr>
+          <p:cNvPr id="4" name="CuadroTexto 3">
+            <a:extLst>
+              <a:ext uri="{FF2B5EF4-FFF2-40B4-BE49-F238E27FC236}">
+                <a16:creationId xmlns:a16="http://schemas.microsoft.com/office/drawing/2014/main" id="{133A1198-0B2D-C5C1-E75B-D3FA02C8518C}"/>
+              </a:ext>
+            </a:extLst>
+          </p:cNvPr>
+          <p:cNvSpPr txBox="1"/>
+          <p:nvPr/>
+        </p:nvSpPr>
+        <p:spPr>
+          <a:xfrm>
+            <a:off x="490600" y="876271"/>
+            <a:ext cx="9899117" cy="400110"/>
+          </a:xfrm>
+          <a:prstGeom prst="rect">
+            <a:avLst/>
+          </a:prstGeom>
+          <a:noFill/>
+        </p:spPr>
+        <p:txBody>
+          <a:bodyPr wrap="square" rtlCol="0">
+            <a:spAutoFit/>
+          </a:bodyPr>
+          <a:lstStyle/>
+          <a:p>
+            <a:r>
+              <a:rPr lang="es-ES" sz="2000" b="1" dirty="0">
+                <a:latin typeface="Libre Franklin" pitchFamily="2" charset="0"/>
+              </a:rPr>
+              <a:t>Sesgo por calidad de bienes nuevos</a:t>
+            </a:r>
+            <a:endParaRPr lang="es-ES" sz="2000" dirty="0">
+              <a:latin typeface="Libre Franklin" pitchFamily="2" charset="0"/>
+            </a:endParaRPr>
+          </a:p>
+        </p:txBody>
+      </p:sp>
+      <p:sp>
+        <p:nvSpPr>
+          <p:cNvPr id="15" name="CuadroTexto 14">
+            <a:extLst>
+              <a:ext uri="{FF2B5EF4-FFF2-40B4-BE49-F238E27FC236}">
+                <a16:creationId xmlns:a16="http://schemas.microsoft.com/office/drawing/2014/main" id="{61BA88B2-CCD0-DFD2-961F-5CAC23F99EB0}"/>
+              </a:ext>
+            </a:extLst>
+          </p:cNvPr>
+          <p:cNvSpPr txBox="1"/>
+          <p:nvPr/>
+        </p:nvSpPr>
+        <p:spPr>
+          <a:xfrm>
+            <a:off x="5605658" y="1368456"/>
+            <a:ext cx="6049722" cy="2585323"/>
+          </a:xfrm>
+          <a:prstGeom prst="rect">
+            <a:avLst/>
+          </a:prstGeom>
+          <a:noFill/>
+        </p:spPr>
+        <p:txBody>
+          <a:bodyPr wrap="square">
+            <a:spAutoFit/>
+          </a:bodyPr>
+          <a:lstStyle/>
+          <a:p>
+            <a:pPr algn="just"/>
+            <a:r>
+              <a:rPr lang="es-ES" dirty="0">
+                <a:latin typeface="Libre Franklin" pitchFamily="2" charset="0"/>
+              </a:rPr>
+              <a:t>En lo que refiere a Guatemala, el INE ha señalado que este ha sido uno de los apartados que tomó en cuenta para la base 2023, indicando que: </a:t>
+            </a:r>
+          </a:p>
+          <a:p>
+            <a:pPr algn="just"/>
+            <a:endParaRPr lang="es-ES" i="1" dirty="0">
+              <a:latin typeface="Libre Franklin" pitchFamily="2" charset="0"/>
+            </a:endParaRPr>
+          </a:p>
+          <a:p>
+            <a:pPr algn="just"/>
+            <a:r>
+              <a:rPr lang="es-ES" i="1" dirty="0">
+                <a:latin typeface="Libre Franklin" pitchFamily="2" charset="0"/>
+              </a:rPr>
+              <a:t>“</a:t>
+            </a:r>
+            <a:r>
+              <a:rPr lang="es-GT" i="1" dirty="0">
+                <a:latin typeface="Libre Franklin" pitchFamily="2" charset="0"/>
+              </a:rPr>
+              <a:t>Para cumplir con la recomendación el INE elaboró un documento de especificaciones para cada bien o servicio, que es de uso interno y se realizó un proceso de capacitación para todo el personal de campo”</a:t>
+            </a:r>
+          </a:p>
+          <a:p>
+            <a:endParaRPr lang="es-GT" i="1" dirty="0">
+              <a:latin typeface="Libre Franklin" pitchFamily="2" charset="0"/>
+            </a:endParaRPr>
+          </a:p>
+        </p:txBody>
+      </p:sp>
+      <p:pic>
+        <p:nvPicPr>
+          <p:cNvPr id="9" name="Imagen 8">
+            <a:extLst>
+              <a:ext uri="{FF2B5EF4-FFF2-40B4-BE49-F238E27FC236}">
+                <a16:creationId xmlns:a16="http://schemas.microsoft.com/office/drawing/2014/main" id="{09DA5230-79CD-0B37-FE0F-3013A3589A1E}"/>
+              </a:ext>
+            </a:extLst>
+          </p:cNvPr>
+          <p:cNvPicPr>
+            <a:picLocks noChangeAspect="1"/>
+          </p:cNvPicPr>
+          <p:nvPr/>
+        </p:nvPicPr>
+        <p:blipFill>
+          <a:blip r:embed="rId3"/>
+          <a:stretch>
+            <a:fillRect/>
+          </a:stretch>
+        </p:blipFill>
+        <p:spPr>
+          <a:xfrm>
+            <a:off x="418081" y="1368456"/>
+            <a:ext cx="5022077" cy="2787765"/>
+          </a:xfrm>
+          <a:prstGeom prst="rect">
+            <a:avLst/>
+          </a:prstGeom>
+        </p:spPr>
+      </p:pic>
+      <p:sp>
+        <p:nvSpPr>
+          <p:cNvPr id="10" name="CuadroTexto 9">
+            <a:extLst>
+              <a:ext uri="{FF2B5EF4-FFF2-40B4-BE49-F238E27FC236}">
+                <a16:creationId xmlns:a16="http://schemas.microsoft.com/office/drawing/2014/main" id="{2644B7C1-71CC-63A2-21F4-6C6550EE22F7}"/>
+              </a:ext>
+            </a:extLst>
+          </p:cNvPr>
+          <p:cNvSpPr txBox="1"/>
+          <p:nvPr/>
+        </p:nvSpPr>
+        <p:spPr>
+          <a:xfrm>
+            <a:off x="413788" y="4124494"/>
+            <a:ext cx="4943823" cy="276999"/>
+          </a:xfrm>
+          <a:prstGeom prst="rect">
+            <a:avLst/>
+          </a:prstGeom>
+          <a:noFill/>
+        </p:spPr>
+        <p:txBody>
+          <a:bodyPr wrap="square">
+            <a:spAutoFit/>
+          </a:bodyPr>
+          <a:lstStyle/>
+          <a:p>
+            <a:pPr algn="just"/>
+            <a:r>
+              <a:rPr lang="es-ES" sz="1200" dirty="0">
+                <a:latin typeface="Libre Franklin" pitchFamily="2" charset="0"/>
+              </a:rPr>
+              <a:t>Fuente: Instituto Nacional de Estadística (INE)</a:t>
+            </a:r>
+            <a:endParaRPr lang="es-GT" sz="1200" dirty="0">
+              <a:latin typeface="Libre Franklin" pitchFamily="2" charset="0"/>
+            </a:endParaRPr>
+          </a:p>
+        </p:txBody>
+      </p:sp>
+    </p:spTree>
+    <p:extLst>
+      <p:ext uri="{BB962C8B-B14F-4D97-AF65-F5344CB8AC3E}">
+        <p14:creationId xmlns:p14="http://schemas.microsoft.com/office/powerpoint/2010/main" val="4036590644"/>
+      </p:ext>
+    </p:extLst>
+  </p:cSld>
+  <p:clrMapOvr>
+    <a:masterClrMapping/>
+  </p:clrMapOvr>
+</p:sld>
+</file>
+
+<file path=ppt/slides/slide18.xml><?xml version="1.0" encoding="utf-8"?>
+<p:sld xmlns:a="http://schemas.openxmlformats.org/drawingml/2006/main" xmlns:r="http://schemas.openxmlformats.org/officeDocument/2006/relationships" xmlns:p="http://schemas.openxmlformats.org/presentationml/2006/main">
+  <p:cSld>
+    <p:spTree>
+      <p:nvGrpSpPr>
+        <p:cNvPr id="1" name="">
+          <a:extLst>
+            <a:ext uri="{FF2B5EF4-FFF2-40B4-BE49-F238E27FC236}">
+              <a16:creationId xmlns:a16="http://schemas.microsoft.com/office/drawing/2014/main" id="{692FA0C2-07B7-FF77-4014-C96B90F89972}"/>
+            </a:ext>
+          </a:extLst>
+        </p:cNvPr>
+        <p:cNvGrpSpPr/>
+        <p:nvPr/>
+      </p:nvGrpSpPr>
+      <p:grpSpPr>
+        <a:xfrm>
+          <a:off x="0" y="0"/>
+          <a:ext cx="0" cy="0"/>
+          <a:chOff x="0" y="0"/>
+          <a:chExt cx="0" cy="0"/>
+        </a:xfrm>
+      </p:grpSpPr>
+      <p:pic>
+        <p:nvPicPr>
+          <p:cNvPr id="13" name="Imagen 12">
+            <a:extLst>
+              <a:ext uri="{FF2B5EF4-FFF2-40B4-BE49-F238E27FC236}">
+                <a16:creationId xmlns:a16="http://schemas.microsoft.com/office/drawing/2014/main" id="{714356D2-3401-7CC0-D922-B47F1D9E4D74}"/>
+              </a:ext>
+            </a:extLst>
+          </p:cNvPr>
+          <p:cNvPicPr>
+            <a:picLocks noChangeAspect="1"/>
+          </p:cNvPicPr>
+          <p:nvPr/>
+        </p:nvPicPr>
+        <p:blipFill>
+          <a:blip r:embed="rId3"/>
+          <a:stretch>
+            <a:fillRect/>
+          </a:stretch>
+        </p:blipFill>
+        <p:spPr>
+          <a:xfrm>
+            <a:off x="-1" y="0"/>
+            <a:ext cx="12208956" cy="6858000"/>
+          </a:xfrm>
+          <a:prstGeom prst="rect">
+            <a:avLst/>
+          </a:prstGeom>
+        </p:spPr>
+      </p:pic>
+      <p:sp>
+        <p:nvSpPr>
+          <p:cNvPr id="4" name="CuadroTexto 3">
+            <a:extLst>
+              <a:ext uri="{FF2B5EF4-FFF2-40B4-BE49-F238E27FC236}">
+                <a16:creationId xmlns:a16="http://schemas.microsoft.com/office/drawing/2014/main" id="{5E7A8AC5-54C2-29E5-96AE-BF39D1DF35E0}"/>
+              </a:ext>
+            </a:extLst>
+          </p:cNvPr>
+          <p:cNvSpPr txBox="1"/>
+          <p:nvPr/>
+        </p:nvSpPr>
+        <p:spPr>
+          <a:xfrm>
+            <a:off x="3367825" y="2274838"/>
+            <a:ext cx="5364049" cy="2308324"/>
+          </a:xfrm>
+          <a:prstGeom prst="rect">
+            <a:avLst/>
+          </a:prstGeom>
+          <a:noFill/>
+        </p:spPr>
+        <p:txBody>
+          <a:bodyPr wrap="square" rtlCol="0">
+            <a:spAutoFit/>
+          </a:bodyPr>
+          <a:lstStyle/>
+          <a:p>
+            <a:pPr algn="ctr"/>
+            <a:r>
+              <a:rPr lang="es-MX" sz="4800" b="1" dirty="0">
+                <a:solidFill>
+                  <a:schemeClr val="bg1"/>
+                </a:solidFill>
+                <a:latin typeface="Libre Franklin" pitchFamily="2" charset="0"/>
+              </a:rPr>
+              <a:t>Argumentos a favor de inflación positiva</a:t>
+            </a:r>
+          </a:p>
+        </p:txBody>
+      </p:sp>
+    </p:spTree>
+    <p:extLst>
+      <p:ext uri="{BB962C8B-B14F-4D97-AF65-F5344CB8AC3E}">
+        <p14:creationId xmlns:p14="http://schemas.microsoft.com/office/powerpoint/2010/main" val="2821158319"/>
+      </p:ext>
+    </p:extLst>
+  </p:cSld>
+  <p:clrMapOvr>
+    <a:masterClrMapping/>
+  </p:clrMapOvr>
+</p:sld>
+</file>
+
+<file path=ppt/slides/slide19.xml><?xml version="1.0" encoding="utf-8"?>
+<p:sld xmlns:a="http://schemas.openxmlformats.org/drawingml/2006/main" xmlns:r="http://schemas.openxmlformats.org/officeDocument/2006/relationships" xmlns:p="http://schemas.openxmlformats.org/presentationml/2006/main">
+  <p:cSld>
+    <p:spTree>
+      <p:nvGrpSpPr>
+        <p:cNvPr id="1" name="">
+          <a:extLst>
+            <a:ext uri="{FF2B5EF4-FFF2-40B4-BE49-F238E27FC236}">
+              <a16:creationId xmlns:a16="http://schemas.microsoft.com/office/drawing/2014/main" id="{EEC423FC-4400-9444-7F14-3C262EFC325C}"/>
+            </a:ext>
+          </a:extLst>
+        </p:cNvPr>
+        <p:cNvGrpSpPr/>
+        <p:nvPr/>
+      </p:nvGrpSpPr>
+      <p:grpSpPr>
+        <a:xfrm>
+          <a:off x="0" y="0"/>
+          <a:ext cx="0" cy="0"/>
+          <a:chOff x="0" y="0"/>
+          <a:chExt cx="0" cy="0"/>
+        </a:xfrm>
+      </p:grpSpPr>
+      <p:sp>
+        <p:nvSpPr>
+          <p:cNvPr id="2" name="Título 1">
+            <a:extLst>
+              <a:ext uri="{FF2B5EF4-FFF2-40B4-BE49-F238E27FC236}">
+                <a16:creationId xmlns:a16="http://schemas.microsoft.com/office/drawing/2014/main" id="{68843A37-25C7-9ADA-FF5F-F9135FE7022F}"/>
+              </a:ext>
+            </a:extLst>
+          </p:cNvPr>
+          <p:cNvSpPr>
+            <a:spLocks noGrp="1"/>
+          </p:cNvSpPr>
+          <p:nvPr>
+            <p:ph type="ctrTitle"/>
+          </p:nvPr>
+        </p:nvSpPr>
+        <p:spPr/>
+        <p:txBody>
+          <a:bodyPr/>
+          <a:lstStyle/>
+          <a:p>
+            <a:endParaRPr lang="es-GT"/>
+          </a:p>
+        </p:txBody>
+      </p:sp>
+      <p:sp>
+        <p:nvSpPr>
+          <p:cNvPr id="3" name="Subtítulo 2">
+            <a:extLst>
+              <a:ext uri="{FF2B5EF4-FFF2-40B4-BE49-F238E27FC236}">
+                <a16:creationId xmlns:a16="http://schemas.microsoft.com/office/drawing/2014/main" id="{85193844-5CDD-7E71-0501-D5CC192D4B06}"/>
+              </a:ext>
+            </a:extLst>
+          </p:cNvPr>
+          <p:cNvSpPr>
+            <a:spLocks noGrp="1"/>
+          </p:cNvSpPr>
+          <p:nvPr>
+            <p:ph type="subTitle" idx="1"/>
+          </p:nvPr>
+        </p:nvSpPr>
+        <p:spPr/>
+        <p:txBody>
+          <a:bodyPr/>
+          <a:lstStyle/>
+          <a:p>
+            <a:endParaRPr lang="es-GT"/>
+          </a:p>
+        </p:txBody>
+      </p:sp>
+      <p:pic>
+        <p:nvPicPr>
+          <p:cNvPr id="6" name="Imagen 5">
+            <a:extLst>
+              <a:ext uri="{FF2B5EF4-FFF2-40B4-BE49-F238E27FC236}">
+                <a16:creationId xmlns:a16="http://schemas.microsoft.com/office/drawing/2014/main" id="{C79C6AC4-4583-04F6-1636-C5E07A632967}"/>
+              </a:ext>
+            </a:extLst>
+          </p:cNvPr>
+          <p:cNvPicPr>
+            <a:picLocks noChangeAspect="1"/>
+          </p:cNvPicPr>
+          <p:nvPr/>
+        </p:nvPicPr>
+        <p:blipFill>
+          <a:blip r:embed="rId2">
+            <a:extLst>
+              <a:ext uri="{28A0092B-C50C-407E-A947-70E740481C1C}">
+                <a14:useLocalDpi xmlns:a14="http://schemas.microsoft.com/office/drawing/2010/main" val="0"/>
+              </a:ext>
+            </a:extLst>
+          </a:blip>
+          <a:stretch>
+            <a:fillRect/>
+          </a:stretch>
+        </p:blipFill>
+        <p:spPr>
+          <a:xfrm>
+            <a:off x="0" y="0"/>
+            <a:ext cx="12192000" cy="6858000"/>
+          </a:xfrm>
+          <a:prstGeom prst="rect">
+            <a:avLst/>
+          </a:prstGeom>
+        </p:spPr>
+      </p:pic>
+      <p:sp>
+        <p:nvSpPr>
+          <p:cNvPr id="7" name="CuadroTexto 6">
+            <a:extLst>
+              <a:ext uri="{FF2B5EF4-FFF2-40B4-BE49-F238E27FC236}">
+                <a16:creationId xmlns:a16="http://schemas.microsoft.com/office/drawing/2014/main" id="{CFB18E91-8199-4AC3-611E-160BBD7EA8CE}"/>
+              </a:ext>
+            </a:extLst>
+          </p:cNvPr>
+          <p:cNvSpPr txBox="1"/>
+          <p:nvPr/>
+        </p:nvSpPr>
+        <p:spPr>
+          <a:xfrm>
+            <a:off x="165181" y="207239"/>
+            <a:ext cx="9899117" cy="523220"/>
+          </a:xfrm>
+          <a:prstGeom prst="rect">
+            <a:avLst/>
+          </a:prstGeom>
+          <a:noFill/>
+        </p:spPr>
+        <p:txBody>
+          <a:bodyPr wrap="square" rtlCol="0">
+            <a:spAutoFit/>
+          </a:bodyPr>
+          <a:lstStyle/>
+          <a:p>
+            <a:r>
+              <a:rPr lang="es-ES" sz="2800" b="1" dirty="0">
+                <a:latin typeface="Libre Franklin" pitchFamily="2" charset="0"/>
+              </a:rPr>
+              <a:t>Argumentos a favor de una inflación positiva</a:t>
+            </a:r>
+            <a:endParaRPr lang="es-GT" b="1" dirty="0">
+              <a:latin typeface="Libre Franklin" pitchFamily="2" charset="0"/>
+            </a:endParaRPr>
+          </a:p>
+        </p:txBody>
+      </p:sp>
+      <p:cxnSp>
+        <p:nvCxnSpPr>
+          <p:cNvPr id="8" name="Conector recto 7">
+            <a:extLst>
+              <a:ext uri="{FF2B5EF4-FFF2-40B4-BE49-F238E27FC236}">
+                <a16:creationId xmlns:a16="http://schemas.microsoft.com/office/drawing/2014/main" id="{7B58A893-5585-FAF8-3236-E2609A3B686C}"/>
+              </a:ext>
+            </a:extLst>
+          </p:cNvPr>
+          <p:cNvCxnSpPr>
+            <a:cxnSpLocks/>
+          </p:cNvCxnSpPr>
+          <p:nvPr/>
+        </p:nvCxnSpPr>
+        <p:spPr>
+          <a:xfrm>
+            <a:off x="265471" y="730459"/>
+            <a:ext cx="7655036" cy="0"/>
+          </a:xfrm>
+          <a:prstGeom prst="line">
+            <a:avLst/>
+          </a:prstGeom>
+          <a:ln w="38100">
+            <a:solidFill>
+              <a:srgbClr val="FF7F00"/>
+            </a:solidFill>
+          </a:ln>
+        </p:spPr>
+        <p:style>
+          <a:lnRef idx="1">
+            <a:schemeClr val="accent1"/>
+          </a:lnRef>
+          <a:fillRef idx="0">
+            <a:schemeClr val="accent1"/>
+          </a:fillRef>
+          <a:effectRef idx="0">
+            <a:schemeClr val="accent1"/>
+          </a:effectRef>
+          <a:fontRef idx="minor">
+            <a:schemeClr val="tx1"/>
+          </a:fontRef>
+        </p:style>
+      </p:cxnSp>
+      <p:sp>
+        <p:nvSpPr>
+          <p:cNvPr id="4" name="CuadroTexto 3">
+            <a:extLst>
+              <a:ext uri="{FF2B5EF4-FFF2-40B4-BE49-F238E27FC236}">
+                <a16:creationId xmlns:a16="http://schemas.microsoft.com/office/drawing/2014/main" id="{937C6AA0-7B94-BE1D-A404-1E916823BC60}"/>
+              </a:ext>
+            </a:extLst>
+          </p:cNvPr>
+          <p:cNvSpPr txBox="1"/>
+          <p:nvPr/>
+        </p:nvSpPr>
+        <p:spPr>
+          <a:xfrm>
+            <a:off x="490600" y="876271"/>
+            <a:ext cx="9899117" cy="400110"/>
+          </a:xfrm>
+          <a:prstGeom prst="rect">
+            <a:avLst/>
+          </a:prstGeom>
+          <a:noFill/>
+        </p:spPr>
+        <p:txBody>
+          <a:bodyPr wrap="square" rtlCol="0">
+            <a:spAutoFit/>
+          </a:bodyPr>
+          <a:lstStyle/>
+          <a:p>
+            <a:r>
+              <a:rPr lang="es-ES" sz="2000" b="1" dirty="0">
+                <a:latin typeface="Libre Franklin" pitchFamily="2" charset="0"/>
+              </a:rPr>
+              <a:t>Reduce las distorsiones en los precios relativos</a:t>
+            </a:r>
+            <a:endParaRPr lang="es-ES" sz="2000" dirty="0">
+              <a:latin typeface="Libre Franklin" pitchFamily="2" charset="0"/>
+            </a:endParaRPr>
+          </a:p>
+        </p:txBody>
+      </p:sp>
+      <p:sp>
+        <p:nvSpPr>
+          <p:cNvPr id="15" name="CuadroTexto 14">
+            <a:extLst>
+              <a:ext uri="{FF2B5EF4-FFF2-40B4-BE49-F238E27FC236}">
+                <a16:creationId xmlns:a16="http://schemas.microsoft.com/office/drawing/2014/main" id="{D1A0DD47-6E41-D9E8-0966-9354349F7AD8}"/>
+              </a:ext>
+            </a:extLst>
+          </p:cNvPr>
+          <p:cNvSpPr txBox="1"/>
+          <p:nvPr/>
+        </p:nvSpPr>
+        <p:spPr>
+          <a:xfrm>
+            <a:off x="477591" y="1337807"/>
+            <a:ext cx="11396730" cy="2031325"/>
+          </a:xfrm>
+          <a:prstGeom prst="rect">
+            <a:avLst/>
+          </a:prstGeom>
+          <a:noFill/>
+        </p:spPr>
+        <p:txBody>
+          <a:bodyPr wrap="square">
+            <a:spAutoFit/>
+          </a:bodyPr>
+          <a:lstStyle/>
+          <a:p>
+            <a:pPr algn="just"/>
+            <a:r>
+              <a:rPr lang="es-MX" dirty="0">
+                <a:latin typeface="Libre Franklin" pitchFamily="2" charset="0"/>
+              </a:rPr>
+              <a:t>Con bastante regularidad los precios de los productos no se ajustan de forma continua. En contextos de alta inflación o deflación se generan grandes distorsiones en los precios relativos.</a:t>
+            </a:r>
+          </a:p>
+          <a:p>
+            <a:pPr algn="just"/>
+            <a:endParaRPr lang="es-MX" dirty="0">
+              <a:latin typeface="Libre Franklin" pitchFamily="2" charset="0"/>
+            </a:endParaRPr>
+          </a:p>
+          <a:p>
+            <a:pPr marL="285750" indent="-285750" algn="just">
+              <a:buFont typeface="Arial" panose="020B0604020202020204" pitchFamily="34" charset="0"/>
+              <a:buChar char="•"/>
+            </a:pPr>
+            <a:r>
+              <a:rPr lang="es-MX" dirty="0">
+                <a:latin typeface="Libre Franklin" pitchFamily="2" charset="0"/>
+              </a:rPr>
+              <a:t>Si el precio de un bien no se ajusta con suficiente velocidad experimenta caídas de sus precios relativos</a:t>
+            </a:r>
+          </a:p>
+          <a:p>
+            <a:pPr algn="just"/>
+            <a:endParaRPr lang="es-MX" dirty="0">
+              <a:latin typeface="Libre Franklin" pitchFamily="2" charset="0"/>
+            </a:endParaRPr>
+          </a:p>
+          <a:p>
+            <a:pPr marL="285750" indent="-285750" algn="just">
+              <a:buFont typeface="Arial" panose="020B0604020202020204" pitchFamily="34" charset="0"/>
+              <a:buChar char="•"/>
+            </a:pPr>
+            <a:r>
+              <a:rPr lang="es-MX" dirty="0">
+                <a:latin typeface="Libre Franklin" pitchFamily="2" charset="0"/>
+              </a:rPr>
+              <a:t>En contextos inflacionarios las empresas sobre reaccionan elevando los precios al alza anticipando una caída en sus precios relativos.</a:t>
+            </a:r>
+            <a:endParaRPr lang="es-GT" dirty="0">
+              <a:latin typeface="Libre Franklin" pitchFamily="2" charset="0"/>
+            </a:endParaRPr>
+          </a:p>
+        </p:txBody>
+      </p:sp>
+      <p:sp>
+        <p:nvSpPr>
+          <p:cNvPr id="5" name="CuadroTexto 4">
+            <a:extLst>
+              <a:ext uri="{FF2B5EF4-FFF2-40B4-BE49-F238E27FC236}">
+                <a16:creationId xmlns:a16="http://schemas.microsoft.com/office/drawing/2014/main" id="{85E7B71F-41C3-F74E-6AEA-E731DBD8928E}"/>
+              </a:ext>
+            </a:extLst>
+          </p:cNvPr>
+          <p:cNvSpPr txBox="1"/>
+          <p:nvPr/>
+        </p:nvSpPr>
+        <p:spPr>
+          <a:xfrm>
+            <a:off x="605307" y="3747978"/>
+            <a:ext cx="10837572" cy="369332"/>
+          </a:xfrm>
+          <a:prstGeom prst="rect">
+            <a:avLst/>
+          </a:prstGeom>
+          <a:noFill/>
+        </p:spPr>
+        <p:txBody>
+          <a:bodyPr wrap="square" rtlCol="0">
+            <a:spAutoFit/>
+          </a:bodyPr>
+          <a:lstStyle/>
+          <a:p>
+            <a:r>
+              <a:rPr lang="es-MX" dirty="0">
+                <a:latin typeface="Libre Franklin" pitchFamily="2" charset="0"/>
+              </a:rPr>
+              <a:t>Ante lo anterior cabe la pregunta </a:t>
+            </a:r>
+            <a:r>
+              <a:rPr lang="es-MX" b="1" i="1" dirty="0">
+                <a:latin typeface="Libre Franklin" pitchFamily="2" charset="0"/>
+              </a:rPr>
+              <a:t>¿Cuál sería la inflación optima que minimice las distorsiones?</a:t>
+            </a:r>
+          </a:p>
+        </p:txBody>
+      </p:sp>
+    </p:spTree>
+    <p:extLst>
+      <p:ext uri="{BB962C8B-B14F-4D97-AF65-F5344CB8AC3E}">
+        <p14:creationId xmlns:p14="http://schemas.microsoft.com/office/powerpoint/2010/main" val="3735086557"/>
+      </p:ext>
+    </p:extLst>
+  </p:cSld>
+  <p:clrMapOvr>
+    <a:masterClrMapping/>
+  </p:clrMapOvr>
+</p:sld>
+</file>
+
+<file path=ppt/slides/slide2.xml><?xml version="1.0" encoding="utf-8"?>
+<p:sld xmlns:a="http://schemas.openxmlformats.org/drawingml/2006/main" xmlns:r="http://schemas.openxmlformats.org/officeDocument/2006/relationships" xmlns:p="http://schemas.openxmlformats.org/presentationml/2006/main">
+  <p:cSld>
+    <p:spTree>
+      <p:nvGrpSpPr>
+        <p:cNvPr id="1" name="">
+          <a:extLst>
+            <a:ext uri="{FF2B5EF4-FFF2-40B4-BE49-F238E27FC236}">
+              <a16:creationId xmlns:a16="http://schemas.microsoft.com/office/drawing/2014/main" id="{EB6AA1A9-8DB9-8217-6799-61188BA14BE4}"/>
+            </a:ext>
+          </a:extLst>
+        </p:cNvPr>
+        <p:cNvGrpSpPr/>
+        <p:nvPr/>
+      </p:nvGrpSpPr>
+      <p:grpSpPr>
+        <a:xfrm>
+          <a:off x="0" y="0"/>
+          <a:ext cx="0" cy="0"/>
+          <a:chOff x="0" y="0"/>
+          <a:chExt cx="0" cy="0"/>
+        </a:xfrm>
+      </p:grpSpPr>
+      <p:pic>
+        <p:nvPicPr>
+          <p:cNvPr id="13" name="Imagen 12">
+            <a:extLst>
+              <a:ext uri="{FF2B5EF4-FFF2-40B4-BE49-F238E27FC236}">
+                <a16:creationId xmlns:a16="http://schemas.microsoft.com/office/drawing/2014/main" id="{AB09F7BA-0A85-1EAF-B696-43D631D42693}"/>
+              </a:ext>
+            </a:extLst>
+          </p:cNvPr>
+          <p:cNvPicPr>
+            <a:picLocks noChangeAspect="1"/>
+          </p:cNvPicPr>
+          <p:nvPr/>
+        </p:nvPicPr>
+        <p:blipFill>
+          <a:blip r:embed="rId3"/>
+          <a:stretch>
+            <a:fillRect/>
+          </a:stretch>
+        </p:blipFill>
+        <p:spPr>
+          <a:xfrm>
+            <a:off x="-1" y="0"/>
+            <a:ext cx="12208956" cy="6858000"/>
+          </a:xfrm>
+          <a:prstGeom prst="rect">
+            <a:avLst/>
+          </a:prstGeom>
+        </p:spPr>
+      </p:pic>
+      <p:sp>
+        <p:nvSpPr>
+          <p:cNvPr id="4" name="CuadroTexto 3">
+            <a:extLst>
+              <a:ext uri="{FF2B5EF4-FFF2-40B4-BE49-F238E27FC236}">
+                <a16:creationId xmlns:a16="http://schemas.microsoft.com/office/drawing/2014/main" id="{A6C8FC43-76E7-592A-8555-D7EDEA428B80}"/>
+              </a:ext>
+            </a:extLst>
+          </p:cNvPr>
+          <p:cNvSpPr txBox="1"/>
+          <p:nvPr/>
+        </p:nvSpPr>
+        <p:spPr>
+          <a:xfrm>
+            <a:off x="3575381" y="2357717"/>
+            <a:ext cx="4671072" cy="1569660"/>
+          </a:xfrm>
+          <a:prstGeom prst="rect">
+            <a:avLst/>
+          </a:prstGeom>
+          <a:noFill/>
+        </p:spPr>
+        <p:txBody>
+          <a:bodyPr wrap="square" rtlCol="0">
+            <a:spAutoFit/>
+          </a:bodyPr>
+          <a:lstStyle/>
+          <a:p>
+            <a:pPr algn="ctr"/>
+            <a:r>
+              <a:rPr lang="es-MX" sz="4800" b="1" dirty="0">
+                <a:solidFill>
+                  <a:schemeClr val="bg1"/>
+                </a:solidFill>
+                <a:latin typeface="Libre Franklin" pitchFamily="2" charset="0"/>
+              </a:rPr>
+              <a:t>Revisión literaria</a:t>
+            </a:r>
+          </a:p>
+        </p:txBody>
+      </p:sp>
+    </p:spTree>
+    <p:extLst>
+      <p:ext uri="{BB962C8B-B14F-4D97-AF65-F5344CB8AC3E}">
+        <p14:creationId xmlns:p14="http://schemas.microsoft.com/office/powerpoint/2010/main" val="1866258809"/>
+      </p:ext>
+    </p:extLst>
+  </p:cSld>
+  <p:clrMapOvr>
+    <a:masterClrMapping/>
+  </p:clrMapOvr>
+</p:sld>
+</file>
+
+<file path=ppt/slides/slide20.xml><?xml version="1.0" encoding="utf-8"?>
+<p:sld xmlns:a="http://schemas.openxmlformats.org/drawingml/2006/main" xmlns:r="http://schemas.openxmlformats.org/officeDocument/2006/relationships" xmlns:p="http://schemas.openxmlformats.org/presentationml/2006/main">
+  <p:cSld>
+    <p:spTree>
+      <p:nvGrpSpPr>
+        <p:cNvPr id="1" name="">
+          <a:extLst>
+            <a:ext uri="{FF2B5EF4-FFF2-40B4-BE49-F238E27FC236}">
+              <a16:creationId xmlns:a16="http://schemas.microsoft.com/office/drawing/2014/main" id="{C7B4D007-084B-3E92-BF81-CB032CD84084}"/>
+            </a:ext>
+          </a:extLst>
+        </p:cNvPr>
+        <p:cNvGrpSpPr/>
+        <p:nvPr/>
+      </p:nvGrpSpPr>
+      <p:grpSpPr>
+        <a:xfrm>
+          <a:off x="0" y="0"/>
+          <a:ext cx="0" cy="0"/>
+          <a:chOff x="0" y="0"/>
+          <a:chExt cx="0" cy="0"/>
+        </a:xfrm>
+      </p:grpSpPr>
+      <p:sp>
+        <p:nvSpPr>
+          <p:cNvPr id="2" name="Título 1">
+            <a:extLst>
+              <a:ext uri="{FF2B5EF4-FFF2-40B4-BE49-F238E27FC236}">
+                <a16:creationId xmlns:a16="http://schemas.microsoft.com/office/drawing/2014/main" id="{F0DFD90F-35CE-F96C-BA40-461F696E708E}"/>
+              </a:ext>
+            </a:extLst>
+          </p:cNvPr>
+          <p:cNvSpPr>
+            <a:spLocks noGrp="1"/>
+          </p:cNvSpPr>
+          <p:nvPr>
+            <p:ph type="ctrTitle"/>
+          </p:nvPr>
+        </p:nvSpPr>
+        <p:spPr>
+          <a:xfrm>
+            <a:off x="1524000" y="1248491"/>
+            <a:ext cx="9144000" cy="2387600"/>
+          </a:xfrm>
+        </p:spPr>
+        <p:txBody>
+          <a:bodyPr/>
+          <a:lstStyle/>
+          <a:p>
+            <a:endParaRPr lang="es-GT"/>
+          </a:p>
+        </p:txBody>
+      </p:sp>
+      <p:sp>
+        <p:nvSpPr>
+          <p:cNvPr id="3" name="Subtítulo 2">
+            <a:extLst>
+              <a:ext uri="{FF2B5EF4-FFF2-40B4-BE49-F238E27FC236}">
+                <a16:creationId xmlns:a16="http://schemas.microsoft.com/office/drawing/2014/main" id="{1474319F-3E41-9277-D7FC-DA38D4A2F2E6}"/>
+              </a:ext>
+            </a:extLst>
+          </p:cNvPr>
+          <p:cNvSpPr>
+            <a:spLocks noGrp="1"/>
+          </p:cNvSpPr>
+          <p:nvPr>
+            <p:ph type="subTitle" idx="1"/>
+          </p:nvPr>
+        </p:nvSpPr>
+        <p:spPr/>
+        <p:txBody>
+          <a:bodyPr/>
+          <a:lstStyle/>
+          <a:p>
+            <a:endParaRPr lang="es-GT"/>
+          </a:p>
+        </p:txBody>
+      </p:sp>
+      <p:pic>
+        <p:nvPicPr>
+          <p:cNvPr id="6" name="Imagen 5">
+            <a:extLst>
+              <a:ext uri="{FF2B5EF4-FFF2-40B4-BE49-F238E27FC236}">
+                <a16:creationId xmlns:a16="http://schemas.microsoft.com/office/drawing/2014/main" id="{A048BB93-3B73-569C-54B8-EF39CB136669}"/>
+              </a:ext>
+            </a:extLst>
+          </p:cNvPr>
+          <p:cNvPicPr>
+            <a:picLocks noChangeAspect="1"/>
+          </p:cNvPicPr>
+          <p:nvPr/>
+        </p:nvPicPr>
+        <p:blipFill>
+          <a:blip r:embed="rId2">
+            <a:extLst>
+              <a:ext uri="{28A0092B-C50C-407E-A947-70E740481C1C}">
+                <a14:useLocalDpi xmlns:a14="http://schemas.microsoft.com/office/drawing/2010/main" val="0"/>
+              </a:ext>
+            </a:extLst>
+          </a:blip>
+          <a:stretch>
+            <a:fillRect/>
+          </a:stretch>
+        </p:blipFill>
+        <p:spPr>
+          <a:xfrm>
+            <a:off x="0" y="0"/>
+            <a:ext cx="12192000" cy="6858000"/>
+          </a:xfrm>
+          <a:prstGeom prst="rect">
+            <a:avLst/>
+          </a:prstGeom>
+        </p:spPr>
+      </p:pic>
+      <p:sp>
+        <p:nvSpPr>
+          <p:cNvPr id="7" name="CuadroTexto 6">
+            <a:extLst>
+              <a:ext uri="{FF2B5EF4-FFF2-40B4-BE49-F238E27FC236}">
+                <a16:creationId xmlns:a16="http://schemas.microsoft.com/office/drawing/2014/main" id="{00EDF731-4829-8B01-3AF0-285EE124002B}"/>
+              </a:ext>
+            </a:extLst>
+          </p:cNvPr>
+          <p:cNvSpPr txBox="1"/>
+          <p:nvPr/>
+        </p:nvSpPr>
+        <p:spPr>
+          <a:xfrm>
+            <a:off x="165181" y="207239"/>
+            <a:ext cx="9899117" cy="523220"/>
+          </a:xfrm>
+          <a:prstGeom prst="rect">
+            <a:avLst/>
+          </a:prstGeom>
+          <a:noFill/>
+        </p:spPr>
+        <p:txBody>
+          <a:bodyPr wrap="square" rtlCol="0">
+            <a:spAutoFit/>
+          </a:bodyPr>
+          <a:lstStyle/>
+          <a:p>
+            <a:r>
+              <a:rPr lang="es-ES" sz="2800" b="1" dirty="0">
+                <a:latin typeface="Libre Franklin" pitchFamily="2" charset="0"/>
+              </a:rPr>
+              <a:t>Argumentos a favor de una inflación positiva</a:t>
+            </a:r>
+            <a:endParaRPr lang="es-GT" b="1" dirty="0">
+              <a:latin typeface="Libre Franklin" pitchFamily="2" charset="0"/>
+            </a:endParaRPr>
+          </a:p>
+        </p:txBody>
+      </p:sp>
+      <p:cxnSp>
+        <p:nvCxnSpPr>
+          <p:cNvPr id="8" name="Conector recto 7">
+            <a:extLst>
+              <a:ext uri="{FF2B5EF4-FFF2-40B4-BE49-F238E27FC236}">
+                <a16:creationId xmlns:a16="http://schemas.microsoft.com/office/drawing/2014/main" id="{8413D6E6-B275-1F80-C826-B606AB130C0C}"/>
+              </a:ext>
+            </a:extLst>
+          </p:cNvPr>
+          <p:cNvCxnSpPr>
+            <a:cxnSpLocks/>
+          </p:cNvCxnSpPr>
+          <p:nvPr/>
+        </p:nvCxnSpPr>
+        <p:spPr>
+          <a:xfrm>
+            <a:off x="265471" y="730459"/>
+            <a:ext cx="7655036" cy="0"/>
+          </a:xfrm>
+          <a:prstGeom prst="line">
+            <a:avLst/>
+          </a:prstGeom>
+          <a:ln w="38100">
+            <a:solidFill>
+              <a:srgbClr val="FF7F00"/>
+            </a:solidFill>
+          </a:ln>
+        </p:spPr>
+        <p:style>
+          <a:lnRef idx="1">
+            <a:schemeClr val="accent1"/>
+          </a:lnRef>
+          <a:fillRef idx="0">
+            <a:schemeClr val="accent1"/>
+          </a:fillRef>
+          <a:effectRef idx="0">
+            <a:schemeClr val="accent1"/>
+          </a:effectRef>
+          <a:fontRef idx="minor">
+            <a:schemeClr val="tx1"/>
+          </a:fontRef>
+        </p:style>
+      </p:cxnSp>
+      <p:sp>
+        <p:nvSpPr>
           <p:cNvPr id="15" name="CuadroTexto 14">
             <a:extLst>
               <a:ext uri="{FF2B5EF4-FFF2-40B4-BE49-F238E27FC236}">
@@ -5929,15 +8561,10 @@
   <p:clrMapOvr>
     <a:masterClrMapping/>
   </p:clrMapOvr>
-  <p:extLst>
-    <p:ext uri="{6950BFC3-D8DA-4A85-94F7-54DA5524770B}">
-      <p188:commentRel xmlns:p188="http://schemas.microsoft.com/office/powerpoint/2018/8/main" r:id="rId2"/>
-    </p:ext>
-  </p:extLst>
 </p:sld>
 </file>
 
-<file path=ppt/slides/slide13.xml><?xml version="1.0" encoding="utf-8"?>
+<file path=ppt/slides/slide21.xml><?xml version="1.0" encoding="utf-8"?>
 <p:sld xmlns:a="http://schemas.openxmlformats.org/drawingml/2006/main" xmlns:r="http://schemas.openxmlformats.org/officeDocument/2006/relationships" xmlns:p="http://schemas.openxmlformats.org/presentationml/2006/main">
   <p:cSld>
     <p:spTree>
@@ -6781,7 +9408,7 @@
 </p:sld>
 </file>
 
-<file path=ppt/slides/slide14.xml><?xml version="1.0" encoding="utf-8"?>
+<file path=ppt/slides/slide22.xml><?xml version="1.0" encoding="utf-8"?>
 <p:sld xmlns:a="http://schemas.openxmlformats.org/drawingml/2006/main" xmlns:r="http://schemas.openxmlformats.org/officeDocument/2006/relationships" xmlns:p="http://schemas.openxmlformats.org/presentationml/2006/main">
   <p:cSld>
     <p:spTree>
@@ -7121,7 +9748,7 @@
 </p:sld>
 </file>
 
-<file path=ppt/slides/slide15.xml><?xml version="1.0" encoding="utf-8"?>
+<file path=ppt/slides/slide23.xml><?xml version="1.0" encoding="utf-8"?>
 <p:sld xmlns:a="http://schemas.openxmlformats.org/drawingml/2006/main" xmlns:r="http://schemas.openxmlformats.org/officeDocument/2006/relationships" xmlns:p="http://schemas.openxmlformats.org/presentationml/2006/main">
   <p:cSld>
     <p:spTree>
@@ -7428,7 +10055,7 @@
 </p:sld>
 </file>
 
-<file path=ppt/slides/slide16.xml><?xml version="1.0" encoding="utf-8"?>
+<file path=ppt/slides/slide24.xml><?xml version="1.0" encoding="utf-8"?>
 <p:sld xmlns:a="http://schemas.openxmlformats.org/drawingml/2006/main" xmlns:r="http://schemas.openxmlformats.org/officeDocument/2006/relationships" xmlns:p="http://schemas.openxmlformats.org/presentationml/2006/main">
   <p:cSld>
     <p:spTree>
@@ -7957,7 +10584,7 @@
 </p:sld>
 </file>
 
-<file path=ppt/slides/slide17.xml><?xml version="1.0" encoding="utf-8"?>
+<file path=ppt/slides/slide25.xml><?xml version="1.0" encoding="utf-8"?>
 <p:sld xmlns:a="http://schemas.openxmlformats.org/drawingml/2006/main" xmlns:r="http://schemas.openxmlformats.org/officeDocument/2006/relationships" xmlns:p="http://schemas.openxmlformats.org/presentationml/2006/main">
   <p:cSld>
     <p:spTree>
@@ -8030,124 +10657,12 @@
           </a:p>
         </p:txBody>
       </p:sp>
-      <p:pic>
-        <p:nvPicPr>
-          <p:cNvPr id="6" name="Imagen 5">
-            <a:extLst>
-              <a:ext uri="{FF2B5EF4-FFF2-40B4-BE49-F238E27FC236}">
-                <a16:creationId xmlns:a16="http://schemas.microsoft.com/office/drawing/2014/main" id="{078930E4-9157-0E54-0011-96912EBF707A}"/>
-              </a:ext>
-            </a:extLst>
-          </p:cNvPr>
-          <p:cNvPicPr>
-            <a:picLocks noChangeAspect="1"/>
-          </p:cNvPicPr>
-          <p:nvPr/>
-        </p:nvPicPr>
-        <p:blipFill>
-          <a:blip r:embed="rId2">
-            <a:extLst>
-              <a:ext uri="{28A0092B-C50C-407E-A947-70E740481C1C}">
-                <a14:useLocalDpi xmlns:a14="http://schemas.microsoft.com/office/drawing/2010/main" val="0"/>
-              </a:ext>
-            </a:extLst>
-          </a:blip>
-          <a:stretch>
-            <a:fillRect/>
-          </a:stretch>
-        </p:blipFill>
-        <p:spPr>
-          <a:xfrm>
-            <a:off x="0" y="0"/>
-            <a:ext cx="12192000" cy="6858000"/>
-          </a:xfrm>
-          <a:prstGeom prst="rect">
-            <a:avLst/>
-          </a:prstGeom>
-        </p:spPr>
-      </p:pic>
-      <p:sp>
-        <p:nvSpPr>
-          <p:cNvPr id="13" name="CuadroTexto 12">
-            <a:extLst>
-              <a:ext uri="{FF2B5EF4-FFF2-40B4-BE49-F238E27FC236}">
-                <a16:creationId xmlns:a16="http://schemas.microsoft.com/office/drawing/2014/main" id="{AF180B2C-F8E3-81F7-F302-7782BF7C0257}"/>
-              </a:ext>
-            </a:extLst>
-          </p:cNvPr>
-          <p:cNvSpPr txBox="1"/>
-          <p:nvPr/>
-        </p:nvSpPr>
-        <p:spPr>
-          <a:xfrm>
-            <a:off x="1226713" y="2731041"/>
-            <a:ext cx="4129124" cy="1938992"/>
-          </a:xfrm>
-          <a:prstGeom prst="rect">
-            <a:avLst/>
-          </a:prstGeom>
-          <a:noFill/>
-        </p:spPr>
-        <p:txBody>
-          <a:bodyPr wrap="square" rtlCol="0">
-            <a:spAutoFit/>
-          </a:bodyPr>
-          <a:lstStyle/>
-          <a:p>
-            <a:pPr algn="just"/>
-            <a:r>
-              <a:rPr lang="es-MX" sz="2000" dirty="0">
-                <a:latin typeface="Libre Franklin" pitchFamily="2" charset="0"/>
-              </a:rPr>
-              <a:t>Como notamos en el gráfico las economías avanzadas tuvieron el mayor incremento de su deuda como proporción del PIB en el promedio de 5 años posterior a la crisis.</a:t>
-            </a:r>
-          </a:p>
-        </p:txBody>
-      </p:sp>
-      <p:sp>
-        <p:nvSpPr>
-          <p:cNvPr id="5" name="CuadroTexto 4">
-            <a:extLst>
-              <a:ext uri="{FF2B5EF4-FFF2-40B4-BE49-F238E27FC236}">
-                <a16:creationId xmlns:a16="http://schemas.microsoft.com/office/drawing/2014/main" id="{BC743C16-53D7-D3E4-3454-FF496ADD92C4}"/>
-              </a:ext>
-            </a:extLst>
-          </p:cNvPr>
-          <p:cNvSpPr txBox="1"/>
-          <p:nvPr/>
-        </p:nvSpPr>
-        <p:spPr>
-          <a:xfrm>
-            <a:off x="6754969" y="2696909"/>
-            <a:ext cx="4341700" cy="1323439"/>
-          </a:xfrm>
-          <a:prstGeom prst="rect">
-            <a:avLst/>
-          </a:prstGeom>
-          <a:noFill/>
-        </p:spPr>
-        <p:txBody>
-          <a:bodyPr wrap="square" rtlCol="0">
-            <a:spAutoFit/>
-          </a:bodyPr>
-          <a:lstStyle/>
-          <a:p>
-            <a:pPr algn="just"/>
-            <a:r>
-              <a:rPr lang="es-MX" sz="2000" dirty="0">
-                <a:latin typeface="Libre Franklin" pitchFamily="2" charset="0"/>
-              </a:rPr>
-              <a:t>Las economías emergentes en América Latina no experimentaron este fenómeno con tanta severidad.</a:t>
-            </a:r>
-          </a:p>
-        </p:txBody>
-      </p:sp>
       <p:grpSp>
         <p:nvGrpSpPr>
-          <p:cNvPr id="9" name="Grupo 8">
-            <a:extLst>
-              <a:ext uri="{FF2B5EF4-FFF2-40B4-BE49-F238E27FC236}">
-                <a16:creationId xmlns:a16="http://schemas.microsoft.com/office/drawing/2014/main" id="{0829546A-9CB1-CFC1-1375-CD33898A63BF}"/>
+          <p:cNvPr id="12" name="Grupo 11">
+            <a:extLst>
+              <a:ext uri="{FF2B5EF4-FFF2-40B4-BE49-F238E27FC236}">
+                <a16:creationId xmlns:a16="http://schemas.microsoft.com/office/drawing/2014/main" id="{455BBFDE-9155-48BB-9447-B2311D96806C}"/>
               </a:ext>
             </a:extLst>
           </p:cNvPr>
@@ -8156,18 +10671,18 @@
         </p:nvGrpSpPr>
         <p:grpSpPr>
           <a:xfrm>
-            <a:off x="0" y="553338"/>
-            <a:ext cx="12192000" cy="1893630"/>
-            <a:chOff x="0" y="553338"/>
-            <a:chExt cx="12192000" cy="1893630"/>
+            <a:off x="-5902" y="0"/>
+            <a:ext cx="12197902" cy="6858000"/>
+            <a:chOff x="-5902" y="0"/>
+            <a:chExt cx="12197902" cy="6858000"/>
           </a:xfrm>
         </p:grpSpPr>
         <p:pic>
           <p:nvPicPr>
-            <p:cNvPr id="4" name="slide2" descr="Hoja 1">
+            <p:cNvPr id="6" name="Imagen 5">
               <a:extLst>
                 <a:ext uri="{FF2B5EF4-FFF2-40B4-BE49-F238E27FC236}">
-                  <a16:creationId xmlns:a16="http://schemas.microsoft.com/office/drawing/2014/main" id="{2FFEB5AC-4088-497A-BD29-6538D27FDA85}"/>
+                  <a16:creationId xmlns:a16="http://schemas.microsoft.com/office/drawing/2014/main" id="{078930E4-9157-0E54-0011-96912EBF707A}"/>
                 </a:ext>
               </a:extLst>
             </p:cNvPr>
@@ -8177,22 +10692,21 @@
             <p:nvPr/>
           </p:nvPicPr>
           <p:blipFill>
-            <a:blip r:embed="rId3">
+            <a:blip r:embed="rId2">
               <a:extLst>
                 <a:ext uri="{28A0092B-C50C-407E-A947-70E740481C1C}">
                   <a14:useLocalDpi xmlns:a14="http://schemas.microsoft.com/office/drawing/2010/main" val="0"/>
                 </a:ext>
               </a:extLst>
             </a:blip>
-            <a:srcRect t="16736" b="11907"/>
             <a:stretch>
               <a:fillRect/>
             </a:stretch>
           </p:blipFill>
           <p:spPr>
             <a:xfrm>
-              <a:off x="0" y="1122363"/>
-              <a:ext cx="12192000" cy="1048385"/>
+              <a:off x="0" y="0"/>
+              <a:ext cx="12192000" cy="6858000"/>
             </a:xfrm>
             <a:prstGeom prst="rect">
               <a:avLst/>
@@ -8201,10 +10715,118 @@
         </p:pic>
         <p:sp>
           <p:nvSpPr>
-            <p:cNvPr id="7" name="CuadroTexto 6">
+            <p:cNvPr id="10" name="Rectángulo 9">
               <a:extLst>
                 <a:ext uri="{FF2B5EF4-FFF2-40B4-BE49-F238E27FC236}">
-                  <a16:creationId xmlns:a16="http://schemas.microsoft.com/office/drawing/2014/main" id="{C001A9FF-14DD-3A40-0F4B-0ECDBBFAF51C}"/>
+                  <a16:creationId xmlns:a16="http://schemas.microsoft.com/office/drawing/2014/main" id="{03748724-AF5B-41C4-B51C-0812E9B82675}"/>
+                </a:ext>
+              </a:extLst>
+            </p:cNvPr>
+            <p:cNvSpPr/>
+            <p:nvPr/>
+          </p:nvSpPr>
+          <p:spPr>
+            <a:xfrm>
+              <a:off x="-5902" y="5796850"/>
+              <a:ext cx="6642673" cy="193215"/>
+            </a:xfrm>
+            <a:prstGeom prst="rect">
+              <a:avLst/>
+            </a:prstGeom>
+            <a:solidFill>
+              <a:schemeClr val="bg1"/>
+            </a:solidFill>
+            <a:ln>
+              <a:noFill/>
+            </a:ln>
+          </p:spPr>
+          <p:style>
+            <a:lnRef idx="2">
+              <a:schemeClr val="accent1">
+                <a:shade val="50000"/>
+              </a:schemeClr>
+            </a:lnRef>
+            <a:fillRef idx="1">
+              <a:schemeClr val="accent1"/>
+            </a:fillRef>
+            <a:effectRef idx="0">
+              <a:schemeClr val="accent1"/>
+            </a:effectRef>
+            <a:fontRef idx="minor">
+              <a:schemeClr val="lt1"/>
+            </a:fontRef>
+          </p:style>
+          <p:txBody>
+            <a:bodyPr rtlCol="0" anchor="ctr"/>
+            <a:lstStyle/>
+            <a:p>
+              <a:pPr algn="ctr"/>
+              <a:endParaRPr lang="es-GT"/>
+            </a:p>
+          </p:txBody>
+        </p:sp>
+      </p:grpSp>
+      <p:grpSp>
+        <p:nvGrpSpPr>
+          <p:cNvPr id="19" name="Grupo 18">
+            <a:extLst>
+              <a:ext uri="{FF2B5EF4-FFF2-40B4-BE49-F238E27FC236}">
+                <a16:creationId xmlns:a16="http://schemas.microsoft.com/office/drawing/2014/main" id="{DDD48C51-85DE-425D-8728-C696EDAD174A}"/>
+              </a:ext>
+            </a:extLst>
+          </p:cNvPr>
+          <p:cNvGrpSpPr/>
+          <p:nvPr/>
+        </p:nvGrpSpPr>
+        <p:grpSpPr>
+          <a:xfrm>
+            <a:off x="273130" y="74000"/>
+            <a:ext cx="6317674" cy="5983900"/>
+            <a:chOff x="154378" y="74000"/>
+            <a:chExt cx="6317674" cy="5983900"/>
+          </a:xfrm>
+        </p:grpSpPr>
+        <p:pic>
+          <p:nvPicPr>
+            <p:cNvPr id="14" name="slide2" descr="Hoja 1">
+              <a:extLst>
+                <a:ext uri="{FF2B5EF4-FFF2-40B4-BE49-F238E27FC236}">
+                  <a16:creationId xmlns:a16="http://schemas.microsoft.com/office/drawing/2014/main" id="{D1238DB8-07B8-42B3-9744-000E971B25C4}"/>
+                </a:ext>
+              </a:extLst>
+            </p:cNvPr>
+            <p:cNvPicPr>
+              <a:picLocks noChangeAspect="1"/>
+            </p:cNvPicPr>
+            <p:nvPr/>
+          </p:nvPicPr>
+          <p:blipFill rotWithShape="1">
+            <a:blip r:embed="rId3">
+              <a:extLst>
+                <a:ext uri="{28A0092B-C50C-407E-A947-70E740481C1C}">
+                  <a14:useLocalDpi xmlns:a14="http://schemas.microsoft.com/office/drawing/2010/main" val="0"/>
+                </a:ext>
+              </a:extLst>
+            </a:blip>
+            <a:srcRect r="14381" b="1987"/>
+            <a:stretch/>
+          </p:blipFill>
+          <p:spPr>
+            <a:xfrm>
+              <a:off x="227250" y="590317"/>
+              <a:ext cx="6244802" cy="5206533"/>
+            </a:xfrm>
+            <a:prstGeom prst="rect">
+              <a:avLst/>
+            </a:prstGeom>
+          </p:spPr>
+        </p:pic>
+        <p:sp>
+          <p:nvSpPr>
+            <p:cNvPr id="15" name="CuadroTexto 14">
+              <a:extLst>
+                <a:ext uri="{FF2B5EF4-FFF2-40B4-BE49-F238E27FC236}">
+                  <a16:creationId xmlns:a16="http://schemas.microsoft.com/office/drawing/2014/main" id="{FCA2F1B9-CDA1-494D-82DC-DDB5A5E1271C}"/>
                 </a:ext>
               </a:extLst>
             </p:cNvPr>
@@ -8213,44 +10835,8 @@
           </p:nvSpPr>
           <p:spPr>
             <a:xfrm>
-              <a:off x="2904187" y="553338"/>
-              <a:ext cx="6497390" cy="461665"/>
-            </a:xfrm>
-            <a:prstGeom prst="rect">
-              <a:avLst/>
-            </a:prstGeom>
-            <a:noFill/>
-          </p:spPr>
-          <p:txBody>
-            <a:bodyPr wrap="square" rtlCol="0">
-              <a:spAutoFit/>
-            </a:bodyPr>
-            <a:lstStyle/>
-            <a:p>
-              <a:pPr algn="ctr"/>
-              <a:r>
-                <a:rPr lang="es-MX" sz="2400" b="1" dirty="0"/>
-                <a:t>Crecimiento de la deuda durante la crisis 2008</a:t>
-              </a:r>
-            </a:p>
-          </p:txBody>
-        </p:sp>
-        <p:sp>
-          <p:nvSpPr>
-            <p:cNvPr id="8" name="CuadroTexto 7">
-              <a:extLst>
-                <a:ext uri="{FF2B5EF4-FFF2-40B4-BE49-F238E27FC236}">
-                  <a16:creationId xmlns:a16="http://schemas.microsoft.com/office/drawing/2014/main" id="{29630303-11E5-04FB-DBB2-7813F55DB0C8}"/>
-                </a:ext>
-              </a:extLst>
-            </p:cNvPr>
-            <p:cNvSpPr txBox="1"/>
-            <p:nvPr/>
-          </p:nvSpPr>
-          <p:spPr>
-            <a:xfrm>
-              <a:off x="0" y="2185358"/>
-              <a:ext cx="2376152" cy="261610"/>
+              <a:off x="154378" y="74000"/>
+              <a:ext cx="4732317" cy="584775"/>
             </a:xfrm>
             <a:prstGeom prst="rect">
               <a:avLst/>
@@ -8264,15 +10850,129 @@
             <a:lstStyle/>
             <a:p>
               <a:r>
-                <a:rPr lang="es-MX" sz="1100" dirty="0">
+                <a:rPr lang="es-MX" dirty="0">
                   <a:latin typeface="Libre Franklin" pitchFamily="2" charset="0"/>
                 </a:rPr>
-                <a:t>Fuente: Banco Mundial</a:t>
+                <a:t>Crecimiento de la deuda respecto del PIB</a:t>
               </a:r>
+            </a:p>
+            <a:p>
+              <a:r>
+                <a:rPr lang="es-MX" sz="1400" dirty="0">
+                  <a:latin typeface="Libre Franklin" pitchFamily="2" charset="0"/>
+                </a:rPr>
+                <a:t>Puntos porcentuales</a:t>
+              </a:r>
+              <a:endParaRPr lang="es-GT" dirty="0">
+                <a:latin typeface="Libre Franklin" pitchFamily="2" charset="0"/>
+              </a:endParaRPr>
+            </a:p>
+          </p:txBody>
+        </p:sp>
+        <p:sp>
+          <p:nvSpPr>
+            <p:cNvPr id="16" name="CuadroTexto 15">
+              <a:extLst>
+                <a:ext uri="{FF2B5EF4-FFF2-40B4-BE49-F238E27FC236}">
+                  <a16:creationId xmlns:a16="http://schemas.microsoft.com/office/drawing/2014/main" id="{F2BA9C8E-07EF-4A7F-A34F-D1A55C8FCC65}"/>
+                </a:ext>
+              </a:extLst>
+            </p:cNvPr>
+            <p:cNvSpPr txBox="1"/>
+            <p:nvPr/>
+          </p:nvSpPr>
+          <p:spPr>
+            <a:xfrm>
+              <a:off x="154378" y="5796290"/>
+              <a:ext cx="4732317" cy="261610"/>
+            </a:xfrm>
+            <a:prstGeom prst="rect">
+              <a:avLst/>
+            </a:prstGeom>
+            <a:noFill/>
+          </p:spPr>
+          <p:txBody>
+            <a:bodyPr wrap="square" rtlCol="0">
+              <a:spAutoFit/>
+            </a:bodyPr>
+            <a:lstStyle/>
+            <a:p>
+              <a:r>
+                <a:rPr lang="es-MX" sz="1050" dirty="0">
+                  <a:latin typeface="Libre Franklin" pitchFamily="2" charset="0"/>
+                </a:rPr>
+                <a:t>Fuente: </a:t>
+              </a:r>
+              <a:r>
+                <a:rPr lang="es-MX" sz="1050" dirty="0" err="1">
+                  <a:latin typeface="Libre Franklin" pitchFamily="2" charset="0"/>
+                </a:rPr>
+                <a:t>World</a:t>
+              </a:r>
+              <a:r>
+                <a:rPr lang="es-MX" sz="1050" dirty="0">
+                  <a:latin typeface="Libre Franklin" pitchFamily="2" charset="0"/>
+                </a:rPr>
+                <a:t> </a:t>
+              </a:r>
+              <a:r>
+                <a:rPr lang="es-MX" sz="1050" dirty="0" err="1">
+                  <a:latin typeface="Libre Franklin" pitchFamily="2" charset="0"/>
+                </a:rPr>
+                <a:t>Economic</a:t>
+              </a:r>
+              <a:r>
+                <a:rPr lang="es-MX" sz="1050" dirty="0">
+                  <a:latin typeface="Libre Franklin" pitchFamily="2" charset="0"/>
+                </a:rPr>
+                <a:t> Outlook IMF, April 2025</a:t>
+              </a:r>
+              <a:endParaRPr lang="es-GT" sz="1200" dirty="0">
+                <a:latin typeface="Libre Franklin" pitchFamily="2" charset="0"/>
+              </a:endParaRPr>
             </a:p>
           </p:txBody>
         </p:sp>
       </p:grpSp>
+      <p:sp>
+        <p:nvSpPr>
+          <p:cNvPr id="21" name="CuadroTexto 20">
+            <a:extLst>
+              <a:ext uri="{FF2B5EF4-FFF2-40B4-BE49-F238E27FC236}">
+                <a16:creationId xmlns:a16="http://schemas.microsoft.com/office/drawing/2014/main" id="{E752D445-1649-4F7F-A755-1C39EF115A9D}"/>
+              </a:ext>
+            </a:extLst>
+          </p:cNvPr>
+          <p:cNvSpPr txBox="1"/>
+          <p:nvPr/>
+        </p:nvSpPr>
+        <p:spPr>
+          <a:xfrm>
+            <a:off x="7230537" y="2285642"/>
+            <a:ext cx="4031229" cy="1815882"/>
+          </a:xfrm>
+          <a:prstGeom prst="rect">
+            <a:avLst/>
+          </a:prstGeom>
+          <a:noFill/>
+        </p:spPr>
+        <p:txBody>
+          <a:bodyPr wrap="square">
+            <a:spAutoFit/>
+          </a:bodyPr>
+          <a:lstStyle/>
+          <a:p>
+            <a:pPr algn="just"/>
+            <a:r>
+              <a:rPr lang="es-MX" sz="1600" dirty="0">
+                <a:latin typeface="Libre Franklin" pitchFamily="2" charset="0"/>
+              </a:rPr>
+              <a:t>Durante la crisis financiera de 2008, tanto las economías avanzadas (G7) Como las emergentes en américa Latina incrementaron sus niveles de endeudamiento respecto del PIB, aunque fue más severo en las economías avanzadas.</a:t>
+            </a:r>
+            <a:endParaRPr lang="es-GT" sz="1600" dirty="0"/>
+          </a:p>
+        </p:txBody>
+      </p:sp>
     </p:spTree>
     <p:extLst>
       <p:ext uri="{BB962C8B-B14F-4D97-AF65-F5344CB8AC3E}">
@@ -8286,7 +10986,7 @@
 </p:sld>
 </file>
 
-<file path=ppt/slides/slide18.xml><?xml version="1.0" encoding="utf-8"?>
+<file path=ppt/slides/slide26.xml><?xml version="1.0" encoding="utf-8"?>
 <p:sld xmlns:a="http://schemas.openxmlformats.org/drawingml/2006/main" xmlns:r="http://schemas.openxmlformats.org/officeDocument/2006/relationships" xmlns:p="http://schemas.openxmlformats.org/presentationml/2006/main">
   <p:cSld>
     <p:spTree>
@@ -8553,7 +11253,7 @@
 </p:sld>
 </file>
 
-<file path=ppt/slides/slide19.xml><?xml version="1.0" encoding="utf-8"?>
+<file path=ppt/slides/slide27.xml><?xml version="1.0" encoding="utf-8"?>
 <p:sld xmlns:a="http://schemas.openxmlformats.org/drawingml/2006/main" xmlns:r="http://schemas.openxmlformats.org/officeDocument/2006/relationships" xmlns:p="http://schemas.openxmlformats.org/presentationml/2006/main">
   <p:cSld>
     <p:spTree>
@@ -8666,114 +11366,7 @@
 </p:sld>
 </file>
 
-<file path=ppt/slides/slide2.xml><?xml version="1.0" encoding="utf-8"?>
-<p:sld xmlns:a="http://schemas.openxmlformats.org/drawingml/2006/main" xmlns:r="http://schemas.openxmlformats.org/officeDocument/2006/relationships" xmlns:p="http://schemas.openxmlformats.org/presentationml/2006/main">
-  <p:cSld>
-    <p:spTree>
-      <p:nvGrpSpPr>
-        <p:cNvPr id="1" name="">
-          <a:extLst>
-            <a:ext uri="{FF2B5EF4-FFF2-40B4-BE49-F238E27FC236}">
-              <a16:creationId xmlns:a16="http://schemas.microsoft.com/office/drawing/2014/main" id="{EB6AA1A9-8DB9-8217-6799-61188BA14BE4}"/>
-            </a:ext>
-          </a:extLst>
-        </p:cNvPr>
-        <p:cNvGrpSpPr/>
-        <p:nvPr/>
-      </p:nvGrpSpPr>
-      <p:grpSpPr>
-        <a:xfrm>
-          <a:off x="0" y="0"/>
-          <a:ext cx="0" cy="0"/>
-          <a:chOff x="0" y="0"/>
-          <a:chExt cx="0" cy="0"/>
-        </a:xfrm>
-      </p:grpSpPr>
-      <p:pic>
-        <p:nvPicPr>
-          <p:cNvPr id="13" name="Imagen 12">
-            <a:extLst>
-              <a:ext uri="{FF2B5EF4-FFF2-40B4-BE49-F238E27FC236}">
-                <a16:creationId xmlns:a16="http://schemas.microsoft.com/office/drawing/2014/main" id="{AB09F7BA-0A85-1EAF-B696-43D631D42693}"/>
-              </a:ext>
-            </a:extLst>
-          </p:cNvPr>
-          <p:cNvPicPr>
-            <a:picLocks noChangeAspect="1"/>
-          </p:cNvPicPr>
-          <p:nvPr/>
-        </p:nvPicPr>
-        <p:blipFill>
-          <a:blip r:embed="rId3"/>
-          <a:stretch>
-            <a:fillRect/>
-          </a:stretch>
-        </p:blipFill>
-        <p:spPr>
-          <a:xfrm>
-            <a:off x="-1" y="0"/>
-            <a:ext cx="12208956" cy="6858000"/>
-          </a:xfrm>
-          <a:prstGeom prst="rect">
-            <a:avLst/>
-          </a:prstGeom>
-        </p:spPr>
-      </p:pic>
-      <p:sp>
-        <p:nvSpPr>
-          <p:cNvPr id="4" name="CuadroTexto 3">
-            <a:extLst>
-              <a:ext uri="{FF2B5EF4-FFF2-40B4-BE49-F238E27FC236}">
-                <a16:creationId xmlns:a16="http://schemas.microsoft.com/office/drawing/2014/main" id="{A6C8FC43-76E7-592A-8555-D7EDEA428B80}"/>
-              </a:ext>
-            </a:extLst>
-          </p:cNvPr>
-          <p:cNvSpPr txBox="1"/>
-          <p:nvPr/>
-        </p:nvSpPr>
-        <p:spPr>
-          <a:xfrm>
-            <a:off x="3575381" y="2357717"/>
-            <a:ext cx="4671072" cy="1569660"/>
-          </a:xfrm>
-          <a:prstGeom prst="rect">
-            <a:avLst/>
-          </a:prstGeom>
-          <a:noFill/>
-        </p:spPr>
-        <p:txBody>
-          <a:bodyPr wrap="square" rtlCol="0">
-            <a:spAutoFit/>
-          </a:bodyPr>
-          <a:lstStyle/>
-          <a:p>
-            <a:pPr algn="ctr"/>
-            <a:r>
-              <a:rPr lang="es-MX" sz="4800" b="1" dirty="0">
-                <a:solidFill>
-                  <a:schemeClr val="bg1"/>
-                </a:solidFill>
-                <a:latin typeface="Libre Franklin" pitchFamily="2" charset="0"/>
-              </a:rPr>
-              <a:t>Revisión literaria</a:t>
-            </a:r>
-          </a:p>
-        </p:txBody>
-      </p:sp>
-    </p:spTree>
-    <p:extLst>
-      <p:ext uri="{BB962C8B-B14F-4D97-AF65-F5344CB8AC3E}">
-        <p14:creationId xmlns:p14="http://schemas.microsoft.com/office/powerpoint/2010/main" val="1866258809"/>
-      </p:ext>
-    </p:extLst>
-  </p:cSld>
-  <p:clrMapOvr>
-    <a:masterClrMapping/>
-  </p:clrMapOvr>
-</p:sld>
-</file>
-
-<file path=ppt/slides/slide20.xml><?xml version="1.0" encoding="utf-8"?>
+<file path=ppt/slides/slide28.xml><?xml version="1.0" encoding="utf-8"?>
 <p:sld xmlns:a="http://schemas.openxmlformats.org/drawingml/2006/main" xmlns:r="http://schemas.openxmlformats.org/officeDocument/2006/relationships" xmlns:p="http://schemas.openxmlformats.org/presentationml/2006/main">
   <p:cSld>
     <p:spTree>
@@ -9389,7 +11982,7 @@
 </p:sld>
 </file>
 
-<file path=ppt/slides/slide21.xml><?xml version="1.0" encoding="utf-8"?>
+<file path=ppt/slides/slide29.xml><?xml version="1.0" encoding="utf-8"?>
 <p:sld xmlns:a="http://schemas.openxmlformats.org/drawingml/2006/main" xmlns:r="http://schemas.openxmlformats.org/officeDocument/2006/relationships" xmlns:p="http://schemas.openxmlformats.org/presentationml/2006/main">
   <p:cSld>
     <p:spTree>
@@ -9596,7 +12189,708 @@
 </p:sld>
 </file>
 
-<file path=ppt/slides/slide22.xml><?xml version="1.0" encoding="utf-8"?>
+<file path=ppt/slides/slide3.xml><?xml version="1.0" encoding="utf-8"?>
+<p:sld xmlns:a="http://schemas.openxmlformats.org/drawingml/2006/main" xmlns:r="http://schemas.openxmlformats.org/officeDocument/2006/relationships" xmlns:p="http://schemas.openxmlformats.org/presentationml/2006/main">
+  <p:cSld>
+    <p:spTree>
+      <p:nvGrpSpPr>
+        <p:cNvPr id="1" name=""/>
+        <p:cNvGrpSpPr/>
+        <p:nvPr/>
+      </p:nvGrpSpPr>
+      <p:grpSpPr>
+        <a:xfrm>
+          <a:off x="0" y="0"/>
+          <a:ext cx="0" cy="0"/>
+          <a:chOff x="0" y="0"/>
+          <a:chExt cx="0" cy="0"/>
+        </a:xfrm>
+      </p:grpSpPr>
+      <p:sp>
+        <p:nvSpPr>
+          <p:cNvPr id="2" name="Título 1">
+            <a:extLst>
+              <a:ext uri="{FF2B5EF4-FFF2-40B4-BE49-F238E27FC236}">
+                <a16:creationId xmlns:a16="http://schemas.microsoft.com/office/drawing/2014/main" id="{654E0456-9D0A-458C-8A2E-EC9E7705C955}"/>
+              </a:ext>
+            </a:extLst>
+          </p:cNvPr>
+          <p:cNvSpPr>
+            <a:spLocks noGrp="1"/>
+          </p:cNvSpPr>
+          <p:nvPr>
+            <p:ph type="ctrTitle"/>
+          </p:nvPr>
+        </p:nvSpPr>
+        <p:spPr/>
+        <p:txBody>
+          <a:bodyPr/>
+          <a:lstStyle/>
+          <a:p>
+            <a:endParaRPr lang="es-GT"/>
+          </a:p>
+        </p:txBody>
+      </p:sp>
+      <p:sp>
+        <p:nvSpPr>
+          <p:cNvPr id="3" name="Subtítulo 2">
+            <a:extLst>
+              <a:ext uri="{FF2B5EF4-FFF2-40B4-BE49-F238E27FC236}">
+                <a16:creationId xmlns:a16="http://schemas.microsoft.com/office/drawing/2014/main" id="{0D8893AB-0534-4B88-9B3D-6ABA4EB9FE3F}"/>
+              </a:ext>
+            </a:extLst>
+          </p:cNvPr>
+          <p:cNvSpPr>
+            <a:spLocks noGrp="1"/>
+          </p:cNvSpPr>
+          <p:nvPr>
+            <p:ph type="subTitle" idx="1"/>
+          </p:nvPr>
+        </p:nvSpPr>
+        <p:spPr/>
+        <p:txBody>
+          <a:bodyPr/>
+          <a:lstStyle/>
+          <a:p>
+            <a:endParaRPr lang="es-GT"/>
+          </a:p>
+        </p:txBody>
+      </p:sp>
+      <p:pic>
+        <p:nvPicPr>
+          <p:cNvPr id="6" name="Imagen 5">
+            <a:extLst>
+              <a:ext uri="{FF2B5EF4-FFF2-40B4-BE49-F238E27FC236}">
+                <a16:creationId xmlns:a16="http://schemas.microsoft.com/office/drawing/2014/main" id="{0C209CE5-AFD2-4CA7-8D90-C1E60E946553}"/>
+              </a:ext>
+            </a:extLst>
+          </p:cNvPr>
+          <p:cNvPicPr>
+            <a:picLocks noChangeAspect="1"/>
+          </p:cNvPicPr>
+          <p:nvPr/>
+        </p:nvPicPr>
+        <p:blipFill>
+          <a:blip r:embed="rId2">
+            <a:extLst>
+              <a:ext uri="{28A0092B-C50C-407E-A947-70E740481C1C}">
+                <a14:useLocalDpi xmlns:a14="http://schemas.microsoft.com/office/drawing/2010/main" val="0"/>
+              </a:ext>
+            </a:extLst>
+          </a:blip>
+          <a:stretch>
+            <a:fillRect/>
+          </a:stretch>
+        </p:blipFill>
+        <p:spPr>
+          <a:xfrm>
+            <a:off x="0" y="0"/>
+            <a:ext cx="12192000" cy="6858000"/>
+          </a:xfrm>
+          <a:prstGeom prst="rect">
+            <a:avLst/>
+          </a:prstGeom>
+        </p:spPr>
+      </p:pic>
+      <p:sp>
+        <p:nvSpPr>
+          <p:cNvPr id="7" name="CuadroTexto 6">
+            <a:extLst>
+              <a:ext uri="{FF2B5EF4-FFF2-40B4-BE49-F238E27FC236}">
+                <a16:creationId xmlns:a16="http://schemas.microsoft.com/office/drawing/2014/main" id="{0BBF9201-58C7-4E4D-ABE8-980848FA6D59}"/>
+              </a:ext>
+            </a:extLst>
+          </p:cNvPr>
+          <p:cNvSpPr txBox="1"/>
+          <p:nvPr/>
+        </p:nvSpPr>
+        <p:spPr>
+          <a:xfrm>
+            <a:off x="165181" y="207239"/>
+            <a:ext cx="9899117" cy="523220"/>
+          </a:xfrm>
+          <a:prstGeom prst="rect">
+            <a:avLst/>
+          </a:prstGeom>
+          <a:noFill/>
+        </p:spPr>
+        <p:txBody>
+          <a:bodyPr wrap="square" rtlCol="0">
+            <a:spAutoFit/>
+          </a:bodyPr>
+          <a:lstStyle/>
+          <a:p>
+            <a:r>
+              <a:rPr lang="es-ES" sz="2800" b="1" dirty="0">
+                <a:latin typeface="Libre Franklin" pitchFamily="2" charset="0"/>
+              </a:rPr>
+              <a:t>Bibliografía consultada</a:t>
+            </a:r>
+            <a:endParaRPr lang="es-GT" b="1" dirty="0">
+              <a:latin typeface="Libre Franklin" pitchFamily="2" charset="0"/>
+            </a:endParaRPr>
+          </a:p>
+        </p:txBody>
+      </p:sp>
+      <p:cxnSp>
+        <p:nvCxnSpPr>
+          <p:cNvPr id="8" name="Conector recto 7">
+            <a:extLst>
+              <a:ext uri="{FF2B5EF4-FFF2-40B4-BE49-F238E27FC236}">
+                <a16:creationId xmlns:a16="http://schemas.microsoft.com/office/drawing/2014/main" id="{41A554FA-D2F8-4E55-B343-5244ABC3AFF3}"/>
+              </a:ext>
+            </a:extLst>
+          </p:cNvPr>
+          <p:cNvCxnSpPr>
+            <a:cxnSpLocks/>
+          </p:cNvCxnSpPr>
+          <p:nvPr/>
+        </p:nvCxnSpPr>
+        <p:spPr>
+          <a:xfrm>
+            <a:off x="265471" y="730459"/>
+            <a:ext cx="6430297" cy="0"/>
+          </a:xfrm>
+          <a:prstGeom prst="line">
+            <a:avLst/>
+          </a:prstGeom>
+          <a:ln w="38100">
+            <a:solidFill>
+              <a:srgbClr val="FF7F00"/>
+            </a:solidFill>
+          </a:ln>
+        </p:spPr>
+        <p:style>
+          <a:lnRef idx="1">
+            <a:schemeClr val="accent1"/>
+          </a:lnRef>
+          <a:fillRef idx="0">
+            <a:schemeClr val="accent1"/>
+          </a:fillRef>
+          <a:effectRef idx="0">
+            <a:schemeClr val="accent1"/>
+          </a:effectRef>
+          <a:fontRef idx="minor">
+            <a:schemeClr val="tx1"/>
+          </a:fontRef>
+        </p:style>
+      </p:cxnSp>
+      <p:sp>
+        <p:nvSpPr>
+          <p:cNvPr id="11" name="CuadroTexto 10">
+            <a:extLst>
+              <a:ext uri="{FF2B5EF4-FFF2-40B4-BE49-F238E27FC236}">
+                <a16:creationId xmlns:a16="http://schemas.microsoft.com/office/drawing/2014/main" id="{87D7D931-49AF-4697-AA0B-140B7ADA1D91}"/>
+              </a:ext>
+            </a:extLst>
+          </p:cNvPr>
+          <p:cNvSpPr txBox="1"/>
+          <p:nvPr/>
+        </p:nvSpPr>
+        <p:spPr>
+          <a:xfrm>
+            <a:off x="165181" y="730459"/>
+            <a:ext cx="11546173" cy="4925323"/>
+          </a:xfrm>
+          <a:prstGeom prst="rect">
+            <a:avLst/>
+          </a:prstGeom>
+          <a:noFill/>
+        </p:spPr>
+        <p:txBody>
+          <a:bodyPr wrap="square" rtlCol="0">
+            <a:spAutoFit/>
+          </a:bodyPr>
+          <a:lstStyle/>
+          <a:p>
+            <a:pPr marL="800100" lvl="1" indent="-342900">
+              <a:lnSpc>
+                <a:spcPct val="200000"/>
+              </a:lnSpc>
+              <a:buFont typeface="Arial" panose="020B0604020202020204" pitchFamily="34" charset="0"/>
+              <a:buChar char="•"/>
+            </a:pPr>
+            <a:r>
+              <a:rPr lang="es-MX" sz="2000" dirty="0" err="1">
+                <a:latin typeface="Libre Franklin" pitchFamily="2" charset="0"/>
+              </a:rPr>
+              <a:t>Monetary</a:t>
+            </a:r>
+            <a:r>
+              <a:rPr lang="es-MX" sz="2000" dirty="0">
+                <a:latin typeface="Libre Franklin" pitchFamily="2" charset="0"/>
+              </a:rPr>
+              <a:t> </a:t>
+            </a:r>
+            <a:r>
+              <a:rPr lang="es-MX" sz="2000" dirty="0" err="1">
+                <a:latin typeface="Libre Franklin" pitchFamily="2" charset="0"/>
+              </a:rPr>
+              <a:t>Policy</a:t>
+            </a:r>
+            <a:r>
+              <a:rPr lang="es-MX" sz="2000" dirty="0">
+                <a:latin typeface="Libre Franklin" pitchFamily="2" charset="0"/>
+              </a:rPr>
+              <a:t> </a:t>
+            </a:r>
+            <a:r>
+              <a:rPr lang="es-MX" sz="2000" dirty="0" err="1">
+                <a:latin typeface="Libre Franklin" pitchFamily="2" charset="0"/>
+              </a:rPr>
+              <a:t>Strategy</a:t>
+            </a:r>
+            <a:r>
+              <a:rPr lang="es-MX" sz="2000" dirty="0">
+                <a:latin typeface="Libre Franklin" pitchFamily="2" charset="0"/>
+              </a:rPr>
+              <a:t>: </a:t>
+            </a:r>
+            <a:r>
+              <a:rPr lang="es-MX" sz="2000" dirty="0" err="1">
+                <a:latin typeface="Libre Franklin" pitchFamily="2" charset="0"/>
+              </a:rPr>
+              <a:t>Lessons</a:t>
+            </a:r>
+            <a:r>
+              <a:rPr lang="es-MX" sz="2000" dirty="0">
+                <a:latin typeface="Libre Franklin" pitchFamily="2" charset="0"/>
+              </a:rPr>
+              <a:t> </a:t>
+            </a:r>
+            <a:r>
+              <a:rPr lang="es-MX" sz="2000" dirty="0" err="1">
+                <a:latin typeface="Libre Franklin" pitchFamily="2" charset="0"/>
+              </a:rPr>
+              <a:t>From</a:t>
+            </a:r>
+            <a:r>
+              <a:rPr lang="es-MX" sz="2000" dirty="0">
+                <a:latin typeface="Libre Franklin" pitchFamily="2" charset="0"/>
+              </a:rPr>
+              <a:t> </a:t>
+            </a:r>
+            <a:r>
+              <a:rPr lang="es-MX" sz="2000" dirty="0" err="1">
+                <a:latin typeface="Libre Franklin" pitchFamily="2" charset="0"/>
+              </a:rPr>
+              <a:t>The</a:t>
+            </a:r>
+            <a:r>
+              <a:rPr lang="es-MX" sz="2000" dirty="0">
+                <a:latin typeface="Libre Franklin" pitchFamily="2" charset="0"/>
+              </a:rPr>
+              <a:t> Crisis </a:t>
+            </a:r>
+            <a:r>
+              <a:rPr lang="es-MX" sz="2000" dirty="0" err="1">
+                <a:latin typeface="Libre Franklin" pitchFamily="2" charset="0"/>
+              </a:rPr>
+              <a:t>Mishkin</a:t>
+            </a:r>
+            <a:r>
+              <a:rPr lang="es-MX" sz="2000" dirty="0">
+                <a:latin typeface="Libre Franklin" pitchFamily="2" charset="0"/>
+              </a:rPr>
+              <a:t> 2011</a:t>
+            </a:r>
+          </a:p>
+          <a:p>
+            <a:pPr marL="800100" lvl="1" indent="-342900">
+              <a:lnSpc>
+                <a:spcPct val="200000"/>
+              </a:lnSpc>
+              <a:buFont typeface="Arial" panose="020B0604020202020204" pitchFamily="34" charset="0"/>
+              <a:buChar char="•"/>
+            </a:pPr>
+            <a:r>
+              <a:rPr lang="es-MX" sz="2000" dirty="0">
+                <a:latin typeface="Libre Franklin" pitchFamily="2" charset="0"/>
+              </a:rPr>
+              <a:t>Evaluación de la Política Monetaria 2015</a:t>
+            </a:r>
+          </a:p>
+          <a:p>
+            <a:pPr marL="800100" lvl="1" indent="-342900">
+              <a:lnSpc>
+                <a:spcPct val="200000"/>
+              </a:lnSpc>
+              <a:buFont typeface="Arial" panose="020B0604020202020204" pitchFamily="34" charset="0"/>
+              <a:buChar char="•"/>
+            </a:pPr>
+            <a:r>
+              <a:rPr lang="es-MX" sz="2000" dirty="0">
+                <a:latin typeface="Libre Franklin" pitchFamily="2" charset="0"/>
+              </a:rPr>
+              <a:t>Evaluación del diseño e implementación de la política monetaria y cambiaria del Banco</a:t>
+            </a:r>
+          </a:p>
+          <a:p>
+            <a:pPr lvl="1">
+              <a:lnSpc>
+                <a:spcPct val="200000"/>
+              </a:lnSpc>
+            </a:pPr>
+            <a:r>
+              <a:rPr lang="es-MX" sz="2000" dirty="0">
+                <a:latin typeface="Libre Franklin" pitchFamily="2" charset="0"/>
+              </a:rPr>
+              <a:t>      de Guatemala 2012-2022 Sebastián Edwards.</a:t>
+            </a:r>
+          </a:p>
+          <a:p>
+            <a:pPr marL="800100" lvl="1" indent="-342900">
+              <a:lnSpc>
+                <a:spcPct val="200000"/>
+              </a:lnSpc>
+              <a:buFont typeface="Arial" panose="020B0604020202020204" pitchFamily="34" charset="0"/>
+              <a:buChar char="•"/>
+            </a:pPr>
+            <a:r>
+              <a:rPr lang="es-MX" sz="2000" dirty="0" err="1">
+                <a:latin typeface="Libre Franklin" pitchFamily="2" charset="0"/>
+              </a:rPr>
+              <a:t>Measurement</a:t>
+            </a:r>
+            <a:r>
+              <a:rPr lang="es-MX" sz="2000" dirty="0">
+                <a:latin typeface="Libre Franklin" pitchFamily="2" charset="0"/>
+              </a:rPr>
+              <a:t> </a:t>
+            </a:r>
+            <a:r>
+              <a:rPr lang="es-MX" sz="2000" dirty="0" err="1">
+                <a:latin typeface="Libre Franklin" pitchFamily="2" charset="0"/>
+              </a:rPr>
+              <a:t>Errors</a:t>
+            </a:r>
+            <a:r>
+              <a:rPr lang="es-MX" sz="2000" dirty="0">
+                <a:latin typeface="Libre Franklin" pitchFamily="2" charset="0"/>
+              </a:rPr>
+              <a:t> in </a:t>
+            </a:r>
+            <a:r>
+              <a:rPr lang="es-MX" sz="2000" dirty="0" err="1">
+                <a:latin typeface="Libre Franklin" pitchFamily="2" charset="0"/>
+              </a:rPr>
+              <a:t>the</a:t>
+            </a:r>
+            <a:r>
+              <a:rPr lang="es-MX" sz="2000" dirty="0">
+                <a:latin typeface="Libre Franklin" pitchFamily="2" charset="0"/>
+              </a:rPr>
+              <a:t> </a:t>
+            </a:r>
+            <a:r>
+              <a:rPr lang="es-MX" sz="2000" dirty="0" err="1">
+                <a:latin typeface="Libre Franklin" pitchFamily="2" charset="0"/>
+              </a:rPr>
+              <a:t>Consumer</a:t>
+            </a:r>
+            <a:r>
+              <a:rPr lang="es-MX" sz="2000" dirty="0">
+                <a:latin typeface="Libre Franklin" pitchFamily="2" charset="0"/>
+              </a:rPr>
+              <a:t> Price </a:t>
+            </a:r>
+            <a:r>
+              <a:rPr lang="es-MX" sz="2000" dirty="0" err="1">
+                <a:latin typeface="Libre Franklin" pitchFamily="2" charset="0"/>
+              </a:rPr>
+              <a:t>Index</a:t>
+            </a:r>
+            <a:r>
+              <a:rPr lang="es-MX" sz="2000" dirty="0">
+                <a:latin typeface="Libre Franklin" pitchFamily="2" charset="0"/>
+              </a:rPr>
+              <a:t>: </a:t>
+            </a:r>
+            <a:r>
+              <a:rPr lang="es-MX" sz="2000" dirty="0" err="1">
+                <a:latin typeface="Libre Franklin" pitchFamily="2" charset="0"/>
+              </a:rPr>
+              <a:t>Perspectives</a:t>
+            </a:r>
+            <a:r>
+              <a:rPr lang="es-MX" sz="2000" dirty="0">
+                <a:latin typeface="Libre Franklin" pitchFamily="2" charset="0"/>
+              </a:rPr>
+              <a:t> </a:t>
+            </a:r>
+            <a:r>
+              <a:rPr lang="es-MX" sz="2000" dirty="0" err="1">
+                <a:latin typeface="Libre Franklin" pitchFamily="2" charset="0"/>
+              </a:rPr>
+              <a:t>on</a:t>
+            </a:r>
+            <a:r>
+              <a:rPr lang="es-MX" sz="2000" dirty="0">
+                <a:latin typeface="Libre Franklin" pitchFamily="2" charset="0"/>
+              </a:rPr>
+              <a:t> </a:t>
+            </a:r>
+            <a:r>
+              <a:rPr lang="es-MX" sz="2000" dirty="0" err="1">
+                <a:latin typeface="Libre Franklin" pitchFamily="2" charset="0"/>
+              </a:rPr>
+              <a:t>Numerical</a:t>
+            </a:r>
+            <a:endParaRPr lang="es-MX" sz="2000" dirty="0">
+              <a:latin typeface="Libre Franklin" pitchFamily="2" charset="0"/>
+            </a:endParaRPr>
+          </a:p>
+          <a:p>
+            <a:pPr lvl="1">
+              <a:lnSpc>
+                <a:spcPct val="200000"/>
+              </a:lnSpc>
+            </a:pPr>
+            <a:r>
+              <a:rPr lang="es-MX" sz="2000" dirty="0">
+                <a:latin typeface="Libre Franklin" pitchFamily="2" charset="0"/>
+              </a:rPr>
+              <a:t>      Targets </a:t>
+            </a:r>
+            <a:r>
+              <a:rPr lang="es-MX" sz="2000" dirty="0" err="1">
+                <a:latin typeface="Libre Franklin" pitchFamily="2" charset="0"/>
+              </a:rPr>
+              <a:t>for</a:t>
+            </a:r>
+            <a:r>
+              <a:rPr lang="es-MX" sz="2000" dirty="0">
+                <a:latin typeface="Libre Franklin" pitchFamily="2" charset="0"/>
+              </a:rPr>
+              <a:t> Price </a:t>
+            </a:r>
+            <a:r>
+              <a:rPr lang="es-MX" sz="2000" dirty="0" err="1">
+                <a:latin typeface="Libre Franklin" pitchFamily="2" charset="0"/>
+              </a:rPr>
+              <a:t>Stability</a:t>
+            </a:r>
+            <a:r>
+              <a:rPr lang="es-MX" sz="2000" dirty="0">
+                <a:latin typeface="Libre Franklin" pitchFamily="2" charset="0"/>
+              </a:rPr>
+              <a:t> in </a:t>
+            </a:r>
+            <a:r>
+              <a:rPr lang="es-MX" sz="2000" dirty="0" err="1">
+                <a:latin typeface="Libre Franklin" pitchFamily="2" charset="0"/>
+              </a:rPr>
+              <a:t>Major</a:t>
+            </a:r>
+            <a:r>
+              <a:rPr lang="es-MX" sz="2000" dirty="0">
+                <a:latin typeface="Libre Franklin" pitchFamily="2" charset="0"/>
+              </a:rPr>
+              <a:t> </a:t>
+            </a:r>
+            <a:r>
+              <a:rPr lang="es-MX" sz="2000" dirty="0" err="1">
+                <a:latin typeface="Libre Franklin" pitchFamily="2" charset="0"/>
+              </a:rPr>
+              <a:t>Economies</a:t>
+            </a:r>
+            <a:r>
+              <a:rPr lang="es-MX" sz="2000" dirty="0">
+                <a:latin typeface="Libre Franklin" pitchFamily="2" charset="0"/>
+              </a:rPr>
+              <a:t> Bank </a:t>
+            </a:r>
+            <a:r>
+              <a:rPr lang="es-MX" sz="2000" dirty="0" err="1">
+                <a:latin typeface="Libre Franklin" pitchFamily="2" charset="0"/>
+              </a:rPr>
+              <a:t>of</a:t>
+            </a:r>
+            <a:r>
+              <a:rPr lang="es-MX" sz="2000" dirty="0">
+                <a:latin typeface="Libre Franklin" pitchFamily="2" charset="0"/>
+              </a:rPr>
+              <a:t> </a:t>
+            </a:r>
+            <a:r>
+              <a:rPr lang="es-MX" sz="2000" dirty="0" err="1">
+                <a:latin typeface="Libre Franklin" pitchFamily="2" charset="0"/>
+              </a:rPr>
+              <a:t>Japan</a:t>
+            </a:r>
+            <a:r>
+              <a:rPr lang="es-MX" sz="2000" dirty="0">
+                <a:latin typeface="Libre Franklin" pitchFamily="2" charset="0"/>
+              </a:rPr>
+              <a:t> 2024</a:t>
+            </a:r>
+          </a:p>
+          <a:p>
+            <a:pPr marL="800100" lvl="1" indent="-342900">
+              <a:lnSpc>
+                <a:spcPct val="200000"/>
+              </a:lnSpc>
+              <a:buFont typeface="Arial" panose="020B0604020202020204" pitchFamily="34" charset="0"/>
+              <a:buChar char="•"/>
+            </a:pPr>
+            <a:r>
+              <a:rPr lang="es-GT" sz="2000" dirty="0" err="1">
+                <a:latin typeface="Libre Franklin" pitchFamily="2" charset="0"/>
+              </a:rPr>
+              <a:t>Structural</a:t>
+            </a:r>
+            <a:r>
+              <a:rPr lang="es-GT" sz="2000" dirty="0">
+                <a:latin typeface="Libre Franklin" pitchFamily="2" charset="0"/>
+              </a:rPr>
+              <a:t> </a:t>
+            </a:r>
+            <a:r>
+              <a:rPr lang="es-GT" sz="2000" dirty="0" err="1">
+                <a:latin typeface="Libre Franklin" pitchFamily="2" charset="0"/>
+              </a:rPr>
+              <a:t>Estimates</a:t>
+            </a:r>
+            <a:r>
+              <a:rPr lang="es-GT" sz="2000" dirty="0">
+                <a:latin typeface="Libre Franklin" pitchFamily="2" charset="0"/>
+              </a:rPr>
+              <a:t> </a:t>
+            </a:r>
+            <a:r>
+              <a:rPr lang="es-GT" sz="2000" dirty="0" err="1">
+                <a:latin typeface="Libre Franklin" pitchFamily="2" charset="0"/>
+              </a:rPr>
+              <a:t>of</a:t>
+            </a:r>
+            <a:r>
+              <a:rPr lang="es-GT" sz="2000" dirty="0">
+                <a:latin typeface="Libre Franklin" pitchFamily="2" charset="0"/>
+              </a:rPr>
+              <a:t> </a:t>
+            </a:r>
+            <a:r>
+              <a:rPr lang="es-GT" sz="2000" dirty="0" err="1">
+                <a:latin typeface="Libre Franklin" pitchFamily="2" charset="0"/>
+              </a:rPr>
+              <a:t>the</a:t>
+            </a:r>
+            <a:r>
+              <a:rPr lang="es-GT" sz="2000" dirty="0">
+                <a:latin typeface="Libre Franklin" pitchFamily="2" charset="0"/>
+              </a:rPr>
+              <a:t> U.S. </a:t>
+            </a:r>
+            <a:r>
+              <a:rPr lang="es-GT" sz="2000" dirty="0" err="1">
+                <a:latin typeface="Libre Franklin" pitchFamily="2" charset="0"/>
+              </a:rPr>
+              <a:t>Sacrifice</a:t>
+            </a:r>
+            <a:r>
+              <a:rPr lang="es-GT" sz="2000" dirty="0">
+                <a:latin typeface="Libre Franklin" pitchFamily="2" charset="0"/>
+              </a:rPr>
+              <a:t> Ratio Federal Reserve Bank </a:t>
+            </a:r>
+            <a:r>
+              <a:rPr lang="es-GT" sz="2000" dirty="0" err="1">
+                <a:latin typeface="Libre Franklin" pitchFamily="2" charset="0"/>
+              </a:rPr>
+              <a:t>of</a:t>
+            </a:r>
+            <a:r>
+              <a:rPr lang="es-GT" sz="2000" dirty="0">
+                <a:latin typeface="Libre Franklin" pitchFamily="2" charset="0"/>
+              </a:rPr>
+              <a:t> New York 2001</a:t>
+            </a:r>
+          </a:p>
+          <a:p>
+            <a:pPr marL="800100" lvl="1" indent="-342900">
+              <a:lnSpc>
+                <a:spcPct val="200000"/>
+              </a:lnSpc>
+              <a:buFont typeface="Arial" panose="020B0604020202020204" pitchFamily="34" charset="0"/>
+              <a:buChar char="•"/>
+            </a:pPr>
+            <a:r>
+              <a:rPr lang="es-GT" sz="2000" dirty="0" err="1">
+                <a:latin typeface="Libre Franklin" pitchFamily="2" charset="0"/>
+              </a:rPr>
+              <a:t>The</a:t>
+            </a:r>
+            <a:r>
+              <a:rPr lang="es-GT" sz="2000" dirty="0">
+                <a:latin typeface="Libre Franklin" pitchFamily="2" charset="0"/>
+              </a:rPr>
+              <a:t> case </a:t>
+            </a:r>
+            <a:r>
+              <a:rPr lang="es-GT" sz="2000" dirty="0" err="1">
+                <a:latin typeface="Libre Franklin" pitchFamily="2" charset="0"/>
+              </a:rPr>
+              <a:t>for</a:t>
+            </a:r>
+            <a:r>
+              <a:rPr lang="es-GT" sz="2000" dirty="0">
+                <a:latin typeface="Libre Franklin" pitchFamily="2" charset="0"/>
+              </a:rPr>
+              <a:t> </a:t>
+            </a:r>
+            <a:r>
+              <a:rPr lang="es-GT" sz="2000" dirty="0" err="1">
+                <a:latin typeface="Libre Franklin" pitchFamily="2" charset="0"/>
+              </a:rPr>
+              <a:t>four</a:t>
+            </a:r>
+            <a:r>
+              <a:rPr lang="es-GT" sz="2000" dirty="0">
+                <a:latin typeface="Libre Franklin" pitchFamily="2" charset="0"/>
+              </a:rPr>
+              <a:t> </a:t>
+            </a:r>
+            <a:r>
+              <a:rPr lang="es-GT" sz="2000" dirty="0" err="1">
+                <a:latin typeface="Libre Franklin" pitchFamily="2" charset="0"/>
+              </a:rPr>
+              <a:t>percent</a:t>
+            </a:r>
+            <a:r>
+              <a:rPr lang="es-GT" sz="2000" dirty="0">
+                <a:latin typeface="Libre Franklin" pitchFamily="2" charset="0"/>
+              </a:rPr>
+              <a:t> </a:t>
+            </a:r>
+            <a:r>
+              <a:rPr lang="es-GT" sz="2000" dirty="0" err="1">
+                <a:latin typeface="Libre Franklin" pitchFamily="2" charset="0"/>
+              </a:rPr>
+              <a:t>inflation</a:t>
+            </a:r>
+            <a:r>
+              <a:rPr lang="es-GT" sz="2000" dirty="0">
+                <a:latin typeface="Libre Franklin" pitchFamily="2" charset="0"/>
+              </a:rPr>
+              <a:t> Laurence Ball 2013. </a:t>
+            </a:r>
+          </a:p>
+        </p:txBody>
+      </p:sp>
+    </p:spTree>
+    <p:extLst>
+      <p:ext uri="{BB962C8B-B14F-4D97-AF65-F5344CB8AC3E}">
+        <p14:creationId xmlns:p14="http://schemas.microsoft.com/office/powerpoint/2010/main" val="1763056488"/>
+      </p:ext>
+    </p:extLst>
+  </p:cSld>
+  <p:clrMapOvr>
+    <a:masterClrMapping/>
+  </p:clrMapOvr>
+</p:sld>
+</file>
+
+<file path=ppt/slides/slide30.xml><?xml version="1.0" encoding="utf-8"?>
 <p:sld xmlns:a="http://schemas.openxmlformats.org/drawingml/2006/main" xmlns:r="http://schemas.openxmlformats.org/officeDocument/2006/relationships" xmlns:p="http://schemas.openxmlformats.org/presentationml/2006/main">
   <p:cSld>
     <p:spTree>
@@ -10083,7 +13377,7 @@
 </p:sld>
 </file>
 
-<file path=ppt/slides/slide23.xml><?xml version="1.0" encoding="utf-8"?>
+<file path=ppt/slides/slide31.xml><?xml version="1.0" encoding="utf-8"?>
 <p:sld xmlns:a="http://schemas.openxmlformats.org/drawingml/2006/main" xmlns:r="http://schemas.openxmlformats.org/officeDocument/2006/relationships" xmlns:p="http://schemas.openxmlformats.org/presentationml/2006/main">
   <p:cSld>
     <p:spTree>
@@ -10500,7 +13794,7 @@
 </p:sld>
 </file>
 
-<file path=ppt/slides/slide24.xml><?xml version="1.0" encoding="utf-8"?>
+<file path=ppt/slides/slide32.xml><?xml version="1.0" encoding="utf-8"?>
 <p:sld xmlns:a="http://schemas.openxmlformats.org/drawingml/2006/main" xmlns:r="http://schemas.openxmlformats.org/officeDocument/2006/relationships" xmlns:p="http://schemas.openxmlformats.org/presentationml/2006/main">
   <p:cSld>
     <p:spTree>
@@ -10823,7 +14117,7 @@
 </p:sld>
 </file>
 
-<file path=ppt/slides/slide25.xml><?xml version="1.0" encoding="utf-8"?>
+<file path=ppt/slides/slide33.xml><?xml version="1.0" encoding="utf-8"?>
 <p:sld xmlns:a="http://schemas.openxmlformats.org/drawingml/2006/main" xmlns:r="http://schemas.openxmlformats.org/officeDocument/2006/relationships" xmlns:p="http://schemas.openxmlformats.org/presentationml/2006/main">
   <p:cSld>
     <p:spTree>
@@ -11242,7 +14536,7 @@
 </p:sld>
 </file>
 
-<file path=ppt/slides/slide26.xml><?xml version="1.0" encoding="utf-8"?>
+<file path=ppt/slides/slide34.xml><?xml version="1.0" encoding="utf-8"?>
 <p:sld xmlns:a="http://schemas.openxmlformats.org/drawingml/2006/main" xmlns:r="http://schemas.openxmlformats.org/officeDocument/2006/relationships" xmlns:p="http://schemas.openxmlformats.org/presentationml/2006/main">
   <p:cSld>
     <p:spTree>
@@ -11649,7 +14943,7 @@
 </p:sld>
 </file>
 
-<file path=ppt/slides/slide27.xml><?xml version="1.0" encoding="utf-8"?>
+<file path=ppt/slides/slide35.xml><?xml version="1.0" encoding="utf-8"?>
 <p:sld xmlns:a="http://schemas.openxmlformats.org/drawingml/2006/main" xmlns:r="http://schemas.openxmlformats.org/officeDocument/2006/relationships" xmlns:p="http://schemas.openxmlformats.org/presentationml/2006/main">
   <p:cSld>
     <p:spTree>
@@ -11771,7 +15065,7 @@
 </p:sld>
 </file>
 
-<file path=ppt/slides/slide3.xml><?xml version="1.0" encoding="utf-8"?>
+<file path=ppt/slides/slide4.xml><?xml version="1.0" encoding="utf-8"?>
 <p:sld xmlns:a="http://schemas.openxmlformats.org/drawingml/2006/main" xmlns:r="http://schemas.openxmlformats.org/officeDocument/2006/relationships" xmlns:p="http://schemas.openxmlformats.org/presentationml/2006/main">
   <p:cSld>
     <p:spTree>
@@ -11972,7 +15266,7 @@
         <p:spPr>
           <a:xfrm>
             <a:off x="165181" y="730459"/>
-            <a:ext cx="11546173" cy="4925323"/>
+            <a:ext cx="11546173" cy="4401205"/>
           </a:xfrm>
           <a:prstGeom prst="rect">
             <a:avLst/>
@@ -11993,583 +15287,141 @@
               <a:buChar char="•"/>
             </a:pPr>
             <a:r>
-              <a:rPr lang="es-MX" sz="2000" dirty="0" err="1">
-                <a:latin typeface="Libre Franklin" pitchFamily="2" charset="0"/>
-              </a:rPr>
-              <a:t>Monetary</a:t>
-            </a:r>
-            <a:r>
-              <a:rPr lang="es-MX" sz="2000" dirty="0">
-                <a:latin typeface="Libre Franklin" pitchFamily="2" charset="0"/>
-              </a:rPr>
-              <a:t> </a:t>
-            </a:r>
-            <a:r>
-              <a:rPr lang="es-MX" sz="2000" dirty="0" err="1">
-                <a:latin typeface="Libre Franklin" pitchFamily="2" charset="0"/>
-              </a:rPr>
-              <a:t>Policy</a:t>
-            </a:r>
-            <a:r>
-              <a:rPr lang="es-MX" sz="2000" dirty="0">
-                <a:latin typeface="Libre Franklin" pitchFamily="2" charset="0"/>
-              </a:rPr>
-              <a:t> </a:t>
-            </a:r>
-            <a:r>
-              <a:rPr lang="es-MX" sz="2000" dirty="0" err="1">
-                <a:latin typeface="Libre Franklin" pitchFamily="2" charset="0"/>
-              </a:rPr>
-              <a:t>Strategy</a:t>
-            </a:r>
-            <a:r>
-              <a:rPr lang="es-MX" sz="2000" dirty="0">
-                <a:latin typeface="Libre Franklin" pitchFamily="2" charset="0"/>
-              </a:rPr>
-              <a:t>: </a:t>
-            </a:r>
-            <a:r>
-              <a:rPr lang="es-MX" sz="2000" dirty="0" err="1">
-                <a:latin typeface="Libre Franklin" pitchFamily="2" charset="0"/>
-              </a:rPr>
-              <a:t>Lessons</a:t>
-            </a:r>
-            <a:r>
-              <a:rPr lang="es-MX" sz="2000" dirty="0">
-                <a:latin typeface="Libre Franklin" pitchFamily="2" charset="0"/>
-              </a:rPr>
-              <a:t> </a:t>
-            </a:r>
-            <a:r>
-              <a:rPr lang="es-MX" sz="2000" dirty="0" err="1">
-                <a:latin typeface="Libre Franklin" pitchFamily="2" charset="0"/>
-              </a:rPr>
-              <a:t>From</a:t>
-            </a:r>
-            <a:r>
-              <a:rPr lang="es-MX" sz="2000" dirty="0">
-                <a:latin typeface="Libre Franklin" pitchFamily="2" charset="0"/>
-              </a:rPr>
-              <a:t> </a:t>
-            </a:r>
-            <a:r>
-              <a:rPr lang="es-MX" sz="2000" dirty="0" err="1">
-                <a:latin typeface="Libre Franklin" pitchFamily="2" charset="0"/>
-              </a:rPr>
-              <a:t>The</a:t>
-            </a:r>
-            <a:r>
-              <a:rPr lang="es-MX" sz="2000" dirty="0">
-                <a:latin typeface="Libre Franklin" pitchFamily="2" charset="0"/>
-              </a:rPr>
-              <a:t> Crisis </a:t>
-            </a:r>
-            <a:r>
-              <a:rPr lang="es-MX" sz="2000" dirty="0" err="1">
-                <a:latin typeface="Libre Franklin" pitchFamily="2" charset="0"/>
-              </a:rPr>
-              <a:t>Mishkin</a:t>
-            </a:r>
-            <a:r>
-              <a:rPr lang="es-MX" sz="2000" dirty="0">
-                <a:latin typeface="Libre Franklin" pitchFamily="2" charset="0"/>
-              </a:rPr>
-              <a:t> 2011</a:t>
-            </a:r>
-          </a:p>
-          <a:p>
-            <a:pPr marL="800100" lvl="1" indent="-342900">
-              <a:lnSpc>
-                <a:spcPct val="200000"/>
-              </a:lnSpc>
+              <a:rPr lang="en-US" sz="2000" b="1" u="sng" dirty="0">
+                <a:latin typeface="Libre Franklin" pitchFamily="2" charset="0"/>
+              </a:rPr>
+              <a:t>The Costs of Inflation, Bank of England Quarterly Bulletin 35, 1995</a:t>
+            </a:r>
+          </a:p>
+          <a:p>
+            <a:pPr marL="896938" lvl="1" algn="just"/>
+            <a:r>
+              <a:rPr lang="en-US" sz="2000" i="1" dirty="0">
+                <a:latin typeface="Libre Franklin" pitchFamily="2" charset="0"/>
+              </a:rPr>
+              <a:t>“</a:t>
+            </a:r>
+            <a:r>
+              <a:rPr lang="es-GT" sz="2000" i="1" dirty="0">
+                <a:latin typeface="Libre Franklin" pitchFamily="2" charset="0"/>
+              </a:rPr>
+              <a:t>Artículo que aborda la literatura académica en torno a los consensos existentes respecto a los costos de una alta inflación sobre las decisiones de los agentes y la relación entre la inflación y el crecimiento en el largo plazo.</a:t>
+            </a:r>
+            <a:r>
+              <a:rPr lang="en-US" sz="2000" i="1" dirty="0">
+                <a:latin typeface="Libre Franklin" pitchFamily="2" charset="0"/>
+              </a:rPr>
+              <a:t>”</a:t>
+            </a:r>
+          </a:p>
+          <a:p>
+            <a:pPr marL="896938" lvl="1" algn="just"/>
+            <a:endParaRPr lang="en-US" sz="2000" i="1" dirty="0">
+              <a:latin typeface="Libre Franklin" pitchFamily="2" charset="0"/>
+            </a:endParaRPr>
+          </a:p>
+          <a:p>
+            <a:pPr marL="896938" lvl="1" indent="-360363" algn="just">
               <a:buFont typeface="Arial" panose="020B0604020202020204" pitchFamily="34" charset="0"/>
               <a:buChar char="•"/>
             </a:pPr>
             <a:r>
-              <a:rPr lang="es-MX" sz="2000" dirty="0">
-                <a:latin typeface="Libre Franklin" pitchFamily="2" charset="0"/>
-              </a:rPr>
-              <a:t>Evaluación de la Política Monetaria 2015</a:t>
-            </a:r>
-          </a:p>
-          <a:p>
-            <a:pPr marL="800100" lvl="1" indent="-342900">
-              <a:lnSpc>
-                <a:spcPct val="200000"/>
-              </a:lnSpc>
-              <a:buFont typeface="Arial" panose="020B0604020202020204" pitchFamily="34" charset="0"/>
-              <a:buChar char="•"/>
-            </a:pPr>
-            <a:r>
-              <a:rPr lang="es-MX" sz="2000" dirty="0">
-                <a:latin typeface="Libre Franklin" pitchFamily="2" charset="0"/>
-              </a:rPr>
-              <a:t>Evaluación del diseño e implementación de la política monetaria y cambiaria del Banco</a:t>
-            </a:r>
-          </a:p>
-          <a:p>
-            <a:pPr lvl="1">
-              <a:lnSpc>
-                <a:spcPct val="200000"/>
-              </a:lnSpc>
-            </a:pPr>
-            <a:r>
-              <a:rPr lang="es-MX" sz="2000" dirty="0">
-                <a:latin typeface="Libre Franklin" pitchFamily="2" charset="0"/>
-              </a:rPr>
-              <a:t>      de Guatemala 2012-2022 Sebastián Edwards.</a:t>
-            </a:r>
-          </a:p>
-          <a:p>
-            <a:pPr marL="800100" lvl="1" indent="-342900">
-              <a:lnSpc>
-                <a:spcPct val="200000"/>
-              </a:lnSpc>
-              <a:buFont typeface="Arial" panose="020B0604020202020204" pitchFamily="34" charset="0"/>
-              <a:buChar char="•"/>
-            </a:pPr>
-            <a:r>
-              <a:rPr lang="es-MX" sz="2000" dirty="0" err="1">
-                <a:latin typeface="Libre Franklin" pitchFamily="2" charset="0"/>
-              </a:rPr>
-              <a:t>Measurement</a:t>
-            </a:r>
-            <a:r>
-              <a:rPr lang="es-MX" sz="2000" dirty="0">
+              <a:rPr lang="es-GT" sz="2000" b="1" u="sng" dirty="0" err="1">
+                <a:latin typeface="Libre Franklin" pitchFamily="2" charset="0"/>
+              </a:rPr>
+              <a:t>Structural</a:t>
+            </a:r>
+            <a:r>
+              <a:rPr lang="es-GT" sz="2000" b="1" u="sng" dirty="0">
                 <a:latin typeface="Libre Franklin" pitchFamily="2" charset="0"/>
               </a:rPr>
               <a:t> </a:t>
             </a:r>
             <a:r>
-              <a:rPr lang="es-MX" sz="2000" dirty="0" err="1">
-                <a:latin typeface="Libre Franklin" pitchFamily="2" charset="0"/>
-              </a:rPr>
-              <a:t>Errors</a:t>
-            </a:r>
-            <a:r>
-              <a:rPr lang="es-MX" sz="2000" dirty="0">
-                <a:latin typeface="Libre Franklin" pitchFamily="2" charset="0"/>
-              </a:rPr>
-              <a:t> in </a:t>
-            </a:r>
-            <a:r>
-              <a:rPr lang="es-MX" sz="2000" dirty="0" err="1">
+              <a:rPr lang="es-GT" sz="2000" b="1" u="sng" dirty="0" err="1">
+                <a:latin typeface="Libre Franklin" pitchFamily="2" charset="0"/>
+              </a:rPr>
+              <a:t>Estimates</a:t>
+            </a:r>
+            <a:r>
+              <a:rPr lang="es-GT" sz="2000" b="1" u="sng" dirty="0">
+                <a:latin typeface="Libre Franklin" pitchFamily="2" charset="0"/>
+              </a:rPr>
+              <a:t> </a:t>
+            </a:r>
+            <a:r>
+              <a:rPr lang="es-GT" sz="2000" b="1" u="sng" dirty="0" err="1">
+                <a:latin typeface="Libre Franklin" pitchFamily="2" charset="0"/>
+              </a:rPr>
+              <a:t>of</a:t>
+            </a:r>
+            <a:r>
+              <a:rPr lang="es-GT" sz="2000" b="1" u="sng" dirty="0">
+                <a:latin typeface="Libre Franklin" pitchFamily="2" charset="0"/>
+              </a:rPr>
+              <a:t> </a:t>
+            </a:r>
+            <a:r>
+              <a:rPr lang="es-GT" sz="2000" b="1" u="sng" dirty="0" err="1">
                 <a:latin typeface="Libre Franklin" pitchFamily="2" charset="0"/>
               </a:rPr>
               <a:t>the</a:t>
             </a:r>
             <a:r>
-              <a:rPr lang="es-MX" sz="2000" dirty="0">
-                <a:latin typeface="Libre Franklin" pitchFamily="2" charset="0"/>
-              </a:rPr>
-              <a:t> </a:t>
-            </a:r>
-            <a:r>
-              <a:rPr lang="es-MX" sz="2000" dirty="0" err="1">
-                <a:latin typeface="Libre Franklin" pitchFamily="2" charset="0"/>
-              </a:rPr>
-              <a:t>Consumer</a:t>
-            </a:r>
-            <a:r>
-              <a:rPr lang="es-MX" sz="2000" dirty="0">
-                <a:latin typeface="Libre Franklin" pitchFamily="2" charset="0"/>
-              </a:rPr>
-              <a:t> Price </a:t>
-            </a:r>
-            <a:r>
-              <a:rPr lang="es-MX" sz="2000" dirty="0" err="1">
-                <a:latin typeface="Libre Franklin" pitchFamily="2" charset="0"/>
-              </a:rPr>
-              <a:t>Index</a:t>
-            </a:r>
-            <a:r>
-              <a:rPr lang="es-MX" sz="2000" dirty="0">
-                <a:latin typeface="Libre Franklin" pitchFamily="2" charset="0"/>
-              </a:rPr>
-              <a:t>: </a:t>
-            </a:r>
-            <a:r>
-              <a:rPr lang="es-MX" sz="2000" dirty="0" err="1">
-                <a:latin typeface="Libre Franklin" pitchFamily="2" charset="0"/>
-              </a:rPr>
-              <a:t>Perspectives</a:t>
-            </a:r>
-            <a:r>
-              <a:rPr lang="es-MX" sz="2000" dirty="0">
-                <a:latin typeface="Libre Franklin" pitchFamily="2" charset="0"/>
-              </a:rPr>
-              <a:t> </a:t>
-            </a:r>
-            <a:r>
-              <a:rPr lang="es-MX" sz="2000" dirty="0" err="1">
-                <a:latin typeface="Libre Franklin" pitchFamily="2" charset="0"/>
-              </a:rPr>
-              <a:t>on</a:t>
-            </a:r>
-            <a:r>
-              <a:rPr lang="es-MX" sz="2000" dirty="0">
-                <a:latin typeface="Libre Franklin" pitchFamily="2" charset="0"/>
-              </a:rPr>
-              <a:t> </a:t>
-            </a:r>
-            <a:r>
-              <a:rPr lang="es-MX" sz="2000" dirty="0" err="1">
-                <a:latin typeface="Libre Franklin" pitchFamily="2" charset="0"/>
-              </a:rPr>
-              <a:t>Numerical</a:t>
-            </a:r>
-            <a:endParaRPr lang="es-MX" sz="2000" dirty="0">
+              <a:rPr lang="es-GT" sz="2000" b="1" u="sng" dirty="0">
+                <a:latin typeface="Libre Franklin" pitchFamily="2" charset="0"/>
+              </a:rPr>
+              <a:t> U.S. </a:t>
+            </a:r>
+            <a:r>
+              <a:rPr lang="es-GT" sz="2000" b="1" u="sng" dirty="0" err="1">
+                <a:latin typeface="Libre Franklin" pitchFamily="2" charset="0"/>
+              </a:rPr>
+              <a:t>Sacrifice</a:t>
+            </a:r>
+            <a:r>
+              <a:rPr lang="es-GT" sz="2000" b="1" u="sng" dirty="0">
+                <a:latin typeface="Libre Franklin" pitchFamily="2" charset="0"/>
+              </a:rPr>
+              <a:t> Ratio Federal Reserve Bank </a:t>
+            </a:r>
+            <a:r>
+              <a:rPr lang="es-GT" sz="2000" b="1" u="sng" dirty="0" err="1">
+                <a:latin typeface="Libre Franklin" pitchFamily="2" charset="0"/>
+              </a:rPr>
+              <a:t>of</a:t>
+            </a:r>
+            <a:r>
+              <a:rPr lang="es-GT" sz="2000" b="1" u="sng" dirty="0">
+                <a:latin typeface="Libre Franklin" pitchFamily="2" charset="0"/>
+              </a:rPr>
+              <a:t> New York 2001</a:t>
+            </a:r>
+          </a:p>
+          <a:p>
+            <a:pPr marL="536575" lvl="1" algn="just"/>
+            <a:endParaRPr lang="es-GT" sz="2000" b="1" u="sng" dirty="0">
               <a:latin typeface="Libre Franklin" pitchFamily="2" charset="0"/>
             </a:endParaRPr>
           </a:p>
           <a:p>
-            <a:pPr lvl="1">
-              <a:lnSpc>
-                <a:spcPct val="200000"/>
-              </a:lnSpc>
-            </a:pPr>
-            <a:r>
-              <a:rPr lang="es-MX" sz="2000" dirty="0">
-                <a:latin typeface="Libre Franklin" pitchFamily="2" charset="0"/>
-              </a:rPr>
-              <a:t>      Targets </a:t>
-            </a:r>
-            <a:r>
-              <a:rPr lang="es-MX" sz="2000" dirty="0" err="1">
-                <a:latin typeface="Libre Franklin" pitchFamily="2" charset="0"/>
-              </a:rPr>
-              <a:t>for</a:t>
-            </a:r>
-            <a:r>
-              <a:rPr lang="es-MX" sz="2000" dirty="0">
-                <a:latin typeface="Libre Franklin" pitchFamily="2" charset="0"/>
-              </a:rPr>
-              <a:t> Price </a:t>
-            </a:r>
-            <a:r>
-              <a:rPr lang="es-MX" sz="2000" dirty="0" err="1">
-                <a:latin typeface="Libre Franklin" pitchFamily="2" charset="0"/>
-              </a:rPr>
-              <a:t>Stability</a:t>
-            </a:r>
-            <a:r>
-              <a:rPr lang="es-MX" sz="2000" dirty="0">
-                <a:latin typeface="Libre Franklin" pitchFamily="2" charset="0"/>
-              </a:rPr>
-              <a:t> in </a:t>
-            </a:r>
-            <a:r>
-              <a:rPr lang="es-MX" sz="2000" dirty="0" err="1">
-                <a:latin typeface="Libre Franklin" pitchFamily="2" charset="0"/>
-              </a:rPr>
-              <a:t>Major</a:t>
-            </a:r>
-            <a:r>
-              <a:rPr lang="es-MX" sz="2000" dirty="0">
-                <a:latin typeface="Libre Franklin" pitchFamily="2" charset="0"/>
-              </a:rPr>
-              <a:t> </a:t>
-            </a:r>
-            <a:r>
-              <a:rPr lang="es-MX" sz="2000" dirty="0" err="1">
-                <a:latin typeface="Libre Franklin" pitchFamily="2" charset="0"/>
-              </a:rPr>
-              <a:t>Economies</a:t>
-            </a:r>
-            <a:r>
-              <a:rPr lang="es-MX" sz="2000" dirty="0">
-                <a:latin typeface="Libre Franklin" pitchFamily="2" charset="0"/>
-              </a:rPr>
-              <a:t> Bank </a:t>
-            </a:r>
-            <a:r>
-              <a:rPr lang="es-MX" sz="2000" dirty="0" err="1">
-                <a:latin typeface="Libre Franklin" pitchFamily="2" charset="0"/>
-              </a:rPr>
-              <a:t>of</a:t>
-            </a:r>
-            <a:r>
-              <a:rPr lang="es-MX" sz="2000" dirty="0">
-                <a:latin typeface="Libre Franklin" pitchFamily="2" charset="0"/>
-              </a:rPr>
-              <a:t> </a:t>
-            </a:r>
-            <a:r>
-              <a:rPr lang="es-MX" sz="2000" dirty="0" err="1">
-                <a:latin typeface="Libre Franklin" pitchFamily="2" charset="0"/>
-              </a:rPr>
-              <a:t>Japan</a:t>
-            </a:r>
-            <a:r>
-              <a:rPr lang="es-MX" sz="2000" dirty="0">
-                <a:latin typeface="Libre Franklin" pitchFamily="2" charset="0"/>
-              </a:rPr>
-              <a:t> 2024</a:t>
-            </a:r>
-          </a:p>
-          <a:p>
-            <a:pPr marL="800100" lvl="1" indent="-342900">
-              <a:lnSpc>
-                <a:spcPct val="200000"/>
-              </a:lnSpc>
-              <a:buFont typeface="Arial" panose="020B0604020202020204" pitchFamily="34" charset="0"/>
-              <a:buChar char="•"/>
-            </a:pPr>
-            <a:r>
-              <a:rPr lang="es-GT" sz="2000" dirty="0" err="1">
-                <a:latin typeface="Libre Franklin" pitchFamily="2" charset="0"/>
-              </a:rPr>
-              <a:t>Structural</a:t>
-            </a:r>
-            <a:r>
-              <a:rPr lang="es-GT" sz="2000" dirty="0">
-                <a:latin typeface="Libre Franklin" pitchFamily="2" charset="0"/>
-              </a:rPr>
-              <a:t> </a:t>
-            </a:r>
-            <a:r>
-              <a:rPr lang="es-GT" sz="2000" dirty="0" err="1">
-                <a:latin typeface="Libre Franklin" pitchFamily="2" charset="0"/>
-              </a:rPr>
-              <a:t>Estimates</a:t>
-            </a:r>
-            <a:r>
-              <a:rPr lang="es-GT" sz="2000" dirty="0">
-                <a:latin typeface="Libre Franklin" pitchFamily="2" charset="0"/>
-              </a:rPr>
-              <a:t> </a:t>
-            </a:r>
-            <a:r>
-              <a:rPr lang="es-GT" sz="2000" dirty="0" err="1">
-                <a:latin typeface="Libre Franklin" pitchFamily="2" charset="0"/>
-              </a:rPr>
-              <a:t>of</a:t>
-            </a:r>
-            <a:r>
-              <a:rPr lang="es-GT" sz="2000" dirty="0">
-                <a:latin typeface="Libre Franklin" pitchFamily="2" charset="0"/>
-              </a:rPr>
-              <a:t> </a:t>
-            </a:r>
-            <a:r>
-              <a:rPr lang="es-GT" sz="2000" dirty="0" err="1">
-                <a:latin typeface="Libre Franklin" pitchFamily="2" charset="0"/>
-              </a:rPr>
-              <a:t>the</a:t>
-            </a:r>
-            <a:r>
-              <a:rPr lang="es-GT" sz="2000" dirty="0">
-                <a:latin typeface="Libre Franklin" pitchFamily="2" charset="0"/>
-              </a:rPr>
-              <a:t> U.S. </a:t>
-            </a:r>
-            <a:r>
-              <a:rPr lang="es-GT" sz="2000" dirty="0" err="1">
-                <a:latin typeface="Libre Franklin" pitchFamily="2" charset="0"/>
-              </a:rPr>
-              <a:t>Sacrifice</a:t>
-            </a:r>
-            <a:r>
-              <a:rPr lang="es-GT" sz="2000" dirty="0">
-                <a:latin typeface="Libre Franklin" pitchFamily="2" charset="0"/>
-              </a:rPr>
-              <a:t> Ratio Federal Reserve Bank </a:t>
-            </a:r>
-            <a:r>
-              <a:rPr lang="es-GT" sz="2000" dirty="0" err="1">
-                <a:latin typeface="Libre Franklin" pitchFamily="2" charset="0"/>
-              </a:rPr>
-              <a:t>of</a:t>
-            </a:r>
-            <a:r>
-              <a:rPr lang="es-GT" sz="2000" dirty="0">
-                <a:latin typeface="Libre Franklin" pitchFamily="2" charset="0"/>
-              </a:rPr>
-              <a:t> New York 2001</a:t>
-            </a:r>
-          </a:p>
-          <a:p>
-            <a:pPr marL="800100" lvl="1" indent="-342900">
-              <a:lnSpc>
-                <a:spcPct val="200000"/>
-              </a:lnSpc>
-              <a:buFont typeface="Arial" panose="020B0604020202020204" pitchFamily="34" charset="0"/>
-              <a:buChar char="•"/>
-            </a:pPr>
-            <a:r>
-              <a:rPr lang="es-GT" sz="2000" dirty="0" err="1">
-                <a:latin typeface="Libre Franklin" pitchFamily="2" charset="0"/>
-              </a:rPr>
-              <a:t>The</a:t>
-            </a:r>
-            <a:r>
-              <a:rPr lang="es-GT" sz="2000" dirty="0">
-                <a:latin typeface="Libre Franklin" pitchFamily="2" charset="0"/>
-              </a:rPr>
-              <a:t> case </a:t>
-            </a:r>
-            <a:r>
-              <a:rPr lang="es-GT" sz="2000" dirty="0" err="1">
-                <a:latin typeface="Libre Franklin" pitchFamily="2" charset="0"/>
-              </a:rPr>
-              <a:t>for</a:t>
-            </a:r>
-            <a:r>
-              <a:rPr lang="es-GT" sz="2000" dirty="0">
-                <a:latin typeface="Libre Franklin" pitchFamily="2" charset="0"/>
-              </a:rPr>
-              <a:t> </a:t>
-            </a:r>
-            <a:r>
-              <a:rPr lang="es-GT" sz="2000" dirty="0" err="1">
-                <a:latin typeface="Libre Franklin" pitchFamily="2" charset="0"/>
-              </a:rPr>
-              <a:t>four</a:t>
-            </a:r>
-            <a:r>
-              <a:rPr lang="es-GT" sz="2000" dirty="0">
-                <a:latin typeface="Libre Franklin" pitchFamily="2" charset="0"/>
-              </a:rPr>
-              <a:t> </a:t>
-            </a:r>
-            <a:r>
-              <a:rPr lang="es-GT" sz="2000" dirty="0" err="1">
-                <a:latin typeface="Libre Franklin" pitchFamily="2" charset="0"/>
-              </a:rPr>
-              <a:t>percent</a:t>
-            </a:r>
-            <a:r>
-              <a:rPr lang="es-GT" sz="2000" dirty="0">
-                <a:latin typeface="Libre Franklin" pitchFamily="2" charset="0"/>
-              </a:rPr>
-              <a:t> </a:t>
-            </a:r>
-            <a:r>
-              <a:rPr lang="es-GT" sz="2000" dirty="0" err="1">
-                <a:latin typeface="Libre Franklin" pitchFamily="2" charset="0"/>
-              </a:rPr>
-              <a:t>inflation</a:t>
-            </a:r>
-            <a:r>
-              <a:rPr lang="es-GT" sz="2000" dirty="0">
-                <a:latin typeface="Libre Franklin" pitchFamily="2" charset="0"/>
-              </a:rPr>
-              <a:t> Laurence Ball 2013. </a:t>
-            </a:r>
+            <a:pPr marL="896938" lvl="1" algn="just"/>
+            <a:r>
+              <a:rPr lang="es-GT" sz="2000" i="1" dirty="0">
+                <a:latin typeface="Libre Franklin" pitchFamily="2" charset="0"/>
+              </a:rPr>
+              <a:t>“Estudio realizado para Estados Unidos en el cual se utiliza un SVAR identificado por restricciones de largo plazo. El objetivo es capturar la respuesta del producto ante cambios en la inflación y utilizarlas para estimar el coeficiente de sacrificio definido como el costo en términos del producto de reducir en 1% la tasa de inflación durante un periodo de tiempo dado.”</a:t>
+            </a:r>
+            <a:endParaRPr lang="en-US" sz="2000" i="1" dirty="0">
+              <a:latin typeface="Libre Franklin" pitchFamily="2" charset="0"/>
+            </a:endParaRPr>
           </a:p>
         </p:txBody>
       </p:sp>
     </p:spTree>
     <p:extLst>
       <p:ext uri="{BB962C8B-B14F-4D97-AF65-F5344CB8AC3E}">
-        <p14:creationId xmlns:p14="http://schemas.microsoft.com/office/powerpoint/2010/main" val="1763056488"/>
-      </p:ext>
-    </p:extLst>
-  </p:cSld>
-  <p:clrMapOvr>
-    <a:masterClrMapping/>
-  </p:clrMapOvr>
-</p:sld>
-</file>
-
-<file path=ppt/slides/slide4.xml><?xml version="1.0" encoding="utf-8"?>
-<p:sld xmlns:a="http://schemas.openxmlformats.org/drawingml/2006/main" xmlns:r="http://schemas.openxmlformats.org/officeDocument/2006/relationships" xmlns:p="http://schemas.openxmlformats.org/presentationml/2006/main">
-  <p:cSld>
-    <p:spTree>
-      <p:nvGrpSpPr>
-        <p:cNvPr id="1" name="">
-          <a:extLst>
-            <a:ext uri="{FF2B5EF4-FFF2-40B4-BE49-F238E27FC236}">
-              <a16:creationId xmlns:a16="http://schemas.microsoft.com/office/drawing/2014/main" id="{EB6AA1A9-8DB9-8217-6799-61188BA14BE4}"/>
-            </a:ext>
-          </a:extLst>
-        </p:cNvPr>
-        <p:cNvGrpSpPr/>
-        <p:nvPr/>
-      </p:nvGrpSpPr>
-      <p:grpSpPr>
-        <a:xfrm>
-          <a:off x="0" y="0"/>
-          <a:ext cx="0" cy="0"/>
-          <a:chOff x="0" y="0"/>
-          <a:chExt cx="0" cy="0"/>
-        </a:xfrm>
-      </p:grpSpPr>
-      <p:pic>
-        <p:nvPicPr>
-          <p:cNvPr id="13" name="Imagen 12">
-            <a:extLst>
-              <a:ext uri="{FF2B5EF4-FFF2-40B4-BE49-F238E27FC236}">
-                <a16:creationId xmlns:a16="http://schemas.microsoft.com/office/drawing/2014/main" id="{AB09F7BA-0A85-1EAF-B696-43D631D42693}"/>
-              </a:ext>
-            </a:extLst>
-          </p:cNvPr>
-          <p:cNvPicPr>
-            <a:picLocks noChangeAspect="1"/>
-          </p:cNvPicPr>
-          <p:nvPr/>
-        </p:nvPicPr>
-        <p:blipFill>
-          <a:blip r:embed="rId3"/>
-          <a:stretch>
-            <a:fillRect/>
-          </a:stretch>
-        </p:blipFill>
-        <p:spPr>
-          <a:xfrm>
-            <a:off x="-1" y="0"/>
-            <a:ext cx="12208956" cy="6858000"/>
-          </a:xfrm>
-          <a:prstGeom prst="rect">
-            <a:avLst/>
-          </a:prstGeom>
-        </p:spPr>
-      </p:pic>
-      <p:sp>
-        <p:nvSpPr>
-          <p:cNvPr id="4" name="CuadroTexto 3">
-            <a:extLst>
-              <a:ext uri="{FF2B5EF4-FFF2-40B4-BE49-F238E27FC236}">
-                <a16:creationId xmlns:a16="http://schemas.microsoft.com/office/drawing/2014/main" id="{A6C8FC43-76E7-592A-8555-D7EDEA428B80}"/>
-              </a:ext>
-            </a:extLst>
-          </p:cNvPr>
-          <p:cNvSpPr txBox="1"/>
-          <p:nvPr/>
-        </p:nvSpPr>
-        <p:spPr>
-          <a:xfrm>
-            <a:off x="3575381" y="2357717"/>
-            <a:ext cx="4671072" cy="1569660"/>
-          </a:xfrm>
-          <a:prstGeom prst="rect">
-            <a:avLst/>
-          </a:prstGeom>
-          <a:noFill/>
-        </p:spPr>
-        <p:txBody>
-          <a:bodyPr wrap="square" rtlCol="0">
-            <a:spAutoFit/>
-          </a:bodyPr>
-          <a:lstStyle/>
-          <a:p>
-            <a:pPr algn="ctr"/>
-            <a:r>
-              <a:rPr lang="es-MX" sz="4800" b="1" dirty="0">
-                <a:solidFill>
-                  <a:schemeClr val="bg1"/>
-                </a:solidFill>
-                <a:latin typeface="Libre Franklin" pitchFamily="2" charset="0"/>
-              </a:rPr>
-              <a:t>Costos de la inflación</a:t>
-            </a:r>
-          </a:p>
-        </p:txBody>
-      </p:sp>
-    </p:spTree>
-    <p:extLst>
-      <p:ext uri="{BB962C8B-B14F-4D97-AF65-F5344CB8AC3E}">
-        <p14:creationId xmlns:p14="http://schemas.microsoft.com/office/powerpoint/2010/main" val="2224759434"/>
+        <p14:creationId xmlns:p14="http://schemas.microsoft.com/office/powerpoint/2010/main" val="1540573186"/>
       </p:ext>
     </p:extLst>
   </p:cSld>
@@ -12674,7 +15526,7 @@
         </p:blipFill>
         <p:spPr>
           <a:xfrm>
-            <a:off x="0" y="0"/>
+            <a:off x="0" y="-17698"/>
             <a:ext cx="12192000" cy="6858000"/>
           </a:xfrm>
           <a:prstGeom prst="rect">
@@ -12714,7 +15566,7 @@
               <a:rPr lang="es-ES" sz="2800" b="1" dirty="0">
                 <a:latin typeface="Libre Franklin" pitchFamily="2" charset="0"/>
               </a:rPr>
-              <a:t>Aspectos conceptuales de la inflación</a:t>
+              <a:t>Bibliografía consultada</a:t>
             </a:r>
             <a:endParaRPr lang="es-GT" b="1" dirty="0">
               <a:latin typeface="Libre Franklin" pitchFamily="2" charset="0"/>
@@ -12767,62 +15619,10 @@
       </p:cxnSp>
       <p:sp>
         <p:nvSpPr>
-          <p:cNvPr id="9" name="Elipse 8">
-            <a:extLst>
-              <a:ext uri="{FF2B5EF4-FFF2-40B4-BE49-F238E27FC236}">
-                <a16:creationId xmlns:a16="http://schemas.microsoft.com/office/drawing/2014/main" id="{627394BC-6D40-41E5-97F0-3D4AF919DAD6}"/>
-              </a:ext>
-            </a:extLst>
-          </p:cNvPr>
-          <p:cNvSpPr/>
-          <p:nvPr/>
-        </p:nvSpPr>
-        <p:spPr>
-          <a:xfrm>
-            <a:off x="582224" y="1068363"/>
-            <a:ext cx="108000" cy="108000"/>
-          </a:xfrm>
-          <a:prstGeom prst="ellipse">
-            <a:avLst/>
-          </a:prstGeom>
-          <a:solidFill>
-            <a:schemeClr val="accent2"/>
-          </a:solidFill>
-          <a:ln>
-            <a:noFill/>
-          </a:ln>
-        </p:spPr>
-        <p:style>
-          <a:lnRef idx="2">
-            <a:schemeClr val="accent1">
-              <a:shade val="50000"/>
-            </a:schemeClr>
-          </a:lnRef>
-          <a:fillRef idx="1">
-            <a:schemeClr val="accent1"/>
-          </a:fillRef>
-          <a:effectRef idx="0">
-            <a:schemeClr val="accent1"/>
-          </a:effectRef>
-          <a:fontRef idx="minor">
-            <a:schemeClr val="lt1"/>
-          </a:fontRef>
-        </p:style>
-        <p:txBody>
-          <a:bodyPr rtlCol="0" anchor="ctr"/>
-          <a:lstStyle/>
-          <a:p>
-            <a:pPr algn="ctr"/>
-            <a:endParaRPr lang="es-GT"/>
-          </a:p>
-        </p:txBody>
-      </p:sp>
-      <p:sp>
-        <p:nvSpPr>
-          <p:cNvPr id="10" name="CuadroTexto 9">
-            <a:extLst>
-              <a:ext uri="{FF2B5EF4-FFF2-40B4-BE49-F238E27FC236}">
-                <a16:creationId xmlns:a16="http://schemas.microsoft.com/office/drawing/2014/main" id="{6091F251-68D4-4990-A661-823B8FC87A9C}"/>
+          <p:cNvPr id="11" name="CuadroTexto 10">
+            <a:extLst>
+              <a:ext uri="{FF2B5EF4-FFF2-40B4-BE49-F238E27FC236}">
+                <a16:creationId xmlns:a16="http://schemas.microsoft.com/office/drawing/2014/main" id="{87D7D931-49AF-4697-AA0B-140B7ADA1D91}"/>
               </a:ext>
             </a:extLst>
           </p:cNvPr>
@@ -12831,8 +15631,8 @@
         </p:nvSpPr>
         <p:spPr>
           <a:xfrm>
-            <a:off x="690224" y="922307"/>
-            <a:ext cx="9899117" cy="400110"/>
+            <a:off x="165181" y="730459"/>
+            <a:ext cx="11546173" cy="2862322"/>
           </a:xfrm>
           <a:prstGeom prst="rect">
             <a:avLst/>
@@ -12845,149 +15645,104 @@
           </a:bodyPr>
           <a:lstStyle/>
           <a:p>
-            <a:r>
-              <a:rPr lang="es-ES" sz="2000" b="1" dirty="0">
-                <a:latin typeface="Libre Franklin" pitchFamily="2" charset="0"/>
-              </a:rPr>
-              <a:t>Costos</a:t>
-            </a:r>
-            <a:endParaRPr lang="es-GT" b="1" dirty="0">
+            <a:pPr marL="896938" lvl="1" indent="-360363" algn="just">
+              <a:buFont typeface="Arial" panose="020B0604020202020204" pitchFamily="34" charset="0"/>
+              <a:buChar char="•"/>
+            </a:pPr>
+            <a:r>
+              <a:rPr lang="es-GT" sz="2000" b="1" u="sng" dirty="0" err="1">
+                <a:latin typeface="Libre Franklin" pitchFamily="2" charset="0"/>
+              </a:rPr>
+              <a:t>The</a:t>
+            </a:r>
+            <a:r>
+              <a:rPr lang="es-GT" sz="2000" b="1" u="sng" dirty="0">
+                <a:latin typeface="Libre Franklin" pitchFamily="2" charset="0"/>
+              </a:rPr>
+              <a:t> Case </a:t>
+            </a:r>
+            <a:r>
+              <a:rPr lang="es-GT" sz="2000" b="1" u="sng" dirty="0" err="1">
+                <a:latin typeface="Libre Franklin" pitchFamily="2" charset="0"/>
+              </a:rPr>
+              <a:t>for</a:t>
+            </a:r>
+            <a:r>
+              <a:rPr lang="es-GT" sz="2000" b="1" u="sng" dirty="0">
+                <a:latin typeface="Libre Franklin" pitchFamily="2" charset="0"/>
+              </a:rPr>
+              <a:t> </a:t>
+            </a:r>
+            <a:r>
+              <a:rPr lang="es-GT" sz="2000" b="1" u="sng" dirty="0" err="1">
+                <a:latin typeface="Libre Franklin" pitchFamily="2" charset="0"/>
+              </a:rPr>
+              <a:t>four</a:t>
+            </a:r>
+            <a:r>
+              <a:rPr lang="es-GT" sz="2000" b="1" u="sng" dirty="0">
+                <a:latin typeface="Libre Franklin" pitchFamily="2" charset="0"/>
+              </a:rPr>
+              <a:t> </a:t>
+            </a:r>
+            <a:r>
+              <a:rPr lang="es-GT" sz="2000" b="1" u="sng" dirty="0" err="1">
+                <a:latin typeface="Libre Franklin" pitchFamily="2" charset="0"/>
+              </a:rPr>
+              <a:t>percent</a:t>
+            </a:r>
+            <a:r>
+              <a:rPr lang="es-GT" sz="2000" b="1" u="sng" dirty="0">
+                <a:latin typeface="Libre Franklin" pitchFamily="2" charset="0"/>
+              </a:rPr>
+              <a:t> </a:t>
+            </a:r>
+            <a:r>
+              <a:rPr lang="es-GT" sz="2000" b="1" u="sng" dirty="0" err="1">
+                <a:latin typeface="Libre Franklin" pitchFamily="2" charset="0"/>
+              </a:rPr>
+              <a:t>inflation</a:t>
+            </a:r>
+            <a:r>
+              <a:rPr lang="es-GT" sz="2000" b="1" u="sng" dirty="0">
+                <a:latin typeface="Libre Franklin" pitchFamily="2" charset="0"/>
+              </a:rPr>
+              <a:t>, 2013, Laurence Ball</a:t>
+            </a:r>
+          </a:p>
+          <a:p>
+            <a:pPr marL="536575" lvl="1" algn="just"/>
+            <a:endParaRPr lang="es-GT" sz="2000" b="1" u="sng" dirty="0">
               <a:latin typeface="Libre Franklin" pitchFamily="2" charset="0"/>
             </a:endParaRPr>
           </a:p>
-        </p:txBody>
-      </p:sp>
-      <p:sp>
-        <p:nvSpPr>
-          <p:cNvPr id="11" name="CuadroTexto 10">
-            <a:extLst>
-              <a:ext uri="{FF2B5EF4-FFF2-40B4-BE49-F238E27FC236}">
-                <a16:creationId xmlns:a16="http://schemas.microsoft.com/office/drawing/2014/main" id="{87D7D931-49AF-4697-AA0B-140B7ADA1D91}"/>
-              </a:ext>
-            </a:extLst>
-          </p:cNvPr>
-          <p:cNvSpPr txBox="1"/>
-          <p:nvPr/>
-        </p:nvSpPr>
-        <p:spPr>
-          <a:xfrm>
-            <a:off x="1085481" y="1421745"/>
-            <a:ext cx="10453657" cy="3732689"/>
-          </a:xfrm>
-          <a:prstGeom prst="rect">
-            <a:avLst/>
-          </a:prstGeom>
-          <a:noFill/>
-        </p:spPr>
-        <p:txBody>
-          <a:bodyPr wrap="square" rtlCol="0">
-            <a:spAutoFit/>
-          </a:bodyPr>
-          <a:lstStyle/>
-          <a:p>
-            <a:pPr>
-              <a:lnSpc>
-                <a:spcPct val="150000"/>
-              </a:lnSpc>
-            </a:pPr>
-            <a:r>
-              <a:rPr lang="es-ES" sz="2000" dirty="0">
-                <a:latin typeface="Libre Franklin" pitchFamily="2" charset="0"/>
-              </a:rPr>
-              <a:t>1- Erosión del poder adquisitivo de los hogares</a:t>
-            </a:r>
-          </a:p>
-          <a:p>
-            <a:pPr>
-              <a:lnSpc>
-                <a:spcPct val="150000"/>
-              </a:lnSpc>
-            </a:pPr>
-            <a:r>
-              <a:rPr lang="es-ES" sz="2000" dirty="0">
-                <a:latin typeface="Libre Franklin" pitchFamily="2" charset="0"/>
-              </a:rPr>
-              <a:t>2- Aumento de costos de producción para las empresas</a:t>
-            </a:r>
-          </a:p>
-          <a:p>
-            <a:pPr>
-              <a:lnSpc>
-                <a:spcPct val="150000"/>
-              </a:lnSpc>
-            </a:pPr>
-            <a:r>
-              <a:rPr lang="es-ES" sz="2000" dirty="0">
-                <a:latin typeface="Libre Franklin" pitchFamily="2" charset="0"/>
-              </a:rPr>
-              <a:t>3- Pérdida de competitividad (apreciación del tipo de cambio real)</a:t>
-            </a:r>
-          </a:p>
-          <a:p>
-            <a:pPr>
-              <a:lnSpc>
-                <a:spcPct val="150000"/>
-              </a:lnSpc>
-            </a:pPr>
-            <a:r>
-              <a:rPr lang="es-ES" sz="2000" dirty="0">
-                <a:latin typeface="Libre Franklin" pitchFamily="2" charset="0"/>
-              </a:rPr>
-              <a:t>4- Reduce la credibilidad de la Autoridad Monetaria</a:t>
-            </a:r>
-          </a:p>
-          <a:p>
-            <a:pPr>
-              <a:lnSpc>
-                <a:spcPct val="150000"/>
-              </a:lnSpc>
-            </a:pPr>
-            <a:r>
-              <a:rPr lang="es-ES" sz="2000" dirty="0">
-                <a:latin typeface="Libre Franklin" pitchFamily="2" charset="0"/>
-              </a:rPr>
-              <a:t>5- Aumento de la incertidumbre en el entorno económico</a:t>
-            </a:r>
-          </a:p>
-          <a:p>
-            <a:pPr>
-              <a:lnSpc>
-                <a:spcPct val="150000"/>
-              </a:lnSpc>
-            </a:pPr>
-            <a:r>
-              <a:rPr lang="es-ES" sz="2000" dirty="0">
-                <a:latin typeface="Libre Franklin" pitchFamily="2" charset="0"/>
-              </a:rPr>
-              <a:t>6- Efecto redistributivo del ingreso y la riqueza en perjuicio de los hogares con menos</a:t>
-            </a:r>
-          </a:p>
-          <a:p>
-            <a:pPr>
-              <a:lnSpc>
-                <a:spcPct val="150000"/>
-              </a:lnSpc>
-            </a:pPr>
-            <a:r>
-              <a:rPr lang="es-ES" sz="2000" dirty="0">
-                <a:latin typeface="Libre Franklin" pitchFamily="2" charset="0"/>
-              </a:rPr>
-              <a:t>      recursos</a:t>
-            </a:r>
-          </a:p>
-          <a:p>
-            <a:pPr>
-              <a:lnSpc>
-                <a:spcPct val="150000"/>
-              </a:lnSpc>
-            </a:pPr>
-            <a:r>
-              <a:rPr lang="es-ES" sz="2000" dirty="0">
-                <a:latin typeface="Libre Franklin" pitchFamily="2" charset="0"/>
-              </a:rPr>
-              <a:t>7- Genera distorsiones en los precios relativos</a:t>
-            </a:r>
-            <a:endParaRPr lang="es-GT" sz="2000" dirty="0">
+          <a:p>
+            <a:pPr marL="896938" lvl="1" algn="just"/>
+            <a:r>
+              <a:rPr lang="es-GT" sz="2000" i="1" dirty="0">
+                <a:latin typeface="Libre Franklin" pitchFamily="2" charset="0"/>
+              </a:rPr>
+              <a:t>“</a:t>
+            </a:r>
+            <a:r>
+              <a:rPr lang="es-MX" sz="2000" i="1" dirty="0">
+                <a:latin typeface="Libre Franklin" pitchFamily="2" charset="0"/>
+              </a:rPr>
+              <a:t>Ensayo que argumenta que una meta de inflación del 2% para las economías avanzadas es muy baja. Pese a que la investigación económica no es suficientemente clara respecto al nivel de meta ideal, el autor expresa que una meta del 4% es una estimación razonable. Dentro de los argumentos se encuentran evitar el límite inferior cero para dar mayor flexibilidad a los Banco Centrales en momentos de crisis, así como mitigar la caída del producto.</a:t>
+            </a:r>
+            <a:r>
+              <a:rPr lang="es-GT" sz="2000" i="1" dirty="0">
+                <a:latin typeface="Libre Franklin" pitchFamily="2" charset="0"/>
+              </a:rPr>
+              <a:t>”</a:t>
+            </a:r>
+            <a:endParaRPr lang="es-ES" sz="2000" b="1" u="sng" dirty="0">
+              <a:latin typeface="Libre Franklin" pitchFamily="2" charset="0"/>
+            </a:endParaRPr>
+          </a:p>
+          <a:p>
+            <a:pPr marL="896938" lvl="1" algn="just"/>
+            <a:endParaRPr lang="es-MX" sz="2000" dirty="0">
               <a:latin typeface="Libre Franklin" pitchFamily="2" charset="0"/>
             </a:endParaRPr>
           </a:p>
@@ -12996,7 +15751,7 @@
     </p:spTree>
     <p:extLst>
       <p:ext uri="{BB962C8B-B14F-4D97-AF65-F5344CB8AC3E}">
-        <p14:creationId xmlns:p14="http://schemas.microsoft.com/office/powerpoint/2010/main" val="4219919932"/>
+        <p14:creationId xmlns:p14="http://schemas.microsoft.com/office/powerpoint/2010/main" val="2176140588"/>
       </p:ext>
     </p:extLst>
   </p:cSld>
@@ -13011,13 +15766,7 @@
   <p:cSld>
     <p:spTree>
       <p:nvGrpSpPr>
-        <p:cNvPr id="1" name="">
-          <a:extLst>
-            <a:ext uri="{FF2B5EF4-FFF2-40B4-BE49-F238E27FC236}">
-              <a16:creationId xmlns:a16="http://schemas.microsoft.com/office/drawing/2014/main" id="{EB6AA1A9-8DB9-8217-6799-61188BA14BE4}"/>
-            </a:ext>
-          </a:extLst>
-        </p:cNvPr>
+        <p:cNvPr id="1" name=""/>
         <p:cNvGrpSpPr/>
         <p:nvPr/>
       </p:nvGrpSpPr>
@@ -13029,119 +15778,12 @@
           <a:chExt cx="0" cy="0"/>
         </a:xfrm>
       </p:grpSpPr>
-      <p:pic>
-        <p:nvPicPr>
-          <p:cNvPr id="13" name="Imagen 12">
-            <a:extLst>
-              <a:ext uri="{FF2B5EF4-FFF2-40B4-BE49-F238E27FC236}">
-                <a16:creationId xmlns:a16="http://schemas.microsoft.com/office/drawing/2014/main" id="{AB09F7BA-0A85-1EAF-B696-43D631D42693}"/>
-              </a:ext>
-            </a:extLst>
-          </p:cNvPr>
-          <p:cNvPicPr>
-            <a:picLocks noChangeAspect="1"/>
-          </p:cNvPicPr>
-          <p:nvPr/>
-        </p:nvPicPr>
-        <p:blipFill>
-          <a:blip r:embed="rId3"/>
-          <a:stretch>
-            <a:fillRect/>
-          </a:stretch>
-        </p:blipFill>
-        <p:spPr>
-          <a:xfrm>
-            <a:off x="-1" y="0"/>
-            <a:ext cx="12208956" cy="6858000"/>
-          </a:xfrm>
-          <a:prstGeom prst="rect">
-            <a:avLst/>
-          </a:prstGeom>
-        </p:spPr>
-      </p:pic>
-      <p:sp>
-        <p:nvSpPr>
-          <p:cNvPr id="4" name="CuadroTexto 3">
-            <a:extLst>
-              <a:ext uri="{FF2B5EF4-FFF2-40B4-BE49-F238E27FC236}">
-                <a16:creationId xmlns:a16="http://schemas.microsoft.com/office/drawing/2014/main" id="{A6C8FC43-76E7-592A-8555-D7EDEA428B80}"/>
-              </a:ext>
-            </a:extLst>
-          </p:cNvPr>
-          <p:cNvSpPr txBox="1"/>
-          <p:nvPr/>
-        </p:nvSpPr>
-        <p:spPr>
-          <a:xfrm>
-            <a:off x="3575381" y="2357717"/>
-            <a:ext cx="4671072" cy="2308324"/>
-          </a:xfrm>
-          <a:prstGeom prst="rect">
-            <a:avLst/>
-          </a:prstGeom>
-          <a:noFill/>
-        </p:spPr>
-        <p:txBody>
-          <a:bodyPr wrap="square" rtlCol="0">
-            <a:spAutoFit/>
-          </a:bodyPr>
-          <a:lstStyle/>
-          <a:p>
-            <a:pPr algn="ctr"/>
-            <a:r>
-              <a:rPr lang="es-MX" sz="4800" b="1" dirty="0">
-                <a:solidFill>
-                  <a:schemeClr val="bg1"/>
-                </a:solidFill>
-                <a:latin typeface="Libre Franklin" pitchFamily="2" charset="0"/>
-              </a:rPr>
-              <a:t>Inconvenientes estadísticos de inflación cero</a:t>
-            </a:r>
-          </a:p>
-        </p:txBody>
-      </p:sp>
-    </p:spTree>
-    <p:extLst>
-      <p:ext uri="{BB962C8B-B14F-4D97-AF65-F5344CB8AC3E}">
-        <p14:creationId xmlns:p14="http://schemas.microsoft.com/office/powerpoint/2010/main" val="846759757"/>
-      </p:ext>
-    </p:extLst>
-  </p:cSld>
-  <p:clrMapOvr>
-    <a:masterClrMapping/>
-  </p:clrMapOvr>
-</p:sld>
-</file>
-
-<file path=ppt/slides/slide7.xml><?xml version="1.0" encoding="utf-8"?>
-<p:sld xmlns:a="http://schemas.openxmlformats.org/drawingml/2006/main" xmlns:r="http://schemas.openxmlformats.org/officeDocument/2006/relationships" xmlns:p="http://schemas.openxmlformats.org/presentationml/2006/main">
-  <p:cSld>
-    <p:spTree>
-      <p:nvGrpSpPr>
-        <p:cNvPr id="1" name="">
-          <a:extLst>
-            <a:ext uri="{FF2B5EF4-FFF2-40B4-BE49-F238E27FC236}">
-              <a16:creationId xmlns:a16="http://schemas.microsoft.com/office/drawing/2014/main" id="{DBCF0AAD-ECC2-32BE-DECD-0D9604DA3190}"/>
-            </a:ext>
-          </a:extLst>
-        </p:cNvPr>
-        <p:cNvGrpSpPr/>
-        <p:nvPr/>
-      </p:nvGrpSpPr>
-      <p:grpSpPr>
-        <a:xfrm>
-          <a:off x="0" y="0"/>
-          <a:ext cx="0" cy="0"/>
-          <a:chOff x="0" y="0"/>
-          <a:chExt cx="0" cy="0"/>
-        </a:xfrm>
-      </p:grpSpPr>
       <p:sp>
         <p:nvSpPr>
           <p:cNvPr id="2" name="Título 1">
             <a:extLst>
               <a:ext uri="{FF2B5EF4-FFF2-40B4-BE49-F238E27FC236}">
-                <a16:creationId xmlns:a16="http://schemas.microsoft.com/office/drawing/2014/main" id="{11900F02-ABC8-21BB-307E-1566DCF51A94}"/>
+                <a16:creationId xmlns:a16="http://schemas.microsoft.com/office/drawing/2014/main" id="{654E0456-9D0A-458C-8A2E-EC9E7705C955}"/>
               </a:ext>
             </a:extLst>
           </p:cNvPr>
@@ -13166,7 +15808,7 @@
           <p:cNvPr id="3" name="Subtítulo 2">
             <a:extLst>
               <a:ext uri="{FF2B5EF4-FFF2-40B4-BE49-F238E27FC236}">
-                <a16:creationId xmlns:a16="http://schemas.microsoft.com/office/drawing/2014/main" id="{BEE58B2C-E433-81DA-70CB-142F66D78F98}"/>
+                <a16:creationId xmlns:a16="http://schemas.microsoft.com/office/drawing/2014/main" id="{0D8893AB-0534-4B88-9B3D-6ABA4EB9FE3F}"/>
               </a:ext>
             </a:extLst>
           </p:cNvPr>
@@ -13191,7 +15833,7 @@
           <p:cNvPr id="6" name="Imagen 5">
             <a:extLst>
               <a:ext uri="{FF2B5EF4-FFF2-40B4-BE49-F238E27FC236}">
-                <a16:creationId xmlns:a16="http://schemas.microsoft.com/office/drawing/2014/main" id="{4B669E8B-6D95-C7F1-3F5A-CFA3D8C0D3B0}"/>
+                <a16:creationId xmlns:a16="http://schemas.microsoft.com/office/drawing/2014/main" id="{0C209CE5-AFD2-4CA7-8D90-C1E60E946553}"/>
               </a:ext>
             </a:extLst>
           </p:cNvPr>
@@ -13214,7 +15856,7 @@
         </p:blipFill>
         <p:spPr>
           <a:xfrm>
-            <a:off x="0" y="0"/>
+            <a:off x="-9832" y="0"/>
             <a:ext cx="12192000" cy="6858000"/>
           </a:xfrm>
           <a:prstGeom prst="rect">
@@ -13227,7 +15869,7 @@
           <p:cNvPr id="7" name="CuadroTexto 6">
             <a:extLst>
               <a:ext uri="{FF2B5EF4-FFF2-40B4-BE49-F238E27FC236}">
-                <a16:creationId xmlns:a16="http://schemas.microsoft.com/office/drawing/2014/main" id="{8D9E3BE8-5C07-C585-EA90-C2BBA38C9D99}"/>
+                <a16:creationId xmlns:a16="http://schemas.microsoft.com/office/drawing/2014/main" id="{0BBF9201-58C7-4E4D-ABE8-980848FA6D59}"/>
               </a:ext>
             </a:extLst>
           </p:cNvPr>
@@ -13254,7 +15896,7 @@
               <a:rPr lang="es-ES" sz="2800" b="1" dirty="0">
                 <a:latin typeface="Libre Franklin" pitchFamily="2" charset="0"/>
               </a:rPr>
-              <a:t>Inconvenientes estadísticos de inflación cero</a:t>
+              <a:t>Bibliografía consultada</a:t>
             </a:r>
             <a:endParaRPr lang="es-GT" b="1" dirty="0">
               <a:latin typeface="Libre Franklin" pitchFamily="2" charset="0"/>
@@ -13267,7 +15909,7 @@
           <p:cNvPr id="8" name="Conector recto 7">
             <a:extLst>
               <a:ext uri="{FF2B5EF4-FFF2-40B4-BE49-F238E27FC236}">
-                <a16:creationId xmlns:a16="http://schemas.microsoft.com/office/drawing/2014/main" id="{98A7597A-60A0-AD08-21CB-F17E93085EDA}"/>
+                <a16:creationId xmlns:a16="http://schemas.microsoft.com/office/drawing/2014/main" id="{41A554FA-D2F8-4E55-B343-5244ABC3AFF3}"/>
               </a:ext>
             </a:extLst>
           </p:cNvPr>
@@ -13279,7 +15921,7 @@
         <p:spPr>
           <a:xfrm>
             <a:off x="265471" y="730459"/>
-            <a:ext cx="7655036" cy="0"/>
+            <a:ext cx="6430297" cy="0"/>
           </a:xfrm>
           <a:prstGeom prst="line">
             <a:avLst/>
@@ -13307,10 +15949,10 @@
       </p:cxnSp>
       <p:sp>
         <p:nvSpPr>
-          <p:cNvPr id="4" name="CuadroTexto 3">
-            <a:extLst>
-              <a:ext uri="{FF2B5EF4-FFF2-40B4-BE49-F238E27FC236}">
-                <a16:creationId xmlns:a16="http://schemas.microsoft.com/office/drawing/2014/main" id="{FC108DCB-15E3-DC3E-70ED-F000A2B1A319}"/>
+          <p:cNvPr id="11" name="CuadroTexto 10">
+            <a:extLst>
+              <a:ext uri="{FF2B5EF4-FFF2-40B4-BE49-F238E27FC236}">
+                <a16:creationId xmlns:a16="http://schemas.microsoft.com/office/drawing/2014/main" id="{87D7D931-49AF-4697-AA0B-140B7ADA1D91}"/>
               </a:ext>
             </a:extLst>
           </p:cNvPr>
@@ -13319,8 +15961,8 @@
         </p:nvSpPr>
         <p:spPr>
           <a:xfrm>
-            <a:off x="490600" y="876271"/>
-            <a:ext cx="9899117" cy="707886"/>
+            <a:off x="165181" y="624270"/>
+            <a:ext cx="11546173" cy="5016758"/>
           </a:xfrm>
           <a:prstGeom prst="rect">
             <a:avLst/>
@@ -13333,404 +15975,77 @@
           </a:bodyPr>
           <a:lstStyle/>
           <a:p>
-            <a:r>
-              <a:rPr lang="es-ES" sz="2000" b="1" dirty="0">
-                <a:latin typeface="Libre Franklin" pitchFamily="2" charset="0"/>
-              </a:rPr>
-              <a:t>Sesgos en la medición de los Índices de Precios al Consumido</a:t>
-            </a:r>
-            <a:endParaRPr lang="es-ES" sz="2000" dirty="0">
+            <a:pPr marL="800100" lvl="1" indent="-342900">
+              <a:lnSpc>
+                <a:spcPct val="200000"/>
+              </a:lnSpc>
+              <a:buFont typeface="Arial" panose="020B0604020202020204" pitchFamily="34" charset="0"/>
+              <a:buChar char="•"/>
+            </a:pPr>
+            <a:r>
+              <a:rPr lang="es-ES" sz="2000" b="1" u="sng" dirty="0">
+                <a:latin typeface="Libre Franklin" pitchFamily="2" charset="0"/>
+              </a:rPr>
+              <a:t>Evaluación del diseño e implementación de la política monetaria y cambiaria del Banco</a:t>
+            </a:r>
+          </a:p>
+          <a:p>
+            <a:pPr marL="809625" lvl="1"/>
+            <a:r>
+              <a:rPr lang="es-ES" sz="2000" b="1" u="sng" dirty="0">
+                <a:latin typeface="Libre Franklin" pitchFamily="2" charset="0"/>
+              </a:rPr>
+              <a:t>de Guatemala, Sebastián Edwards, 2012-2022.</a:t>
+            </a:r>
+          </a:p>
+          <a:p>
+            <a:pPr marL="896938" lvl="1" algn="just"/>
+            <a:r>
+              <a:rPr lang="en-US" sz="2000" i="1" dirty="0">
+                <a:latin typeface="Libre Franklin" pitchFamily="2" charset="0"/>
+              </a:rPr>
+              <a:t>“</a:t>
+            </a:r>
+            <a:r>
+              <a:rPr lang="es-ES" sz="2000" i="1" dirty="0">
+                <a:latin typeface="Libre Franklin" pitchFamily="2" charset="0"/>
+              </a:rPr>
+              <a:t>Ambos documentos son una evaluación de la política monetaria y cambiaria. El principal énfasis al abordar la revisión literaria fueron sus comentarios respecto al nivel meta de inflación. En el primer documento destaca los beneficios de una reducción de la meta, como lo es la disminución de la persistencia inflacionaria y reducción de riesgos frente a choques inflacionarios. En el segundo de los documentos cambia su postura y expresa que el nivel actual de la meta de inflación es adecuado dadas las circunstancias del entorno económico global y el comportamiento de la economía guatemalteca.”</a:t>
+            </a:r>
+            <a:endParaRPr lang="es-MX" sz="2000" b="1" u="sng" dirty="0">
               <a:latin typeface="Libre Franklin" pitchFamily="2" charset="0"/>
             </a:endParaRPr>
           </a:p>
           <a:p>
-            <a:endParaRPr lang="es-ES" sz="2000" dirty="0">
-              <a:latin typeface="Libre Franklin" pitchFamily="2" charset="0"/>
-            </a:endParaRPr>
-          </a:p>
-        </p:txBody>
-      </p:sp>
-      <p:pic>
-        <p:nvPicPr>
-          <p:cNvPr id="13" name="Imagen 12">
-            <a:extLst>
-              <a:ext uri="{FF2B5EF4-FFF2-40B4-BE49-F238E27FC236}">
-                <a16:creationId xmlns:a16="http://schemas.microsoft.com/office/drawing/2014/main" id="{3A2B211A-07FE-383D-3040-D49980C2AD54}"/>
-              </a:ext>
-            </a:extLst>
-          </p:cNvPr>
-          <p:cNvPicPr>
-            <a:picLocks noChangeAspect="1"/>
-          </p:cNvPicPr>
-          <p:nvPr/>
-        </p:nvPicPr>
-        <p:blipFill>
-          <a:blip r:embed="rId3"/>
-          <a:srcRect l="2583" r="7236"/>
-          <a:stretch>
-            <a:fillRect/>
-          </a:stretch>
-        </p:blipFill>
-        <p:spPr>
-          <a:xfrm>
-            <a:off x="6811056" y="1410739"/>
-            <a:ext cx="4750969" cy="3019180"/>
-          </a:xfrm>
-          <a:prstGeom prst="rect">
-            <a:avLst/>
-          </a:prstGeom>
-        </p:spPr>
-      </p:pic>
-      <p:sp>
-        <p:nvSpPr>
-          <p:cNvPr id="15" name="CuadroTexto 14">
-            <a:extLst>
-              <a:ext uri="{FF2B5EF4-FFF2-40B4-BE49-F238E27FC236}">
-                <a16:creationId xmlns:a16="http://schemas.microsoft.com/office/drawing/2014/main" id="{5E32B4D1-3FE8-041C-85DA-C5B67772E78E}"/>
-              </a:ext>
-            </a:extLst>
-          </p:cNvPr>
-          <p:cNvSpPr txBox="1"/>
-          <p:nvPr/>
-        </p:nvSpPr>
-        <p:spPr>
-          <a:xfrm>
-            <a:off x="490600" y="1724740"/>
-            <a:ext cx="6159320" cy="2585323"/>
-          </a:xfrm>
-          <a:prstGeom prst="rect">
-            <a:avLst/>
-          </a:prstGeom>
-          <a:noFill/>
-        </p:spPr>
-        <p:txBody>
-          <a:bodyPr wrap="square">
-            <a:spAutoFit/>
-          </a:bodyPr>
-          <a:lstStyle/>
-          <a:p>
-            <a:pPr algn="just"/>
-            <a:r>
-              <a:rPr lang="es-ES" sz="1800" dirty="0">
-                <a:latin typeface="Libre Franklin" pitchFamily="2" charset="0"/>
-              </a:rPr>
-              <a:t>Desde la publicación del reporte “</a:t>
-            </a:r>
-            <a:r>
-              <a:rPr lang="es-ES" sz="1800" i="1" dirty="0" err="1">
-                <a:latin typeface="Libre Franklin" pitchFamily="2" charset="0"/>
-              </a:rPr>
-              <a:t>Toward</a:t>
-            </a:r>
-            <a:r>
-              <a:rPr lang="es-ES" sz="1800" i="1" dirty="0">
-                <a:latin typeface="Libre Franklin" pitchFamily="2" charset="0"/>
-              </a:rPr>
-              <a:t> a more </a:t>
-            </a:r>
-            <a:r>
-              <a:rPr lang="es-ES" sz="1800" i="1" dirty="0" err="1">
-                <a:latin typeface="Libre Franklin" pitchFamily="2" charset="0"/>
-              </a:rPr>
-              <a:t>accurate</a:t>
-            </a:r>
-            <a:r>
-              <a:rPr lang="es-ES" sz="1800" i="1" dirty="0">
-                <a:latin typeface="Libre Franklin" pitchFamily="2" charset="0"/>
-              </a:rPr>
-              <a:t> </a:t>
-            </a:r>
-            <a:r>
-              <a:rPr lang="es-ES" sz="1800" i="1" dirty="0" err="1">
-                <a:latin typeface="Libre Franklin" pitchFamily="2" charset="0"/>
-              </a:rPr>
-              <a:t>measure</a:t>
-            </a:r>
-            <a:r>
-              <a:rPr lang="es-ES" sz="1800" i="1" dirty="0">
-                <a:latin typeface="Libre Franklin" pitchFamily="2" charset="0"/>
-              </a:rPr>
-              <a:t> </a:t>
-            </a:r>
-            <a:r>
-              <a:rPr lang="es-ES" sz="1800" i="1" dirty="0" err="1">
-                <a:latin typeface="Libre Franklin" pitchFamily="2" charset="0"/>
-              </a:rPr>
-              <a:t>of</a:t>
-            </a:r>
-            <a:r>
-              <a:rPr lang="es-ES" sz="1800" i="1" dirty="0">
-                <a:latin typeface="Libre Franklin" pitchFamily="2" charset="0"/>
-              </a:rPr>
-              <a:t> </a:t>
-            </a:r>
-            <a:r>
-              <a:rPr lang="es-ES" sz="1800" i="1" dirty="0" err="1">
-                <a:latin typeface="Libre Franklin" pitchFamily="2" charset="0"/>
-              </a:rPr>
-              <a:t>the</a:t>
-            </a:r>
-            <a:r>
-              <a:rPr lang="es-ES" sz="1800" i="1" dirty="0">
-                <a:latin typeface="Libre Franklin" pitchFamily="2" charset="0"/>
-              </a:rPr>
-              <a:t> </a:t>
-            </a:r>
-            <a:r>
-              <a:rPr lang="es-ES" sz="1800" i="1" dirty="0" err="1">
-                <a:latin typeface="Libre Franklin" pitchFamily="2" charset="0"/>
-              </a:rPr>
-              <a:t>cost</a:t>
-            </a:r>
-            <a:r>
-              <a:rPr lang="es-ES" sz="1800" i="1" dirty="0">
-                <a:latin typeface="Libre Franklin" pitchFamily="2" charset="0"/>
-              </a:rPr>
-              <a:t> </a:t>
-            </a:r>
-            <a:r>
-              <a:rPr lang="es-ES" sz="1800" i="1" dirty="0" err="1">
-                <a:latin typeface="Libre Franklin" pitchFamily="2" charset="0"/>
-              </a:rPr>
-              <a:t>of</a:t>
-            </a:r>
-            <a:r>
-              <a:rPr lang="es-ES" sz="1800" i="1" dirty="0">
-                <a:latin typeface="Libre Franklin" pitchFamily="2" charset="0"/>
-              </a:rPr>
-              <a:t> living</a:t>
-            </a:r>
-            <a:r>
-              <a:rPr lang="es-ES" sz="1800" dirty="0">
-                <a:latin typeface="Libre Franklin" pitchFamily="2" charset="0"/>
-              </a:rPr>
-              <a:t>” se sabe del sesgo al alza en la medición en la inflación. Pese a los esfuerzos por reducir el sesgo este aun es un problema persistente.</a:t>
-            </a:r>
-          </a:p>
-          <a:p>
-            <a:pPr algn="just"/>
-            <a:endParaRPr lang="es-ES" dirty="0">
-              <a:latin typeface="Libre Franklin" pitchFamily="2" charset="0"/>
-            </a:endParaRPr>
-          </a:p>
-          <a:p>
-            <a:pPr algn="just"/>
-            <a:r>
-              <a:rPr lang="es-ES" dirty="0">
-                <a:latin typeface="Libre Franklin" pitchFamily="2" charset="0"/>
-              </a:rPr>
-              <a:t>Una inflación igual a cero no solo implicaría una mala señal para los agentes, también implica una situación de deflación en la economía.</a:t>
-            </a:r>
-            <a:endParaRPr lang="es-GT" dirty="0">
-              <a:latin typeface="Libre Franklin" pitchFamily="2" charset="0"/>
-            </a:endParaRPr>
-          </a:p>
-        </p:txBody>
-      </p:sp>
-      <p:sp>
-        <p:nvSpPr>
-          <p:cNvPr id="16" name="CuadroTexto 15">
-            <a:extLst>
-              <a:ext uri="{FF2B5EF4-FFF2-40B4-BE49-F238E27FC236}">
-                <a16:creationId xmlns:a16="http://schemas.microsoft.com/office/drawing/2014/main" id="{6C7A651E-480B-516A-D489-3D8527CB3DB1}"/>
-              </a:ext>
-            </a:extLst>
-          </p:cNvPr>
-          <p:cNvSpPr txBox="1"/>
-          <p:nvPr/>
-        </p:nvSpPr>
-        <p:spPr>
-          <a:xfrm>
-            <a:off x="7398913" y="4395129"/>
-            <a:ext cx="4302487" cy="1015663"/>
-          </a:xfrm>
-          <a:prstGeom prst="rect">
-            <a:avLst/>
-          </a:prstGeom>
-          <a:noFill/>
-        </p:spPr>
-        <p:txBody>
-          <a:bodyPr wrap="square">
-            <a:spAutoFit/>
-          </a:bodyPr>
-          <a:lstStyle/>
-          <a:p>
-            <a:pPr algn="just"/>
-            <a:r>
-              <a:rPr lang="es-ES" sz="1200" dirty="0">
-                <a:latin typeface="Libre Franklin" pitchFamily="2" charset="0"/>
-              </a:rPr>
-              <a:t>Fuente: </a:t>
-            </a:r>
-            <a:r>
-              <a:rPr lang="es-ES" sz="1200" dirty="0" err="1">
-                <a:latin typeface="Libre Franklin" pitchFamily="2" charset="0"/>
-              </a:rPr>
-              <a:t>Measurement</a:t>
-            </a:r>
-            <a:r>
-              <a:rPr lang="es-ES" sz="1200" dirty="0">
-                <a:latin typeface="Libre Franklin" pitchFamily="2" charset="0"/>
-              </a:rPr>
-              <a:t> </a:t>
-            </a:r>
-            <a:r>
-              <a:rPr lang="es-ES" sz="1200" dirty="0" err="1">
-                <a:latin typeface="Libre Franklin" pitchFamily="2" charset="0"/>
-              </a:rPr>
-              <a:t>Errors</a:t>
-            </a:r>
-            <a:r>
-              <a:rPr lang="es-ES" sz="1200" dirty="0">
-                <a:latin typeface="Libre Franklin" pitchFamily="2" charset="0"/>
-              </a:rPr>
-              <a:t> in </a:t>
-            </a:r>
-            <a:r>
-              <a:rPr lang="es-ES" sz="1200" dirty="0" err="1">
-                <a:latin typeface="Libre Franklin" pitchFamily="2" charset="0"/>
-              </a:rPr>
-              <a:t>the</a:t>
-            </a:r>
-            <a:r>
-              <a:rPr lang="es-ES" sz="1200" dirty="0">
-                <a:latin typeface="Libre Franklin" pitchFamily="2" charset="0"/>
-              </a:rPr>
-              <a:t> </a:t>
-            </a:r>
-            <a:r>
-              <a:rPr lang="es-ES" sz="1200" dirty="0" err="1">
-                <a:latin typeface="Libre Franklin" pitchFamily="2" charset="0"/>
-              </a:rPr>
-              <a:t>Consumer</a:t>
-            </a:r>
-            <a:r>
-              <a:rPr lang="es-ES" sz="1200" dirty="0">
-                <a:latin typeface="Libre Franklin" pitchFamily="2" charset="0"/>
-              </a:rPr>
-              <a:t> Price </a:t>
-            </a:r>
-            <a:r>
-              <a:rPr lang="es-ES" sz="1200" dirty="0" err="1">
-                <a:latin typeface="Libre Franklin" pitchFamily="2" charset="0"/>
-              </a:rPr>
-              <a:t>Index</a:t>
-            </a:r>
-            <a:r>
-              <a:rPr lang="es-ES" sz="1200" dirty="0">
-                <a:latin typeface="Libre Franklin" pitchFamily="2" charset="0"/>
-              </a:rPr>
-              <a:t>: </a:t>
-            </a:r>
-            <a:r>
-              <a:rPr lang="es-ES" sz="1200" dirty="0" err="1">
-                <a:latin typeface="Libre Franklin" pitchFamily="2" charset="0"/>
-              </a:rPr>
-              <a:t>Perspetives</a:t>
-            </a:r>
-            <a:r>
-              <a:rPr lang="es-ES" sz="1200" dirty="0">
-                <a:latin typeface="Libre Franklin" pitchFamily="2" charset="0"/>
-              </a:rPr>
-              <a:t> </a:t>
-            </a:r>
-            <a:r>
-              <a:rPr lang="es-ES" sz="1200" dirty="0" err="1">
-                <a:latin typeface="Libre Franklin" pitchFamily="2" charset="0"/>
-              </a:rPr>
-              <a:t>on</a:t>
-            </a:r>
-            <a:r>
-              <a:rPr lang="es-ES" sz="1200" dirty="0">
-                <a:latin typeface="Libre Franklin" pitchFamily="2" charset="0"/>
-              </a:rPr>
-              <a:t> </a:t>
-            </a:r>
-            <a:r>
-              <a:rPr lang="es-ES" sz="1200" dirty="0" err="1">
-                <a:latin typeface="Libre Franklin" pitchFamily="2" charset="0"/>
-              </a:rPr>
-              <a:t>Numerical</a:t>
-            </a:r>
-            <a:r>
-              <a:rPr lang="es-ES" sz="1200" dirty="0">
-                <a:latin typeface="Libre Franklin" pitchFamily="2" charset="0"/>
-              </a:rPr>
-              <a:t> Targets </a:t>
-            </a:r>
-            <a:r>
-              <a:rPr lang="es-ES" sz="1200" dirty="0" err="1">
-                <a:latin typeface="Libre Franklin" pitchFamily="2" charset="0"/>
-              </a:rPr>
-              <a:t>for</a:t>
-            </a:r>
-            <a:r>
-              <a:rPr lang="es-ES" sz="1200" dirty="0">
-                <a:latin typeface="Libre Franklin" pitchFamily="2" charset="0"/>
-              </a:rPr>
-              <a:t> Price </a:t>
-            </a:r>
-            <a:r>
-              <a:rPr lang="es-ES" sz="1200" dirty="0" err="1">
-                <a:latin typeface="Libre Franklin" pitchFamily="2" charset="0"/>
-              </a:rPr>
-              <a:t>Stability</a:t>
-            </a:r>
-            <a:r>
-              <a:rPr lang="es-ES" sz="1200" dirty="0">
-                <a:latin typeface="Libre Franklin" pitchFamily="2" charset="0"/>
-              </a:rPr>
-              <a:t> in </a:t>
-            </a:r>
-            <a:r>
-              <a:rPr lang="es-ES" sz="1200" dirty="0" err="1">
-                <a:latin typeface="Libre Franklin" pitchFamily="2" charset="0"/>
-              </a:rPr>
-              <a:t>Major</a:t>
-            </a:r>
-            <a:r>
-              <a:rPr lang="es-ES" sz="1200" dirty="0">
-                <a:latin typeface="Libre Franklin" pitchFamily="2" charset="0"/>
-              </a:rPr>
-              <a:t> </a:t>
-            </a:r>
-            <a:r>
-              <a:rPr lang="es-ES" sz="1200" dirty="0" err="1">
-                <a:latin typeface="Libre Franklin" pitchFamily="2" charset="0"/>
-              </a:rPr>
-              <a:t>Economies</a:t>
-            </a:r>
-            <a:r>
-              <a:rPr lang="es-ES" sz="1200" dirty="0">
-                <a:latin typeface="Libre Franklin" pitchFamily="2" charset="0"/>
-              </a:rPr>
-              <a:t>. </a:t>
-            </a:r>
-          </a:p>
-          <a:p>
-            <a:pPr algn="just"/>
-            <a:endParaRPr lang="es-ES" sz="1200" dirty="0">
-              <a:latin typeface="Libre Franklin" pitchFamily="2" charset="0"/>
-            </a:endParaRPr>
-          </a:p>
-          <a:p>
-            <a:pPr algn="just"/>
-            <a:r>
-              <a:rPr lang="es-ES" sz="1200" dirty="0">
-                <a:latin typeface="Libre Franklin" pitchFamily="2" charset="0"/>
-              </a:rPr>
-              <a:t>Banco de Japón</a:t>
-            </a:r>
-            <a:endParaRPr lang="es-GT" sz="1200" dirty="0">
-              <a:latin typeface="Libre Franklin" pitchFamily="2" charset="0"/>
-            </a:endParaRPr>
+            <a:pPr marL="800100" lvl="1" indent="-342900">
+              <a:lnSpc>
+                <a:spcPct val="200000"/>
+              </a:lnSpc>
+              <a:buFont typeface="Arial" panose="020B0604020202020204" pitchFamily="34" charset="0"/>
+              <a:buChar char="•"/>
+            </a:pPr>
+            <a:r>
+              <a:rPr lang="es-MX" sz="2000" b="1" u="sng" dirty="0">
+                <a:latin typeface="Libre Franklin" pitchFamily="2" charset="0"/>
+              </a:rPr>
+              <a:t>Evaluación de la Política Monetaria 2015</a:t>
+            </a:r>
+          </a:p>
+          <a:p>
+            <a:pPr marL="896938" lvl="1" algn="just"/>
+            <a:r>
+              <a:rPr lang="es-MX" sz="2000" i="1" dirty="0">
+                <a:latin typeface="Libre Franklin" pitchFamily="2" charset="0"/>
+              </a:rPr>
+              <a:t>“Documento que cuenta con un apartado que aborda el tema de la revisión de la meta de inflación. Se mencionan los costos de la inflación, los elementos que sustentan una meta del 4%, así como los aspectos a considerar como condiciones previas a una disminución del nivel de la meta.”</a:t>
+            </a:r>
           </a:p>
         </p:txBody>
       </p:sp>
     </p:spTree>
     <p:extLst>
       <p:ext uri="{BB962C8B-B14F-4D97-AF65-F5344CB8AC3E}">
-        <p14:creationId xmlns:p14="http://schemas.microsoft.com/office/powerpoint/2010/main" val="2440913848"/>
+        <p14:creationId xmlns:p14="http://schemas.microsoft.com/office/powerpoint/2010/main" val="2801019813"/>
       </p:ext>
     </p:extLst>
   </p:cSld>
@@ -13740,18 +16055,12 @@
 </p:sld>
 </file>
 
-<file path=ppt/slides/slide8.xml><?xml version="1.0" encoding="utf-8"?>
+<file path=ppt/slides/slide7.xml><?xml version="1.0" encoding="utf-8"?>
 <p:sld xmlns:a="http://schemas.openxmlformats.org/drawingml/2006/main" xmlns:r="http://schemas.openxmlformats.org/officeDocument/2006/relationships" xmlns:p="http://schemas.openxmlformats.org/presentationml/2006/main">
   <p:cSld>
     <p:spTree>
       <p:nvGrpSpPr>
-        <p:cNvPr id="1" name="">
-          <a:extLst>
-            <a:ext uri="{FF2B5EF4-FFF2-40B4-BE49-F238E27FC236}">
-              <a16:creationId xmlns:a16="http://schemas.microsoft.com/office/drawing/2014/main" id="{54EC1E0F-3A03-65A1-EAA9-2150EE119E83}"/>
-            </a:ext>
-          </a:extLst>
-        </p:cNvPr>
+        <p:cNvPr id="1" name=""/>
         <p:cNvGrpSpPr/>
         <p:nvPr/>
       </p:nvGrpSpPr>
@@ -13768,7 +16077,7 @@
           <p:cNvPr id="2" name="Título 1">
             <a:extLst>
               <a:ext uri="{FF2B5EF4-FFF2-40B4-BE49-F238E27FC236}">
-                <a16:creationId xmlns:a16="http://schemas.microsoft.com/office/drawing/2014/main" id="{FA1DD0DA-3E52-35FA-6008-F1DA6CD45944}"/>
+                <a16:creationId xmlns:a16="http://schemas.microsoft.com/office/drawing/2014/main" id="{654E0456-9D0A-458C-8A2E-EC9E7705C955}"/>
               </a:ext>
             </a:extLst>
           </p:cNvPr>
@@ -13793,7 +16102,7 @@
           <p:cNvPr id="3" name="Subtítulo 2">
             <a:extLst>
               <a:ext uri="{FF2B5EF4-FFF2-40B4-BE49-F238E27FC236}">
-                <a16:creationId xmlns:a16="http://schemas.microsoft.com/office/drawing/2014/main" id="{B1D0F4EF-2D98-0191-3B39-63B5D52D1DD5}"/>
+                <a16:creationId xmlns:a16="http://schemas.microsoft.com/office/drawing/2014/main" id="{0D8893AB-0534-4B88-9B3D-6ABA4EB9FE3F}"/>
               </a:ext>
             </a:extLst>
           </p:cNvPr>
@@ -13818,7 +16127,7 @@
           <p:cNvPr id="6" name="Imagen 5">
             <a:extLst>
               <a:ext uri="{FF2B5EF4-FFF2-40B4-BE49-F238E27FC236}">
-                <a16:creationId xmlns:a16="http://schemas.microsoft.com/office/drawing/2014/main" id="{2E0DEF24-BB80-82A7-8138-494FBF9BAC27}"/>
+                <a16:creationId xmlns:a16="http://schemas.microsoft.com/office/drawing/2014/main" id="{0C209CE5-AFD2-4CA7-8D90-C1E60E946553}"/>
               </a:ext>
             </a:extLst>
           </p:cNvPr>
@@ -13854,7 +16163,7 @@
           <p:cNvPr id="7" name="CuadroTexto 6">
             <a:extLst>
               <a:ext uri="{FF2B5EF4-FFF2-40B4-BE49-F238E27FC236}">
-                <a16:creationId xmlns:a16="http://schemas.microsoft.com/office/drawing/2014/main" id="{ADD180B3-394E-F5B7-5528-22C8C3FB6E23}"/>
+                <a16:creationId xmlns:a16="http://schemas.microsoft.com/office/drawing/2014/main" id="{0BBF9201-58C7-4E4D-ABE8-980848FA6D59}"/>
               </a:ext>
             </a:extLst>
           </p:cNvPr>
@@ -13881,7 +16190,7 @@
               <a:rPr lang="es-ES" sz="2800" b="1" dirty="0">
                 <a:latin typeface="Libre Franklin" pitchFamily="2" charset="0"/>
               </a:rPr>
-              <a:t>Inconvenientes estadísticos de inflación cero</a:t>
+              <a:t>Bibliografía consultada</a:t>
             </a:r>
             <a:endParaRPr lang="es-GT" b="1" dirty="0">
               <a:latin typeface="Libre Franklin" pitchFamily="2" charset="0"/>
@@ -13894,7 +16203,7 @@
           <p:cNvPr id="8" name="Conector recto 7">
             <a:extLst>
               <a:ext uri="{FF2B5EF4-FFF2-40B4-BE49-F238E27FC236}">
-                <a16:creationId xmlns:a16="http://schemas.microsoft.com/office/drawing/2014/main" id="{16C81271-FEEB-0FD9-DC17-5AE6F8772B6E}"/>
+                <a16:creationId xmlns:a16="http://schemas.microsoft.com/office/drawing/2014/main" id="{41A554FA-D2F8-4E55-B343-5244ABC3AFF3}"/>
               </a:ext>
             </a:extLst>
           </p:cNvPr>
@@ -13906,7 +16215,7 @@
         <p:spPr>
           <a:xfrm>
             <a:off x="265471" y="730459"/>
-            <a:ext cx="7655036" cy="0"/>
+            <a:ext cx="6430297" cy="0"/>
           </a:xfrm>
           <a:prstGeom prst="line">
             <a:avLst/>
@@ -13934,10 +16243,10 @@
       </p:cxnSp>
       <p:sp>
         <p:nvSpPr>
-          <p:cNvPr id="4" name="CuadroTexto 3">
-            <a:extLst>
-              <a:ext uri="{FF2B5EF4-FFF2-40B4-BE49-F238E27FC236}">
-                <a16:creationId xmlns:a16="http://schemas.microsoft.com/office/drawing/2014/main" id="{A345C3F1-0CAB-F332-29D4-4E90E371EDF2}"/>
+          <p:cNvPr id="11" name="CuadroTexto 10">
+            <a:extLst>
+              <a:ext uri="{FF2B5EF4-FFF2-40B4-BE49-F238E27FC236}">
+                <a16:creationId xmlns:a16="http://schemas.microsoft.com/office/drawing/2014/main" id="{87D7D931-49AF-4697-AA0B-140B7ADA1D91}"/>
               </a:ext>
             </a:extLst>
           </p:cNvPr>
@@ -13946,8 +16255,8 @@
         </p:nvSpPr>
         <p:spPr>
           <a:xfrm>
-            <a:off x="490600" y="876271"/>
-            <a:ext cx="9899117" cy="400110"/>
+            <a:off x="165181" y="730459"/>
+            <a:ext cx="11546173" cy="4524315"/>
           </a:xfrm>
           <a:prstGeom prst="rect">
             <a:avLst/>
@@ -13960,99 +16269,71 @@
           </a:bodyPr>
           <a:lstStyle/>
           <a:p>
-            <a:r>
-              <a:rPr lang="es-ES" sz="2000" b="1" dirty="0">
-                <a:latin typeface="Libre Franklin" pitchFamily="2" charset="0"/>
-              </a:rPr>
-              <a:t>Sesgo por calidad de bienes nuevos</a:t>
-            </a:r>
-            <a:endParaRPr lang="es-ES" sz="2000" dirty="0">
+            <a:pPr marL="800100" lvl="1" indent="-342900">
+              <a:buFont typeface="Arial" panose="020B0604020202020204" pitchFamily="34" charset="0"/>
+              <a:buChar char="•"/>
+            </a:pPr>
+            <a:r>
+              <a:rPr lang="en-US" sz="2000" b="1" u="sng" dirty="0">
+                <a:latin typeface="Libre Franklin" pitchFamily="2" charset="0"/>
+              </a:rPr>
+              <a:t>Measurement Errors in the Consumer Price Index: Perspectives on Numerical Targets for Price Stability in Major Economies, Bank of Japan, 2024.</a:t>
+            </a:r>
+            <a:endParaRPr lang="es-ES" sz="2000" b="1" u="sng" dirty="0">
               <a:latin typeface="Libre Franklin" pitchFamily="2" charset="0"/>
             </a:endParaRPr>
           </a:p>
-        </p:txBody>
-      </p:sp>
-      <p:sp>
-        <p:nvSpPr>
-          <p:cNvPr id="15" name="CuadroTexto 14">
-            <a:extLst>
-              <a:ext uri="{FF2B5EF4-FFF2-40B4-BE49-F238E27FC236}">
-                <a16:creationId xmlns:a16="http://schemas.microsoft.com/office/drawing/2014/main" id="{179600FE-70A4-9038-77A0-06B570D2E1D6}"/>
-              </a:ext>
-            </a:extLst>
-          </p:cNvPr>
-          <p:cNvSpPr txBox="1"/>
-          <p:nvPr/>
-        </p:nvSpPr>
-        <p:spPr>
-          <a:xfrm>
-            <a:off x="490599" y="1522473"/>
-            <a:ext cx="10739777" cy="3416320"/>
-          </a:xfrm>
-          <a:prstGeom prst="rect">
-            <a:avLst/>
-          </a:prstGeom>
-          <a:noFill/>
-        </p:spPr>
-        <p:txBody>
-          <a:bodyPr wrap="square">
-            <a:spAutoFit/>
-          </a:bodyPr>
-          <a:lstStyle/>
-          <a:p>
-            <a:pPr algn="just"/>
-            <a:r>
-              <a:rPr lang="es-ES" dirty="0">
-                <a:latin typeface="Libre Franklin" pitchFamily="2" charset="0"/>
-              </a:rPr>
-              <a:t>La correcta medición de la inflación está condicionada por la capacidad de la metodología para capturar cambios en la demanda, así como la calidad de los bienes que se comercian.</a:t>
-            </a:r>
-          </a:p>
-          <a:p>
-            <a:pPr algn="just"/>
-            <a:endParaRPr lang="es-ES" dirty="0">
+          <a:p>
+            <a:pPr marL="896938" lvl="1" algn="just"/>
+            <a:r>
+              <a:rPr lang="en-US" sz="2000" i="1" dirty="0">
+                <a:latin typeface="Libre Franklin" pitchFamily="2" charset="0"/>
+              </a:rPr>
+              <a:t>“</a:t>
+            </a:r>
+            <a:r>
+              <a:rPr lang="es-GT" sz="2000" i="1" dirty="0">
+                <a:latin typeface="Libre Franklin" pitchFamily="2" charset="0"/>
+              </a:rPr>
+              <a:t>Documento que presenta una revisión del estado actual de las discusiones así como de los estudios del sesgo inflacionaria hacia el alza en economías avanzadas. En el se expone las principales fuentes del sesgo inflacionario las cuales son:</a:t>
+            </a:r>
+          </a:p>
+          <a:p>
+            <a:pPr marL="896938" lvl="1" algn="just"/>
+            <a:endParaRPr lang="es-GT" sz="2000" i="1" dirty="0">
               <a:latin typeface="Libre Franklin" pitchFamily="2" charset="0"/>
             </a:endParaRPr>
           </a:p>
           <a:p>
-            <a:pPr algn="just"/>
-            <a:r>
-              <a:rPr lang="es-ES" dirty="0">
-                <a:latin typeface="Libre Franklin" pitchFamily="2" charset="0"/>
-              </a:rPr>
-              <a:t>Este tipo de sesgo sucede cuando la metodología es incapaz de distinguir los incrementos de precios por aumentos en la calidad, de incrementos asociados a presiones inflacionarias. Así, por ejemplo, la inflación podría sobreestimarse si los incrementos en los precios no son ajustados por mejoras en la calidad de los productos.</a:t>
-            </a:r>
-          </a:p>
-          <a:p>
-            <a:pPr algn="just"/>
-            <a:endParaRPr lang="es-ES" dirty="0">
-              <a:latin typeface="Libre Franklin" pitchFamily="2" charset="0"/>
-            </a:endParaRPr>
-          </a:p>
-          <a:p>
-            <a:pPr algn="just"/>
-            <a:r>
-              <a:rPr lang="es-ES" dirty="0">
-                <a:latin typeface="Libre Franklin" pitchFamily="2" charset="0"/>
-              </a:rPr>
-              <a:t>Este apartado no es trivial, estimaciones muestran que para Estados Unidos este factor contribuye con más de la mitad del error de medición en la inflación.</a:t>
-            </a:r>
-          </a:p>
-          <a:p>
-            <a:pPr algn="just"/>
-            <a:endParaRPr lang="es-ES" dirty="0">
-              <a:latin typeface="Libre Franklin" pitchFamily="2" charset="0"/>
-            </a:endParaRPr>
-          </a:p>
-          <a:p>
-            <a:pPr algn="just"/>
-            <a:r>
-              <a:rPr lang="es-ES" dirty="0">
-                <a:latin typeface="Libre Franklin" pitchFamily="2" charset="0"/>
-              </a:rPr>
-              <a:t>Mantener la inflación objetivo a cero hace susceptible la medición del IPC ante este tipo de sesgo.</a:t>
-            </a:r>
-            <a:endParaRPr lang="es-GT" dirty="0">
+            <a:pPr marL="896938" lvl="1" algn="just"/>
+            <a:r>
+              <a:rPr lang="es-GT" sz="2000" i="1" dirty="0">
+                <a:latin typeface="Libre Franklin" pitchFamily="2" charset="0"/>
+              </a:rPr>
+              <a:t>1- Sesgo de sustitución de nivel superior</a:t>
+            </a:r>
+          </a:p>
+          <a:p>
+            <a:pPr marL="896938" lvl="1" algn="just"/>
+            <a:r>
+              <a:rPr lang="es-GT" sz="2000" i="1" dirty="0">
+                <a:latin typeface="Libre Franklin" pitchFamily="2" charset="0"/>
+              </a:rPr>
+              <a:t>	              </a:t>
+            </a:r>
+            <a:r>
+              <a:rPr lang="es-GT" i="1" dirty="0">
+                <a:latin typeface="Libre Franklin" pitchFamily="2" charset="0"/>
+              </a:rPr>
+              <a:t>Tipo de sesgo que surge de la agregación de los índices de los productos. Ocurre cuando los índices superiores son agregados a partir de los índices de productos mediante promedios ponderados. Por ejemplo si dos productos son sustitutos y el precio de uno aumenta, es natural que suceda un cambio en la demanda hacia el bien más barato. Si la canasta se fija al valor previo al cambio, se da más peso al precio del producto que experimentó el aumento que a los gastos reales en la fase de agregación para el índice superior. En otras palabras, la incapacidad de capturar desplazamientos a otros bienes o servicios como consecuencia de aumento en los precios introduce un sesgo al alza en el índice de precios.</a:t>
+            </a:r>
+            <a:r>
+              <a:rPr lang="es-ES" sz="2000" i="1" dirty="0">
+                <a:latin typeface="Libre Franklin" pitchFamily="2" charset="0"/>
+              </a:rPr>
+              <a:t>”</a:t>
+            </a:r>
+            <a:endParaRPr lang="es-MX" sz="2000" dirty="0">
               <a:latin typeface="Libre Franklin" pitchFamily="2" charset="0"/>
             </a:endParaRPr>
           </a:p>
@@ -14061,7 +16342,7 @@
     </p:spTree>
     <p:extLst>
       <p:ext uri="{BB962C8B-B14F-4D97-AF65-F5344CB8AC3E}">
-        <p14:creationId xmlns:p14="http://schemas.microsoft.com/office/powerpoint/2010/main" val="1952798549"/>
+        <p14:creationId xmlns:p14="http://schemas.microsoft.com/office/powerpoint/2010/main" val="2290052308"/>
       </p:ext>
     </p:extLst>
   </p:cSld>
@@ -14071,18 +16352,12 @@
 </p:sld>
 </file>
 
-<file path=ppt/slides/slide9.xml><?xml version="1.0" encoding="utf-8"?>
+<file path=ppt/slides/slide8.xml><?xml version="1.0" encoding="utf-8"?>
 <p:sld xmlns:a="http://schemas.openxmlformats.org/drawingml/2006/main" xmlns:r="http://schemas.openxmlformats.org/officeDocument/2006/relationships" xmlns:p="http://schemas.openxmlformats.org/presentationml/2006/main">
   <p:cSld>
     <p:spTree>
       <p:nvGrpSpPr>
-        <p:cNvPr id="1" name="">
-          <a:extLst>
-            <a:ext uri="{FF2B5EF4-FFF2-40B4-BE49-F238E27FC236}">
-              <a16:creationId xmlns:a16="http://schemas.microsoft.com/office/drawing/2014/main" id="{7143CF66-944B-B561-38B7-8DB736A4C185}"/>
-            </a:ext>
-          </a:extLst>
-        </p:cNvPr>
+        <p:cNvPr id="1" name=""/>
         <p:cNvGrpSpPr/>
         <p:nvPr/>
       </p:nvGrpSpPr>
@@ -14099,7 +16374,7 @@
           <p:cNvPr id="2" name="Título 1">
             <a:extLst>
               <a:ext uri="{FF2B5EF4-FFF2-40B4-BE49-F238E27FC236}">
-                <a16:creationId xmlns:a16="http://schemas.microsoft.com/office/drawing/2014/main" id="{37F04B3B-3B77-3927-F643-CADCB5CB6A07}"/>
+                <a16:creationId xmlns:a16="http://schemas.microsoft.com/office/drawing/2014/main" id="{654E0456-9D0A-458C-8A2E-EC9E7705C955}"/>
               </a:ext>
             </a:extLst>
           </p:cNvPr>
@@ -14124,7 +16399,7 @@
           <p:cNvPr id="3" name="Subtítulo 2">
             <a:extLst>
               <a:ext uri="{FF2B5EF4-FFF2-40B4-BE49-F238E27FC236}">
-                <a16:creationId xmlns:a16="http://schemas.microsoft.com/office/drawing/2014/main" id="{80877F59-70BB-4F09-BE77-618E736FCE45}"/>
+                <a16:creationId xmlns:a16="http://schemas.microsoft.com/office/drawing/2014/main" id="{0D8893AB-0534-4B88-9B3D-6ABA4EB9FE3F}"/>
               </a:ext>
             </a:extLst>
           </p:cNvPr>
@@ -14149,7 +16424,7 @@
           <p:cNvPr id="6" name="Imagen 5">
             <a:extLst>
               <a:ext uri="{FF2B5EF4-FFF2-40B4-BE49-F238E27FC236}">
-                <a16:creationId xmlns:a16="http://schemas.microsoft.com/office/drawing/2014/main" id="{7FA0B3DE-4137-9B06-82DF-EAC23B62AA7D}"/>
+                <a16:creationId xmlns:a16="http://schemas.microsoft.com/office/drawing/2014/main" id="{0C209CE5-AFD2-4CA7-8D90-C1E60E946553}"/>
               </a:ext>
             </a:extLst>
           </p:cNvPr>
@@ -14185,7 +16460,7 @@
           <p:cNvPr id="7" name="CuadroTexto 6">
             <a:extLst>
               <a:ext uri="{FF2B5EF4-FFF2-40B4-BE49-F238E27FC236}">
-                <a16:creationId xmlns:a16="http://schemas.microsoft.com/office/drawing/2014/main" id="{7039E571-B296-0C93-28A1-AAE2F9E1937D}"/>
+                <a16:creationId xmlns:a16="http://schemas.microsoft.com/office/drawing/2014/main" id="{0BBF9201-58C7-4E4D-ABE8-980848FA6D59}"/>
               </a:ext>
             </a:extLst>
           </p:cNvPr>
@@ -14212,7 +16487,7 @@
               <a:rPr lang="es-ES" sz="2800" b="1" dirty="0">
                 <a:latin typeface="Libre Franklin" pitchFamily="2" charset="0"/>
               </a:rPr>
-              <a:t>Inconvenientes estadísticos de inflación cero</a:t>
+              <a:t>Bibliografía consultada</a:t>
             </a:r>
             <a:endParaRPr lang="es-GT" b="1" dirty="0">
               <a:latin typeface="Libre Franklin" pitchFamily="2" charset="0"/>
@@ -14225,7 +16500,7 @@
           <p:cNvPr id="8" name="Conector recto 7">
             <a:extLst>
               <a:ext uri="{FF2B5EF4-FFF2-40B4-BE49-F238E27FC236}">
-                <a16:creationId xmlns:a16="http://schemas.microsoft.com/office/drawing/2014/main" id="{9C4DC649-EC50-EA59-04D2-E1B33B9BF05D}"/>
+                <a16:creationId xmlns:a16="http://schemas.microsoft.com/office/drawing/2014/main" id="{41A554FA-D2F8-4E55-B343-5244ABC3AFF3}"/>
               </a:ext>
             </a:extLst>
           </p:cNvPr>
@@ -14237,7 +16512,7 @@
         <p:spPr>
           <a:xfrm>
             <a:off x="265471" y="730459"/>
-            <a:ext cx="7655036" cy="0"/>
+            <a:ext cx="6430297" cy="0"/>
           </a:xfrm>
           <a:prstGeom prst="line">
             <a:avLst/>
@@ -14265,10 +16540,10 @@
       </p:cxnSp>
       <p:sp>
         <p:nvSpPr>
-          <p:cNvPr id="4" name="CuadroTexto 3">
-            <a:extLst>
-              <a:ext uri="{FF2B5EF4-FFF2-40B4-BE49-F238E27FC236}">
-                <a16:creationId xmlns:a16="http://schemas.microsoft.com/office/drawing/2014/main" id="{133A1198-0B2D-C5C1-E75B-D3FA02C8518C}"/>
+          <p:cNvPr id="11" name="CuadroTexto 10">
+            <a:extLst>
+              <a:ext uri="{FF2B5EF4-FFF2-40B4-BE49-F238E27FC236}">
+                <a16:creationId xmlns:a16="http://schemas.microsoft.com/office/drawing/2014/main" id="{87D7D931-49AF-4697-AA0B-140B7ADA1D91}"/>
               </a:ext>
             </a:extLst>
           </p:cNvPr>
@@ -14277,8 +16552,8 @@
         </p:nvSpPr>
         <p:spPr>
           <a:xfrm>
-            <a:off x="490600" y="876271"/>
-            <a:ext cx="9899117" cy="400110"/>
+            <a:off x="165181" y="730459"/>
+            <a:ext cx="11546173" cy="4985980"/>
           </a:xfrm>
           <a:prstGeom prst="rect">
             <a:avLst/>
@@ -14291,96 +16566,174 @@
           </a:bodyPr>
           <a:lstStyle/>
           <a:p>
-            <a:r>
-              <a:rPr lang="es-ES" sz="2000" b="1" dirty="0">
-                <a:latin typeface="Libre Franklin" pitchFamily="2" charset="0"/>
-              </a:rPr>
-              <a:t>Sesgo por calidad de bienes nuevos</a:t>
-            </a:r>
-            <a:endParaRPr lang="es-ES" sz="2000" dirty="0">
+            <a:pPr marL="896938" lvl="1" algn="just"/>
+            <a:r>
+              <a:rPr lang="es-GT" sz="2000" i="1" dirty="0">
+                <a:latin typeface="Libre Franklin" pitchFamily="2" charset="0"/>
+              </a:rPr>
+              <a:t>2- Sesgo de sustitución de nivel inferior</a:t>
+            </a:r>
+          </a:p>
+          <a:p>
+            <a:pPr marL="896938" lvl="1" algn="just"/>
+            <a:r>
+              <a:rPr lang="es-GT" sz="2000" i="1" dirty="0">
+                <a:latin typeface="Libre Franklin" pitchFamily="2" charset="0"/>
+              </a:rPr>
+              <a:t>	              </a:t>
+            </a:r>
+            <a:r>
+              <a:rPr lang="es-GT" i="1" dirty="0">
+                <a:latin typeface="Libre Franklin" pitchFamily="2" charset="0"/>
+              </a:rPr>
+              <a:t>Sesgo que ocurre cuando la demanda se desplaza de un bien hacia otro y ambos pertenecen a un mismo índice de artículo. </a:t>
+            </a:r>
+            <a:r>
+              <a:rPr lang="es-ES" i="1" dirty="0">
+                <a:latin typeface="Libre Franklin" pitchFamily="2" charset="0"/>
+              </a:rPr>
+              <a:t>En particular, si la gama de cualidades (volumen, marca, función, etc.) de cada bien dentro del mismo índice de artículos es amplia, puede haber  diferencias en el nivel de precios (o nivel del índice) de cada una de las marcas o productos encuestados. En tales casos, cuando se utilizan métodos de agregación como las medias aritméticas simples, se da mayor peso a los movimientos de los precios con niveles de precios o niveles de índice más altos. </a:t>
+            </a:r>
+            <a:endParaRPr lang="es-GT" sz="2000" i="1" dirty="0">
               <a:latin typeface="Libre Franklin" pitchFamily="2" charset="0"/>
             </a:endParaRPr>
           </a:p>
-        </p:txBody>
-      </p:sp>
-      <p:sp>
-        <p:nvSpPr>
-          <p:cNvPr id="15" name="CuadroTexto 14">
-            <a:extLst>
-              <a:ext uri="{FF2B5EF4-FFF2-40B4-BE49-F238E27FC236}">
-                <a16:creationId xmlns:a16="http://schemas.microsoft.com/office/drawing/2014/main" id="{61BA88B2-CCD0-DFD2-961F-5CAC23F99EB0}"/>
-              </a:ext>
-            </a:extLst>
-          </p:cNvPr>
-          <p:cNvSpPr txBox="1"/>
-          <p:nvPr/>
-        </p:nvSpPr>
-        <p:spPr>
-          <a:xfrm>
-            <a:off x="5605658" y="1368456"/>
-            <a:ext cx="6049722" cy="3416320"/>
-          </a:xfrm>
-          <a:prstGeom prst="rect">
-            <a:avLst/>
-          </a:prstGeom>
-          <a:noFill/>
-        </p:spPr>
-        <p:txBody>
-          <a:bodyPr wrap="square">
-            <a:spAutoFit/>
-          </a:bodyPr>
-          <a:lstStyle/>
-          <a:p>
-            <a:pPr algn="just"/>
-            <a:r>
-              <a:rPr lang="es-ES" dirty="0">
-                <a:latin typeface="Libre Franklin" pitchFamily="2" charset="0"/>
-              </a:rPr>
-              <a:t>En lo que refiere a Guatemala, el INE ha señalado que este ha sido uno de los apartados que tomó en cuenta para la base 2023, indicando que: </a:t>
-            </a:r>
-          </a:p>
-          <a:p>
-            <a:pPr algn="just"/>
-            <a:endParaRPr lang="es-ES" i="1" dirty="0">
+          <a:p>
+            <a:pPr marL="896938" lvl="1" algn="just"/>
+            <a:r>
+              <a:rPr lang="es-GT" sz="2000" i="1" dirty="0">
+                <a:latin typeface="Libre Franklin" pitchFamily="2" charset="0"/>
+              </a:rPr>
+              <a:t>		</a:t>
+            </a:r>
+          </a:p>
+          <a:p>
+            <a:pPr marL="896938" lvl="1" algn="just"/>
+            <a:r>
+              <a:rPr lang="es-GT" sz="2000" i="1" dirty="0">
+                <a:latin typeface="Libre Franklin" pitchFamily="2" charset="0"/>
+              </a:rPr>
+              <a:t>3- Sesgo por productos nuevos</a:t>
+            </a:r>
+          </a:p>
+          <a:p>
+            <a:pPr marL="896938" lvl="1" algn="just"/>
+            <a:r>
+              <a:rPr lang="es-GT" sz="2000" i="1" dirty="0">
+                <a:latin typeface="Libre Franklin" pitchFamily="2" charset="0"/>
+              </a:rPr>
+              <a:t>		</a:t>
+            </a:r>
+            <a:r>
+              <a:rPr lang="es-GT" i="1" dirty="0">
+                <a:latin typeface="Libre Franklin" pitchFamily="2" charset="0"/>
+              </a:rPr>
+              <a:t>Este sesgo</a:t>
+            </a:r>
+            <a:r>
+              <a:rPr lang="es-ES" i="1" dirty="0">
+                <a:latin typeface="Libre Franklin" pitchFamily="2" charset="0"/>
+              </a:rPr>
+              <a:t> se define como uno de los errores estadísticos asociados con la inclusión continua de productos que han perdido su representatividad, así como con la omisión de nuevas formas de bienes y servicios. En comparación con los productos más antiguos, los nuevos suelen ser de mayor calidad por el mismo precio, lo que significa que los precios ajustados por calidad de los nuevos son más bajos. Por lo tanto, si los nuevos productos no pueden incluirse en las estadísticas, el índice no puede reflejar la «diferencia de nivel de precios entre los productos antiguos y los nuevos» o la «reducción de precios inmediatamente después del lanzamiento de un nuevo producto», lo que puede provocar un sesgo al alza.</a:t>
+            </a:r>
+            <a:r>
+              <a:rPr lang="es-ES" sz="2000" i="1" dirty="0">
+                <a:latin typeface="Libre Franklin" pitchFamily="2" charset="0"/>
+              </a:rPr>
+              <a:t>”</a:t>
+            </a:r>
+            <a:endParaRPr lang="es-MX" sz="2000" dirty="0">
               <a:latin typeface="Libre Franklin" pitchFamily="2" charset="0"/>
             </a:endParaRPr>
           </a:p>
-          <a:p>
-            <a:pPr algn="just"/>
-            <a:r>
-              <a:rPr lang="es-ES" i="1" dirty="0">
-                <a:latin typeface="Libre Franklin" pitchFamily="2" charset="0"/>
-              </a:rPr>
-              <a:t>“</a:t>
-            </a:r>
-            <a:r>
-              <a:rPr lang="es-GT" i="1" dirty="0">
-                <a:latin typeface="Libre Franklin" pitchFamily="2" charset="0"/>
-              </a:rPr>
-              <a:t>Para cumplir con la recomendación el INE elaboró un documento de especificaciones para cada bien o servicio, que es de uso interno y se realizó un proceso de capacitación para todo el personal de campo”</a:t>
-            </a:r>
-          </a:p>
-          <a:p>
-            <a:endParaRPr lang="es-GT" i="1" dirty="0">
-              <a:latin typeface="Libre Franklin" pitchFamily="2" charset="0"/>
-            </a:endParaRPr>
-          </a:p>
-          <a:p>
-            <a:r>
-              <a:rPr lang="es-GT" dirty="0">
-                <a:latin typeface="Libre Franklin" pitchFamily="2" charset="0"/>
-              </a:rPr>
-              <a:t>Aunque se desconoce el grado en el que esta medida corrige el sesgo puesto que no se cuentan con estudios al respecto.</a:t>
-            </a:r>
+        </p:txBody>
+      </p:sp>
+    </p:spTree>
+    <p:extLst>
+      <p:ext uri="{BB962C8B-B14F-4D97-AF65-F5344CB8AC3E}">
+        <p14:creationId xmlns:p14="http://schemas.microsoft.com/office/powerpoint/2010/main" val="144817304"/>
+      </p:ext>
+    </p:extLst>
+  </p:cSld>
+  <p:clrMapOvr>
+    <a:masterClrMapping/>
+  </p:clrMapOvr>
+</p:sld>
+</file>
+
+<file path=ppt/slides/slide9.xml><?xml version="1.0" encoding="utf-8"?>
+<p:sld xmlns:a="http://schemas.openxmlformats.org/drawingml/2006/main" xmlns:r="http://schemas.openxmlformats.org/officeDocument/2006/relationships" xmlns:p="http://schemas.openxmlformats.org/presentationml/2006/main">
+  <p:cSld>
+    <p:spTree>
+      <p:nvGrpSpPr>
+        <p:cNvPr id="1" name=""/>
+        <p:cNvGrpSpPr/>
+        <p:nvPr/>
+      </p:nvGrpSpPr>
+      <p:grpSpPr>
+        <a:xfrm>
+          <a:off x="0" y="0"/>
+          <a:ext cx="0" cy="0"/>
+          <a:chOff x="0" y="0"/>
+          <a:chExt cx="0" cy="0"/>
+        </a:xfrm>
+      </p:grpSpPr>
+      <p:sp>
+        <p:nvSpPr>
+          <p:cNvPr id="2" name="Título 1">
+            <a:extLst>
+              <a:ext uri="{FF2B5EF4-FFF2-40B4-BE49-F238E27FC236}">
+                <a16:creationId xmlns:a16="http://schemas.microsoft.com/office/drawing/2014/main" id="{654E0456-9D0A-458C-8A2E-EC9E7705C955}"/>
+              </a:ext>
+            </a:extLst>
+          </p:cNvPr>
+          <p:cNvSpPr>
+            <a:spLocks noGrp="1"/>
+          </p:cNvSpPr>
+          <p:nvPr>
+            <p:ph type="ctrTitle"/>
+          </p:nvPr>
+        </p:nvSpPr>
+        <p:spPr/>
+        <p:txBody>
+          <a:bodyPr/>
+          <a:lstStyle/>
+          <a:p>
+            <a:endParaRPr lang="es-GT"/>
+          </a:p>
+        </p:txBody>
+      </p:sp>
+      <p:sp>
+        <p:nvSpPr>
+          <p:cNvPr id="3" name="Subtítulo 2">
+            <a:extLst>
+              <a:ext uri="{FF2B5EF4-FFF2-40B4-BE49-F238E27FC236}">
+                <a16:creationId xmlns:a16="http://schemas.microsoft.com/office/drawing/2014/main" id="{0D8893AB-0534-4B88-9B3D-6ABA4EB9FE3F}"/>
+              </a:ext>
+            </a:extLst>
+          </p:cNvPr>
+          <p:cNvSpPr>
+            <a:spLocks noGrp="1"/>
+          </p:cNvSpPr>
+          <p:nvPr>
+            <p:ph type="subTitle" idx="1"/>
+          </p:nvPr>
+        </p:nvSpPr>
+        <p:spPr/>
+        <p:txBody>
+          <a:bodyPr/>
+          <a:lstStyle/>
+          <a:p>
+            <a:endParaRPr lang="es-GT"/>
           </a:p>
         </p:txBody>
       </p:sp>
       <p:pic>
         <p:nvPicPr>
-          <p:cNvPr id="9" name="Imagen 8">
-            <a:extLst>
-              <a:ext uri="{FF2B5EF4-FFF2-40B4-BE49-F238E27FC236}">
-                <a16:creationId xmlns:a16="http://schemas.microsoft.com/office/drawing/2014/main" id="{09DA5230-79CD-0B37-FE0F-3013A3589A1E}"/>
+          <p:cNvPr id="6" name="Imagen 5">
+            <a:extLst>
+              <a:ext uri="{FF2B5EF4-FFF2-40B4-BE49-F238E27FC236}">
+                <a16:creationId xmlns:a16="http://schemas.microsoft.com/office/drawing/2014/main" id="{0C209CE5-AFD2-4CA7-8D90-C1E60E946553}"/>
               </a:ext>
             </a:extLst>
           </p:cNvPr>
@@ -14390,15 +16743,21 @@
           <p:nvPr/>
         </p:nvPicPr>
         <p:blipFill>
-          <a:blip r:embed="rId3"/>
+          <a:blip r:embed="rId2">
+            <a:extLst>
+              <a:ext uri="{28A0092B-C50C-407E-A947-70E740481C1C}">
+                <a14:useLocalDpi xmlns:a14="http://schemas.microsoft.com/office/drawing/2010/main" val="0"/>
+              </a:ext>
+            </a:extLst>
+          </a:blip>
           <a:stretch>
             <a:fillRect/>
           </a:stretch>
         </p:blipFill>
         <p:spPr>
           <a:xfrm>
-            <a:off x="418081" y="1368456"/>
-            <a:ext cx="5022077" cy="2787765"/>
+            <a:off x="-9832" y="0"/>
+            <a:ext cx="12192000" cy="6858000"/>
           </a:xfrm>
           <a:prstGeom prst="rect">
             <a:avLst/>
@@ -14407,10 +16766,10 @@
       </p:pic>
       <p:sp>
         <p:nvSpPr>
-          <p:cNvPr id="10" name="CuadroTexto 9">
-            <a:extLst>
-              <a:ext uri="{FF2B5EF4-FFF2-40B4-BE49-F238E27FC236}">
-                <a16:creationId xmlns:a16="http://schemas.microsoft.com/office/drawing/2014/main" id="{2644B7C1-71CC-63A2-21F4-6C6550EE22F7}"/>
+          <p:cNvPr id="7" name="CuadroTexto 6">
+            <a:extLst>
+              <a:ext uri="{FF2B5EF4-FFF2-40B4-BE49-F238E27FC236}">
+                <a16:creationId xmlns:a16="http://schemas.microsoft.com/office/drawing/2014/main" id="{0BBF9201-58C7-4E4D-ABE8-980848FA6D59}"/>
               </a:ext>
             </a:extLst>
           </p:cNvPr>
@@ -14419,8 +16778,8 @@
         </p:nvSpPr>
         <p:spPr>
           <a:xfrm>
-            <a:off x="413788" y="4124494"/>
-            <a:ext cx="4943823" cy="276999"/>
+            <a:off x="165181" y="207239"/>
+            <a:ext cx="9899117" cy="523220"/>
           </a:xfrm>
           <a:prstGeom prst="rect">
             <a:avLst/>
@@ -14428,28 +16787,129 @@
           <a:noFill/>
         </p:spPr>
         <p:txBody>
-          <a:bodyPr wrap="square">
+          <a:bodyPr wrap="square" rtlCol="0">
             <a:spAutoFit/>
           </a:bodyPr>
           <a:lstStyle/>
           <a:p>
-            <a:pPr algn="just"/>
-            <a:r>
-              <a:rPr lang="es-ES" sz="1200" dirty="0">
-                <a:latin typeface="Libre Franklin" pitchFamily="2" charset="0"/>
-              </a:rPr>
-              <a:t>Fuente: Instituto Nacional de Estadística (INE)</a:t>
-            </a:r>
-            <a:endParaRPr lang="es-GT" sz="1200" dirty="0">
+            <a:r>
+              <a:rPr lang="es-ES" sz="2800" b="1" dirty="0">
+                <a:latin typeface="Libre Franklin" pitchFamily="2" charset="0"/>
+              </a:rPr>
+              <a:t>Bibliografía consultada</a:t>
+            </a:r>
+            <a:endParaRPr lang="es-GT" b="1" dirty="0">
               <a:latin typeface="Libre Franklin" pitchFamily="2" charset="0"/>
             </a:endParaRPr>
+          </a:p>
+        </p:txBody>
+      </p:sp>
+      <p:cxnSp>
+        <p:nvCxnSpPr>
+          <p:cNvPr id="8" name="Conector recto 7">
+            <a:extLst>
+              <a:ext uri="{FF2B5EF4-FFF2-40B4-BE49-F238E27FC236}">
+                <a16:creationId xmlns:a16="http://schemas.microsoft.com/office/drawing/2014/main" id="{41A554FA-D2F8-4E55-B343-5244ABC3AFF3}"/>
+              </a:ext>
+            </a:extLst>
+          </p:cNvPr>
+          <p:cNvCxnSpPr>
+            <a:cxnSpLocks/>
+          </p:cNvCxnSpPr>
+          <p:nvPr/>
+        </p:nvCxnSpPr>
+        <p:spPr>
+          <a:xfrm>
+            <a:off x="265471" y="730459"/>
+            <a:ext cx="6430297" cy="0"/>
+          </a:xfrm>
+          <a:prstGeom prst="line">
+            <a:avLst/>
+          </a:prstGeom>
+          <a:ln w="38100">
+            <a:solidFill>
+              <a:srgbClr val="FF7F00"/>
+            </a:solidFill>
+          </a:ln>
+        </p:spPr>
+        <p:style>
+          <a:lnRef idx="1">
+            <a:schemeClr val="accent1"/>
+          </a:lnRef>
+          <a:fillRef idx="0">
+            <a:schemeClr val="accent1"/>
+          </a:fillRef>
+          <a:effectRef idx="0">
+            <a:schemeClr val="accent1"/>
+          </a:effectRef>
+          <a:fontRef idx="minor">
+            <a:schemeClr val="tx1"/>
+          </a:fontRef>
+        </p:style>
+      </p:cxnSp>
+      <p:sp>
+        <p:nvSpPr>
+          <p:cNvPr id="11" name="CuadroTexto 10">
+            <a:extLst>
+              <a:ext uri="{FF2B5EF4-FFF2-40B4-BE49-F238E27FC236}">
+                <a16:creationId xmlns:a16="http://schemas.microsoft.com/office/drawing/2014/main" id="{87D7D931-49AF-4697-AA0B-140B7ADA1D91}"/>
+              </a:ext>
+            </a:extLst>
+          </p:cNvPr>
+          <p:cNvSpPr txBox="1"/>
+          <p:nvPr/>
+        </p:nvSpPr>
+        <p:spPr>
+          <a:xfrm>
+            <a:off x="165181" y="730459"/>
+            <a:ext cx="11546173" cy="1569660"/>
+          </a:xfrm>
+          <a:prstGeom prst="rect">
+            <a:avLst/>
+          </a:prstGeom>
+          <a:noFill/>
+        </p:spPr>
+        <p:txBody>
+          <a:bodyPr wrap="square" rtlCol="0">
+            <a:spAutoFit/>
+          </a:bodyPr>
+          <a:lstStyle/>
+          <a:p>
+            <a:pPr marL="896938" lvl="1" algn="just"/>
+            <a:r>
+              <a:rPr lang="es-GT" sz="2000" i="1" dirty="0">
+                <a:latin typeface="Libre Franklin" pitchFamily="2" charset="0"/>
+              </a:rPr>
+              <a:t>“4-  Sesgo por cambios en los puntos de comercialización</a:t>
+            </a:r>
+          </a:p>
+          <a:p>
+            <a:pPr marL="896938" lvl="1" algn="just"/>
+            <a:r>
+              <a:rPr lang="es-GT" sz="2000" i="1" dirty="0">
+                <a:latin typeface="Libre Franklin" pitchFamily="2" charset="0"/>
+              </a:rPr>
+              <a:t>		</a:t>
+            </a:r>
+            <a:r>
+              <a:rPr lang="es-ES" i="1" dirty="0">
+                <a:latin typeface="Libre Franklin" pitchFamily="2" charset="0"/>
+              </a:rPr>
+              <a:t>Es uno de los errores de medición asociados con los cambios en los puntos de comercialización. Este sesgo se produce cuando los consumidores se desplazan hacia puntos de venta y canales de distribución que venden y ofrecen bienes y servicios a precios más bajos y en formatos de venta de mayor calidad, y cuando el IPC no logra captar estos movimientos.</a:t>
+            </a:r>
+            <a:r>
+              <a:rPr lang="es-ES" sz="2000" i="1" dirty="0">
+                <a:latin typeface="Libre Franklin" pitchFamily="2" charset="0"/>
+              </a:rPr>
+              <a:t>”</a:t>
+            </a:r>
           </a:p>
         </p:txBody>
       </p:sp>
     </p:spTree>
     <p:extLst>
       <p:ext uri="{BB962C8B-B14F-4D97-AF65-F5344CB8AC3E}">
-        <p14:creationId xmlns:p14="http://schemas.microsoft.com/office/powerpoint/2010/main" val="4036590644"/>
+        <p14:creationId xmlns:p14="http://schemas.microsoft.com/office/powerpoint/2010/main" val="3820876230"/>
       </p:ext>
     </p:extLst>
   </p:cSld>
